--- a/docs/pptx/whole/jx-egfr-diffpct-hist.pptx
+++ b/docs/pptx/whole/jx-egfr-diffpct-hist.pptx
@@ -2271,21 +2271,21 @@
           </p:nvSpPr>
           <p:spPr>
             <a:xfrm>
-              <a:off x="1113155" y="5054515"/>
-              <a:ext cx="7485076" cy="0"/>
+              <a:off x="915645" y="5130009"/>
+              <a:ext cx="7682587" cy="0"/>
             </a:xfrm>
             <a:custGeom>
               <a:avLst/>
               <a:pathLst>
-                <a:path w="7485076" h="0">
+                <a:path w="7682587" h="0">
                   <a:moveTo>
                     <a:pt x="0" y="0"/>
                   </a:moveTo>
                   <a:lnTo>
-                    <a:pt x="7485076" y="0"/>
+                    <a:pt x="7682587" y="0"/>
                   </a:lnTo>
                   <a:lnTo>
-                    <a:pt x="7485076" y="0"/>
+                    <a:pt x="7682587" y="0"/>
                   </a:lnTo>
                 </a:path>
               </a:pathLst>
@@ -2314,21 +2314,21 @@
           </p:nvSpPr>
           <p:spPr>
             <a:xfrm>
-              <a:off x="1113155" y="4267443"/>
-              <a:ext cx="7485076" cy="0"/>
+              <a:off x="915645" y="4493927"/>
+              <a:ext cx="7682587" cy="0"/>
             </a:xfrm>
             <a:custGeom>
               <a:avLst/>
               <a:pathLst>
-                <a:path w="7485076" h="0">
+                <a:path w="7682587" h="0">
                   <a:moveTo>
                     <a:pt x="0" y="0"/>
                   </a:moveTo>
                   <a:lnTo>
-                    <a:pt x="7485076" y="0"/>
+                    <a:pt x="7682587" y="0"/>
                   </a:lnTo>
                   <a:lnTo>
-                    <a:pt x="7485076" y="0"/>
+                    <a:pt x="7682587" y="0"/>
                   </a:lnTo>
                 </a:path>
               </a:pathLst>
@@ -2357,21 +2357,21 @@
           </p:nvSpPr>
           <p:spPr>
             <a:xfrm>
-              <a:off x="1113155" y="3480371"/>
-              <a:ext cx="7485076" cy="0"/>
+              <a:off x="915645" y="3857844"/>
+              <a:ext cx="7682587" cy="0"/>
             </a:xfrm>
             <a:custGeom>
               <a:avLst/>
               <a:pathLst>
-                <a:path w="7485076" h="0">
+                <a:path w="7682587" h="0">
                   <a:moveTo>
                     <a:pt x="0" y="0"/>
                   </a:moveTo>
                   <a:lnTo>
-                    <a:pt x="7485076" y="0"/>
+                    <a:pt x="7682587" y="0"/>
                   </a:lnTo>
                   <a:lnTo>
-                    <a:pt x="7485076" y="0"/>
+                    <a:pt x="7682587" y="0"/>
                   </a:lnTo>
                 </a:path>
               </a:pathLst>
@@ -2400,21 +2400,21 @@
           </p:nvSpPr>
           <p:spPr>
             <a:xfrm>
-              <a:off x="1113155" y="2693299"/>
-              <a:ext cx="7485076" cy="0"/>
+              <a:off x="915645" y="3221761"/>
+              <a:ext cx="7682587" cy="0"/>
             </a:xfrm>
             <a:custGeom>
               <a:avLst/>
               <a:pathLst>
-                <a:path w="7485076" h="0">
+                <a:path w="7682587" h="0">
                   <a:moveTo>
                     <a:pt x="0" y="0"/>
                   </a:moveTo>
                   <a:lnTo>
-                    <a:pt x="7485076" y="0"/>
+                    <a:pt x="7682587" y="0"/>
                   </a:lnTo>
                   <a:lnTo>
-                    <a:pt x="7485076" y="0"/>
+                    <a:pt x="7682587" y="0"/>
                   </a:lnTo>
                 </a:path>
               </a:pathLst>
@@ -2443,7 +2443,50 @@
           </p:nvSpPr>
           <p:spPr>
             <a:xfrm>
-              <a:off x="2965522" y="1977589"/>
+              <a:off x="915645" y="2585678"/>
+              <a:ext cx="7682587" cy="0"/>
+            </a:xfrm>
+            <a:custGeom>
+              <a:avLst/>
+              <a:pathLst>
+                <a:path w="7682587" h="0">
+                  <a:moveTo>
+                    <a:pt x="0" y="0"/>
+                  </a:moveTo>
+                  <a:lnTo>
+                    <a:pt x="7682587" y="0"/>
+                  </a:lnTo>
+                  <a:lnTo>
+                    <a:pt x="7682587" y="0"/>
+                  </a:lnTo>
+                </a:path>
+              </a:pathLst>
+            </a:custGeom>
+            <a:ln w="8623" cap="flat">
+              <a:solidFill>
+                <a:srgbClr val="EBEBEB">
+                  <a:alpha val="100000"/>
+                </a:srgbClr>
+              </a:solidFill>
+              <a:prstDash val="solid"/>
+              <a:round/>
+            </a:ln>
+          </p:spPr>
+          <p:txBody>
+            <a:bodyPr/>
+            <a:lstStyle/>
+            <a:p/>
+          </p:txBody>
+        </p:sp>
+        <p:sp>
+          <p:nvSpPr>
+            <p:cNvPr id="9" name="pl9"/>
+            <p:cNvSpPr/>
+            <p:nvPr/>
+          </p:nvSpPr>
+          <p:spPr>
+            <a:xfrm>
+              <a:off x="1316974" y="1977589"/>
               <a:ext cx="0" cy="3635721"/>
             </a:xfrm>
             <a:custGeom>
@@ -2480,13 +2523,13 @@
         </p:sp>
         <p:sp>
           <p:nvSpPr>
-            <p:cNvPr id="9" name="pl9"/>
-            <p:cNvSpPr/>
-            <p:nvPr/>
-          </p:nvSpPr>
-          <p:spPr>
-            <a:xfrm>
-              <a:off x="5485750" y="1977589"/>
+            <p:cNvPr id="10" name="pl10"/>
+            <p:cNvSpPr/>
+            <p:nvPr/>
+          </p:nvSpPr>
+          <p:spPr>
+            <a:xfrm>
+              <a:off x="1838180" y="1977589"/>
               <a:ext cx="0" cy="3635721"/>
             </a:xfrm>
             <a:custGeom>
@@ -2523,13 +2566,13 @@
         </p:sp>
         <p:sp>
           <p:nvSpPr>
-            <p:cNvPr id="10" name="pl10"/>
-            <p:cNvSpPr/>
-            <p:nvPr/>
-          </p:nvSpPr>
-          <p:spPr>
-            <a:xfrm>
-              <a:off x="8005978" y="1977589"/>
+            <p:cNvPr id="11" name="pl11"/>
+            <p:cNvSpPr/>
+            <p:nvPr/>
+          </p:nvSpPr>
+          <p:spPr>
+            <a:xfrm>
+              <a:off x="2359387" y="1977589"/>
               <a:ext cx="0" cy="3635721"/>
             </a:xfrm>
             <a:custGeom>
@@ -2566,27 +2609,500 @@
         </p:sp>
         <p:sp>
           <p:nvSpPr>
-            <p:cNvPr id="11" name="pl11"/>
-            <p:cNvSpPr/>
-            <p:nvPr/>
-          </p:nvSpPr>
-          <p:spPr>
-            <a:xfrm>
-              <a:off x="1113155" y="5448051"/>
-              <a:ext cx="7485076" cy="0"/>
+            <p:cNvPr id="12" name="pl12"/>
+            <p:cNvSpPr/>
+            <p:nvPr/>
+          </p:nvSpPr>
+          <p:spPr>
+            <a:xfrm>
+              <a:off x="2880594" y="1977589"/>
+              <a:ext cx="0" cy="3635721"/>
             </a:xfrm>
             <a:custGeom>
               <a:avLst/>
               <a:pathLst>
-                <a:path w="7485076" h="0">
+                <a:path w="0" h="3635721">
+                  <a:moveTo>
+                    <a:pt x="0" y="3635721"/>
+                  </a:moveTo>
+                  <a:lnTo>
+                    <a:pt x="0" y="0"/>
+                  </a:lnTo>
+                  <a:lnTo>
+                    <a:pt x="0" y="0"/>
+                  </a:lnTo>
+                </a:path>
+              </a:pathLst>
+            </a:custGeom>
+            <a:ln w="8623" cap="flat">
+              <a:solidFill>
+                <a:srgbClr val="EBEBEB">
+                  <a:alpha val="100000"/>
+                </a:srgbClr>
+              </a:solidFill>
+              <a:prstDash val="solid"/>
+              <a:round/>
+            </a:ln>
+          </p:spPr>
+          <p:txBody>
+            <a:bodyPr/>
+            <a:lstStyle/>
+            <a:p/>
+          </p:txBody>
+        </p:sp>
+        <p:sp>
+          <p:nvSpPr>
+            <p:cNvPr id="13" name="pl13"/>
+            <p:cNvSpPr/>
+            <p:nvPr/>
+          </p:nvSpPr>
+          <p:spPr>
+            <a:xfrm>
+              <a:off x="3401801" y="1977589"/>
+              <a:ext cx="0" cy="3635721"/>
+            </a:xfrm>
+            <a:custGeom>
+              <a:avLst/>
+              <a:pathLst>
+                <a:path w="0" h="3635721">
+                  <a:moveTo>
+                    <a:pt x="0" y="3635721"/>
+                  </a:moveTo>
+                  <a:lnTo>
+                    <a:pt x="0" y="0"/>
+                  </a:lnTo>
+                  <a:lnTo>
+                    <a:pt x="0" y="0"/>
+                  </a:lnTo>
+                </a:path>
+              </a:pathLst>
+            </a:custGeom>
+            <a:ln w="8623" cap="flat">
+              <a:solidFill>
+                <a:srgbClr val="EBEBEB">
+                  <a:alpha val="100000"/>
+                </a:srgbClr>
+              </a:solidFill>
+              <a:prstDash val="solid"/>
+              <a:round/>
+            </a:ln>
+          </p:spPr>
+          <p:txBody>
+            <a:bodyPr/>
+            <a:lstStyle/>
+            <a:p/>
+          </p:txBody>
+        </p:sp>
+        <p:sp>
+          <p:nvSpPr>
+            <p:cNvPr id="14" name="pl14"/>
+            <p:cNvSpPr/>
+            <p:nvPr/>
+          </p:nvSpPr>
+          <p:spPr>
+            <a:xfrm>
+              <a:off x="3923007" y="1977589"/>
+              <a:ext cx="0" cy="3635721"/>
+            </a:xfrm>
+            <a:custGeom>
+              <a:avLst/>
+              <a:pathLst>
+                <a:path w="0" h="3635721">
+                  <a:moveTo>
+                    <a:pt x="0" y="3635721"/>
+                  </a:moveTo>
+                  <a:lnTo>
+                    <a:pt x="0" y="0"/>
+                  </a:lnTo>
+                  <a:lnTo>
+                    <a:pt x="0" y="0"/>
+                  </a:lnTo>
+                </a:path>
+              </a:pathLst>
+            </a:custGeom>
+            <a:ln w="8623" cap="flat">
+              <a:solidFill>
+                <a:srgbClr val="EBEBEB">
+                  <a:alpha val="100000"/>
+                </a:srgbClr>
+              </a:solidFill>
+              <a:prstDash val="solid"/>
+              <a:round/>
+            </a:ln>
+          </p:spPr>
+          <p:txBody>
+            <a:bodyPr/>
+            <a:lstStyle/>
+            <a:p/>
+          </p:txBody>
+        </p:sp>
+        <p:sp>
+          <p:nvSpPr>
+            <p:cNvPr id="15" name="pl15"/>
+            <p:cNvSpPr/>
+            <p:nvPr/>
+          </p:nvSpPr>
+          <p:spPr>
+            <a:xfrm>
+              <a:off x="4444214" y="1977589"/>
+              <a:ext cx="0" cy="3635721"/>
+            </a:xfrm>
+            <a:custGeom>
+              <a:avLst/>
+              <a:pathLst>
+                <a:path w="0" h="3635721">
+                  <a:moveTo>
+                    <a:pt x="0" y="3635721"/>
+                  </a:moveTo>
+                  <a:lnTo>
+                    <a:pt x="0" y="0"/>
+                  </a:lnTo>
+                  <a:lnTo>
+                    <a:pt x="0" y="0"/>
+                  </a:lnTo>
+                </a:path>
+              </a:pathLst>
+            </a:custGeom>
+            <a:ln w="8623" cap="flat">
+              <a:solidFill>
+                <a:srgbClr val="EBEBEB">
+                  <a:alpha val="100000"/>
+                </a:srgbClr>
+              </a:solidFill>
+              <a:prstDash val="solid"/>
+              <a:round/>
+            </a:ln>
+          </p:spPr>
+          <p:txBody>
+            <a:bodyPr/>
+            <a:lstStyle/>
+            <a:p/>
+          </p:txBody>
+        </p:sp>
+        <p:sp>
+          <p:nvSpPr>
+            <p:cNvPr id="16" name="pl16"/>
+            <p:cNvSpPr/>
+            <p:nvPr/>
+          </p:nvSpPr>
+          <p:spPr>
+            <a:xfrm>
+              <a:off x="4965421" y="1977589"/>
+              <a:ext cx="0" cy="3635721"/>
+            </a:xfrm>
+            <a:custGeom>
+              <a:avLst/>
+              <a:pathLst>
+                <a:path w="0" h="3635721">
+                  <a:moveTo>
+                    <a:pt x="0" y="3635721"/>
+                  </a:moveTo>
+                  <a:lnTo>
+                    <a:pt x="0" y="0"/>
+                  </a:lnTo>
+                  <a:lnTo>
+                    <a:pt x="0" y="0"/>
+                  </a:lnTo>
+                </a:path>
+              </a:pathLst>
+            </a:custGeom>
+            <a:ln w="8623" cap="flat">
+              <a:solidFill>
+                <a:srgbClr val="EBEBEB">
+                  <a:alpha val="100000"/>
+                </a:srgbClr>
+              </a:solidFill>
+              <a:prstDash val="solid"/>
+              <a:round/>
+            </a:ln>
+          </p:spPr>
+          <p:txBody>
+            <a:bodyPr/>
+            <a:lstStyle/>
+            <a:p/>
+          </p:txBody>
+        </p:sp>
+        <p:sp>
+          <p:nvSpPr>
+            <p:cNvPr id="17" name="pl17"/>
+            <p:cNvSpPr/>
+            <p:nvPr/>
+          </p:nvSpPr>
+          <p:spPr>
+            <a:xfrm>
+              <a:off x="5486627" y="1977589"/>
+              <a:ext cx="0" cy="3635721"/>
+            </a:xfrm>
+            <a:custGeom>
+              <a:avLst/>
+              <a:pathLst>
+                <a:path w="0" h="3635721">
+                  <a:moveTo>
+                    <a:pt x="0" y="3635721"/>
+                  </a:moveTo>
+                  <a:lnTo>
+                    <a:pt x="0" y="0"/>
+                  </a:lnTo>
+                  <a:lnTo>
+                    <a:pt x="0" y="0"/>
+                  </a:lnTo>
+                </a:path>
+              </a:pathLst>
+            </a:custGeom>
+            <a:ln w="8623" cap="flat">
+              <a:solidFill>
+                <a:srgbClr val="EBEBEB">
+                  <a:alpha val="100000"/>
+                </a:srgbClr>
+              </a:solidFill>
+              <a:prstDash val="solid"/>
+              <a:round/>
+            </a:ln>
+          </p:spPr>
+          <p:txBody>
+            <a:bodyPr/>
+            <a:lstStyle/>
+            <a:p/>
+          </p:txBody>
+        </p:sp>
+        <p:sp>
+          <p:nvSpPr>
+            <p:cNvPr id="18" name="pl18"/>
+            <p:cNvSpPr/>
+            <p:nvPr/>
+          </p:nvSpPr>
+          <p:spPr>
+            <a:xfrm>
+              <a:off x="6007834" y="1977589"/>
+              <a:ext cx="0" cy="3635721"/>
+            </a:xfrm>
+            <a:custGeom>
+              <a:avLst/>
+              <a:pathLst>
+                <a:path w="0" h="3635721">
+                  <a:moveTo>
+                    <a:pt x="0" y="3635721"/>
+                  </a:moveTo>
+                  <a:lnTo>
+                    <a:pt x="0" y="0"/>
+                  </a:lnTo>
+                  <a:lnTo>
+                    <a:pt x="0" y="0"/>
+                  </a:lnTo>
+                </a:path>
+              </a:pathLst>
+            </a:custGeom>
+            <a:ln w="8623" cap="flat">
+              <a:solidFill>
+                <a:srgbClr val="EBEBEB">
+                  <a:alpha val="100000"/>
+                </a:srgbClr>
+              </a:solidFill>
+              <a:prstDash val="solid"/>
+              <a:round/>
+            </a:ln>
+          </p:spPr>
+          <p:txBody>
+            <a:bodyPr/>
+            <a:lstStyle/>
+            <a:p/>
+          </p:txBody>
+        </p:sp>
+        <p:sp>
+          <p:nvSpPr>
+            <p:cNvPr id="19" name="pl19"/>
+            <p:cNvSpPr/>
+            <p:nvPr/>
+          </p:nvSpPr>
+          <p:spPr>
+            <a:xfrm>
+              <a:off x="6529041" y="1977589"/>
+              <a:ext cx="0" cy="3635721"/>
+            </a:xfrm>
+            <a:custGeom>
+              <a:avLst/>
+              <a:pathLst>
+                <a:path w="0" h="3635721">
+                  <a:moveTo>
+                    <a:pt x="0" y="3635721"/>
+                  </a:moveTo>
+                  <a:lnTo>
+                    <a:pt x="0" y="0"/>
+                  </a:lnTo>
+                  <a:lnTo>
+                    <a:pt x="0" y="0"/>
+                  </a:lnTo>
+                </a:path>
+              </a:pathLst>
+            </a:custGeom>
+            <a:ln w="8623" cap="flat">
+              <a:solidFill>
+                <a:srgbClr val="EBEBEB">
+                  <a:alpha val="100000"/>
+                </a:srgbClr>
+              </a:solidFill>
+              <a:prstDash val="solid"/>
+              <a:round/>
+            </a:ln>
+          </p:spPr>
+          <p:txBody>
+            <a:bodyPr/>
+            <a:lstStyle/>
+            <a:p/>
+          </p:txBody>
+        </p:sp>
+        <p:sp>
+          <p:nvSpPr>
+            <p:cNvPr id="20" name="pl20"/>
+            <p:cNvSpPr/>
+            <p:nvPr/>
+          </p:nvSpPr>
+          <p:spPr>
+            <a:xfrm>
+              <a:off x="7050248" y="1977589"/>
+              <a:ext cx="0" cy="3635721"/>
+            </a:xfrm>
+            <a:custGeom>
+              <a:avLst/>
+              <a:pathLst>
+                <a:path w="0" h="3635721">
+                  <a:moveTo>
+                    <a:pt x="0" y="3635721"/>
+                  </a:moveTo>
+                  <a:lnTo>
+                    <a:pt x="0" y="0"/>
+                  </a:lnTo>
+                  <a:lnTo>
+                    <a:pt x="0" y="0"/>
+                  </a:lnTo>
+                </a:path>
+              </a:pathLst>
+            </a:custGeom>
+            <a:ln w="8623" cap="flat">
+              <a:solidFill>
+                <a:srgbClr val="EBEBEB">
+                  <a:alpha val="100000"/>
+                </a:srgbClr>
+              </a:solidFill>
+              <a:prstDash val="solid"/>
+              <a:round/>
+            </a:ln>
+          </p:spPr>
+          <p:txBody>
+            <a:bodyPr/>
+            <a:lstStyle/>
+            <a:p/>
+          </p:txBody>
+        </p:sp>
+        <p:sp>
+          <p:nvSpPr>
+            <p:cNvPr id="21" name="pl21"/>
+            <p:cNvSpPr/>
+            <p:nvPr/>
+          </p:nvSpPr>
+          <p:spPr>
+            <a:xfrm>
+              <a:off x="7571454" y="1977589"/>
+              <a:ext cx="0" cy="3635721"/>
+            </a:xfrm>
+            <a:custGeom>
+              <a:avLst/>
+              <a:pathLst>
+                <a:path w="0" h="3635721">
+                  <a:moveTo>
+                    <a:pt x="0" y="3635721"/>
+                  </a:moveTo>
+                  <a:lnTo>
+                    <a:pt x="0" y="0"/>
+                  </a:lnTo>
+                  <a:lnTo>
+                    <a:pt x="0" y="0"/>
+                  </a:lnTo>
+                </a:path>
+              </a:pathLst>
+            </a:custGeom>
+            <a:ln w="8623" cap="flat">
+              <a:solidFill>
+                <a:srgbClr val="EBEBEB">
+                  <a:alpha val="100000"/>
+                </a:srgbClr>
+              </a:solidFill>
+              <a:prstDash val="solid"/>
+              <a:round/>
+            </a:ln>
+          </p:spPr>
+          <p:txBody>
+            <a:bodyPr/>
+            <a:lstStyle/>
+            <a:p/>
+          </p:txBody>
+        </p:sp>
+        <p:sp>
+          <p:nvSpPr>
+            <p:cNvPr id="22" name="pl22"/>
+            <p:cNvSpPr/>
+            <p:nvPr/>
+          </p:nvSpPr>
+          <p:spPr>
+            <a:xfrm>
+              <a:off x="8092661" y="1977589"/>
+              <a:ext cx="0" cy="3635721"/>
+            </a:xfrm>
+            <a:custGeom>
+              <a:avLst/>
+              <a:pathLst>
+                <a:path w="0" h="3635721">
+                  <a:moveTo>
+                    <a:pt x="0" y="3635721"/>
+                  </a:moveTo>
+                  <a:lnTo>
+                    <a:pt x="0" y="0"/>
+                  </a:lnTo>
+                  <a:lnTo>
+                    <a:pt x="0" y="0"/>
+                  </a:lnTo>
+                </a:path>
+              </a:pathLst>
+            </a:custGeom>
+            <a:ln w="8623" cap="flat">
+              <a:solidFill>
+                <a:srgbClr val="EBEBEB">
+                  <a:alpha val="100000"/>
+                </a:srgbClr>
+              </a:solidFill>
+              <a:prstDash val="solid"/>
+              <a:round/>
+            </a:ln>
+          </p:spPr>
+          <p:txBody>
+            <a:bodyPr/>
+            <a:lstStyle/>
+            <a:p/>
+          </p:txBody>
+        </p:sp>
+        <p:sp>
+          <p:nvSpPr>
+            <p:cNvPr id="23" name="pl23"/>
+            <p:cNvSpPr/>
+            <p:nvPr/>
+          </p:nvSpPr>
+          <p:spPr>
+            <a:xfrm>
+              <a:off x="915645" y="5448051"/>
+              <a:ext cx="7682587" cy="0"/>
+            </a:xfrm>
+            <a:custGeom>
+              <a:avLst/>
+              <a:pathLst>
+                <a:path w="7682587" h="0">
                   <a:moveTo>
                     <a:pt x="0" y="0"/>
                   </a:moveTo>
                   <a:lnTo>
-                    <a:pt x="7485076" y="0"/>
+                    <a:pt x="7682587" y="0"/>
                   </a:lnTo>
                   <a:lnTo>
-                    <a:pt x="7485076" y="0"/>
+                    <a:pt x="7682587" y="0"/>
                   </a:lnTo>
                 </a:path>
               </a:pathLst>
@@ -2609,27 +3125,27 @@
         </p:sp>
         <p:sp>
           <p:nvSpPr>
-            <p:cNvPr id="12" name="pl12"/>
-            <p:cNvSpPr/>
-            <p:nvPr/>
-          </p:nvSpPr>
-          <p:spPr>
-            <a:xfrm>
-              <a:off x="1113155" y="4660979"/>
-              <a:ext cx="7485076" cy="0"/>
+            <p:cNvPr id="24" name="pl24"/>
+            <p:cNvSpPr/>
+            <p:nvPr/>
+          </p:nvSpPr>
+          <p:spPr>
+            <a:xfrm>
+              <a:off x="915645" y="4811968"/>
+              <a:ext cx="7682587" cy="0"/>
             </a:xfrm>
             <a:custGeom>
               <a:avLst/>
               <a:pathLst>
-                <a:path w="7485076" h="0">
+                <a:path w="7682587" h="0">
                   <a:moveTo>
                     <a:pt x="0" y="0"/>
                   </a:moveTo>
                   <a:lnTo>
-                    <a:pt x="7485076" y="0"/>
+                    <a:pt x="7682587" y="0"/>
                   </a:lnTo>
                   <a:lnTo>
-                    <a:pt x="7485076" y="0"/>
+                    <a:pt x="7682587" y="0"/>
                   </a:lnTo>
                 </a:path>
               </a:pathLst>
@@ -2652,27 +3168,27 @@
         </p:sp>
         <p:sp>
           <p:nvSpPr>
-            <p:cNvPr id="13" name="pl13"/>
-            <p:cNvSpPr/>
-            <p:nvPr/>
-          </p:nvSpPr>
-          <p:spPr>
-            <a:xfrm>
-              <a:off x="1113155" y="3873907"/>
-              <a:ext cx="7485076" cy="0"/>
+            <p:cNvPr id="25" name="pl25"/>
+            <p:cNvSpPr/>
+            <p:nvPr/>
+          </p:nvSpPr>
+          <p:spPr>
+            <a:xfrm>
+              <a:off x="915645" y="4175885"/>
+              <a:ext cx="7682587" cy="0"/>
             </a:xfrm>
             <a:custGeom>
               <a:avLst/>
               <a:pathLst>
-                <a:path w="7485076" h="0">
+                <a:path w="7682587" h="0">
                   <a:moveTo>
                     <a:pt x="0" y="0"/>
                   </a:moveTo>
                   <a:lnTo>
-                    <a:pt x="7485076" y="0"/>
+                    <a:pt x="7682587" y="0"/>
                   </a:lnTo>
                   <a:lnTo>
-                    <a:pt x="7485076" y="0"/>
+                    <a:pt x="7682587" y="0"/>
                   </a:lnTo>
                 </a:path>
               </a:pathLst>
@@ -2695,27 +3211,27 @@
         </p:sp>
         <p:sp>
           <p:nvSpPr>
-            <p:cNvPr id="14" name="pl14"/>
-            <p:cNvSpPr/>
-            <p:nvPr/>
-          </p:nvSpPr>
-          <p:spPr>
-            <a:xfrm>
-              <a:off x="1113155" y="3086835"/>
-              <a:ext cx="7485076" cy="0"/>
+            <p:cNvPr id="26" name="pl26"/>
+            <p:cNvSpPr/>
+            <p:nvPr/>
+          </p:nvSpPr>
+          <p:spPr>
+            <a:xfrm>
+              <a:off x="915645" y="3539803"/>
+              <a:ext cx="7682587" cy="0"/>
             </a:xfrm>
             <a:custGeom>
               <a:avLst/>
               <a:pathLst>
-                <a:path w="7485076" h="0">
+                <a:path w="7682587" h="0">
                   <a:moveTo>
                     <a:pt x="0" y="0"/>
                   </a:moveTo>
                   <a:lnTo>
-                    <a:pt x="7485076" y="0"/>
+                    <a:pt x="7682587" y="0"/>
                   </a:lnTo>
                   <a:lnTo>
-                    <a:pt x="7485076" y="0"/>
+                    <a:pt x="7682587" y="0"/>
                   </a:lnTo>
                 </a:path>
               </a:pathLst>
@@ -2738,27 +3254,27 @@
         </p:sp>
         <p:sp>
           <p:nvSpPr>
-            <p:cNvPr id="15" name="pl15"/>
-            <p:cNvSpPr/>
-            <p:nvPr/>
-          </p:nvSpPr>
-          <p:spPr>
-            <a:xfrm>
-              <a:off x="1113155" y="2299763"/>
-              <a:ext cx="7485076" cy="0"/>
+            <p:cNvPr id="27" name="pl27"/>
+            <p:cNvSpPr/>
+            <p:nvPr/>
+          </p:nvSpPr>
+          <p:spPr>
+            <a:xfrm>
+              <a:off x="915645" y="2903720"/>
+              <a:ext cx="7682587" cy="0"/>
             </a:xfrm>
             <a:custGeom>
               <a:avLst/>
               <a:pathLst>
-                <a:path w="7485076" h="0">
+                <a:path w="7682587" h="0">
                   <a:moveTo>
                     <a:pt x="0" y="0"/>
                   </a:moveTo>
                   <a:lnTo>
-                    <a:pt x="7485076" y="0"/>
+                    <a:pt x="7682587" y="0"/>
                   </a:lnTo>
                   <a:lnTo>
-                    <a:pt x="7485076" y="0"/>
+                    <a:pt x="7682587" y="0"/>
                   </a:lnTo>
                 </a:path>
               </a:pathLst>
@@ -2781,13 +3297,56 @@
         </p:sp>
         <p:sp>
           <p:nvSpPr>
-            <p:cNvPr id="16" name="pl16"/>
-            <p:cNvSpPr/>
-            <p:nvPr/>
-          </p:nvSpPr>
-          <p:spPr>
-            <a:xfrm>
-              <a:off x="1705408" y="1977589"/>
+            <p:cNvPr id="28" name="pl28"/>
+            <p:cNvSpPr/>
+            <p:nvPr/>
+          </p:nvSpPr>
+          <p:spPr>
+            <a:xfrm>
+              <a:off x="915645" y="2267637"/>
+              <a:ext cx="7682587" cy="0"/>
+            </a:xfrm>
+            <a:custGeom>
+              <a:avLst/>
+              <a:pathLst>
+                <a:path w="7682587" h="0">
+                  <a:moveTo>
+                    <a:pt x="0" y="0"/>
+                  </a:moveTo>
+                  <a:lnTo>
+                    <a:pt x="7682587" y="0"/>
+                  </a:lnTo>
+                  <a:lnTo>
+                    <a:pt x="7682587" y="0"/>
+                  </a:lnTo>
+                </a:path>
+              </a:pathLst>
+            </a:custGeom>
+            <a:ln w="17246" cap="flat">
+              <a:solidFill>
+                <a:srgbClr val="EBEBEB">
+                  <a:alpha val="100000"/>
+                </a:srgbClr>
+              </a:solidFill>
+              <a:prstDash val="solid"/>
+              <a:round/>
+            </a:ln>
+          </p:spPr>
+          <p:txBody>
+            <a:bodyPr/>
+            <a:lstStyle/>
+            <a:p/>
+          </p:txBody>
+        </p:sp>
+        <p:sp>
+          <p:nvSpPr>
+            <p:cNvPr id="29" name="pl29"/>
+            <p:cNvSpPr/>
+            <p:nvPr/>
+          </p:nvSpPr>
+          <p:spPr>
+            <a:xfrm>
+              <a:off x="1056370" y="1977589"/>
               <a:ext cx="0" cy="3635721"/>
             </a:xfrm>
             <a:custGeom>
@@ -2824,13 +3383,13 @@
         </p:sp>
         <p:sp>
           <p:nvSpPr>
-            <p:cNvPr id="17" name="pl17"/>
-            <p:cNvSpPr/>
-            <p:nvPr/>
-          </p:nvSpPr>
-          <p:spPr>
-            <a:xfrm>
-              <a:off x="4225636" y="1977589"/>
+            <p:cNvPr id="30" name="pl30"/>
+            <p:cNvSpPr/>
+            <p:nvPr/>
+          </p:nvSpPr>
+          <p:spPr>
+            <a:xfrm>
+              <a:off x="1577577" y="1977589"/>
               <a:ext cx="0" cy="3635721"/>
             </a:xfrm>
             <a:custGeom>
@@ -2867,13 +3426,13 @@
         </p:sp>
         <p:sp>
           <p:nvSpPr>
-            <p:cNvPr id="18" name="pl18"/>
-            <p:cNvSpPr/>
-            <p:nvPr/>
-          </p:nvSpPr>
-          <p:spPr>
-            <a:xfrm>
-              <a:off x="6745864" y="1977589"/>
+            <p:cNvPr id="31" name="pl31"/>
+            <p:cNvSpPr/>
+            <p:nvPr/>
+          </p:nvSpPr>
+          <p:spPr>
+            <a:xfrm>
+              <a:off x="2098784" y="1977589"/>
               <a:ext cx="0" cy="3635721"/>
             </a:xfrm>
             <a:custGeom>
@@ -2910,1903 +3469,13 @@
         </p:sp>
         <p:sp>
           <p:nvSpPr>
-            <p:cNvPr id="19" name="rc19"/>
-            <p:cNvSpPr/>
-            <p:nvPr/>
-          </p:nvSpPr>
-          <p:spPr>
-            <a:xfrm>
-              <a:off x="1453386" y="5347893"/>
-              <a:ext cx="252022" cy="100157"/>
-            </a:xfrm>
-            <a:prstGeom prst="rect">
-              <a:avLst/>
-            </a:prstGeom>
-            <a:solidFill>
-              <a:srgbClr val="E31A1C">
-                <a:alpha val="85098"/>
-              </a:srgbClr>
-            </a:solidFill>
-            <a:ln w="13550" cap="flat">
-              <a:solidFill>
-                <a:srgbClr val="000000">
-                  <a:alpha val="100000"/>
-                </a:srgbClr>
-              </a:solidFill>
-              <a:prstDash val="solid"/>
-              <a:miter/>
-            </a:ln>
-          </p:spPr>
-          <p:txBody>
-            <a:bodyPr/>
-            <a:lstStyle/>
-            <a:p/>
-          </p:txBody>
-        </p:sp>
-        <p:sp>
-          <p:nvSpPr>
-            <p:cNvPr id="20" name="rc20"/>
-            <p:cNvSpPr/>
-            <p:nvPr/>
-          </p:nvSpPr>
-          <p:spPr>
-            <a:xfrm>
-              <a:off x="1705408" y="5180964"/>
-              <a:ext cx="252022" cy="267087"/>
-            </a:xfrm>
-            <a:prstGeom prst="rect">
-              <a:avLst/>
-            </a:prstGeom>
-            <a:solidFill>
-              <a:srgbClr val="E31A1C">
-                <a:alpha val="85098"/>
-              </a:srgbClr>
-            </a:solidFill>
-            <a:ln w="13550" cap="flat">
-              <a:solidFill>
-                <a:srgbClr val="000000">
-                  <a:alpha val="100000"/>
-                </a:srgbClr>
-              </a:solidFill>
-              <a:prstDash val="solid"/>
-              <a:miter/>
-            </a:ln>
-          </p:spPr>
-          <p:txBody>
-            <a:bodyPr/>
-            <a:lstStyle/>
-            <a:p/>
-          </p:txBody>
-        </p:sp>
-        <p:sp>
-          <p:nvSpPr>
-            <p:cNvPr id="21" name="rc21"/>
-            <p:cNvSpPr/>
-            <p:nvPr/>
-          </p:nvSpPr>
-          <p:spPr>
-            <a:xfrm>
-              <a:off x="1957431" y="5047420"/>
-              <a:ext cx="252022" cy="400630"/>
-            </a:xfrm>
-            <a:prstGeom prst="rect">
-              <a:avLst/>
-            </a:prstGeom>
-            <a:solidFill>
-              <a:srgbClr val="E31A1C">
-                <a:alpha val="85098"/>
-              </a:srgbClr>
-            </a:solidFill>
-            <a:ln w="13550" cap="flat">
-              <a:solidFill>
-                <a:srgbClr val="000000">
-                  <a:alpha val="100000"/>
-                </a:srgbClr>
-              </a:solidFill>
-              <a:prstDash val="solid"/>
-              <a:miter/>
-            </a:ln>
-          </p:spPr>
-          <p:txBody>
-            <a:bodyPr/>
-            <a:lstStyle/>
-            <a:p/>
-          </p:txBody>
-        </p:sp>
-        <p:sp>
-          <p:nvSpPr>
-            <p:cNvPr id="22" name="rc22"/>
-            <p:cNvSpPr/>
-            <p:nvPr/>
-          </p:nvSpPr>
-          <p:spPr>
-            <a:xfrm>
-              <a:off x="2209454" y="5047420"/>
-              <a:ext cx="252022" cy="400630"/>
-            </a:xfrm>
-            <a:prstGeom prst="rect">
-              <a:avLst/>
-            </a:prstGeom>
-            <a:solidFill>
-              <a:srgbClr val="E31A1C">
-                <a:alpha val="85098"/>
-              </a:srgbClr>
-            </a:solidFill>
-            <a:ln w="13550" cap="flat">
-              <a:solidFill>
-                <a:srgbClr val="000000">
-                  <a:alpha val="100000"/>
-                </a:srgbClr>
-              </a:solidFill>
-              <a:prstDash val="solid"/>
-              <a:miter/>
-            </a:ln>
-          </p:spPr>
-          <p:txBody>
-            <a:bodyPr/>
-            <a:lstStyle/>
-            <a:p/>
-          </p:txBody>
-        </p:sp>
-        <p:sp>
-          <p:nvSpPr>
-            <p:cNvPr id="23" name="rc23"/>
-            <p:cNvSpPr/>
-            <p:nvPr/>
-          </p:nvSpPr>
-          <p:spPr>
-            <a:xfrm>
-              <a:off x="2461477" y="4546632"/>
-              <a:ext cx="252022" cy="901418"/>
-            </a:xfrm>
-            <a:prstGeom prst="rect">
-              <a:avLst/>
-            </a:prstGeom>
-            <a:solidFill>
-              <a:srgbClr val="E31A1C">
-                <a:alpha val="85098"/>
-              </a:srgbClr>
-            </a:solidFill>
-            <a:ln w="13550" cap="flat">
-              <a:solidFill>
-                <a:srgbClr val="000000">
-                  <a:alpha val="100000"/>
-                </a:srgbClr>
-              </a:solidFill>
-              <a:prstDash val="solid"/>
-              <a:miter/>
-            </a:ln>
-          </p:spPr>
-          <p:txBody>
-            <a:bodyPr/>
-            <a:lstStyle/>
-            <a:p/>
-          </p:txBody>
-        </p:sp>
-        <p:sp>
-          <p:nvSpPr>
-            <p:cNvPr id="24" name="rc24"/>
-            <p:cNvSpPr/>
-            <p:nvPr/>
-          </p:nvSpPr>
-          <p:spPr>
-            <a:xfrm>
-              <a:off x="2713500" y="4446474"/>
-              <a:ext cx="252022" cy="1001576"/>
-            </a:xfrm>
-            <a:prstGeom prst="rect">
-              <a:avLst/>
-            </a:prstGeom>
-            <a:solidFill>
-              <a:srgbClr val="E31A1C">
-                <a:alpha val="85098"/>
-              </a:srgbClr>
-            </a:solidFill>
-            <a:ln w="13550" cap="flat">
-              <a:solidFill>
-                <a:srgbClr val="000000">
-                  <a:alpha val="100000"/>
-                </a:srgbClr>
-              </a:solidFill>
-              <a:prstDash val="solid"/>
-              <a:miter/>
-            </a:ln>
-          </p:spPr>
-          <p:txBody>
-            <a:bodyPr/>
-            <a:lstStyle/>
-            <a:p/>
-          </p:txBody>
-        </p:sp>
-        <p:sp>
-          <p:nvSpPr>
-            <p:cNvPr id="25" name="rc25"/>
-            <p:cNvSpPr/>
-            <p:nvPr/>
-          </p:nvSpPr>
-          <p:spPr>
-            <a:xfrm>
-              <a:off x="2965522" y="3778757"/>
-              <a:ext cx="252022" cy="1669293"/>
-            </a:xfrm>
-            <a:prstGeom prst="rect">
-              <a:avLst/>
-            </a:prstGeom>
-            <a:solidFill>
-              <a:srgbClr val="E31A1C">
-                <a:alpha val="85098"/>
-              </a:srgbClr>
-            </a:solidFill>
-            <a:ln w="13550" cap="flat">
-              <a:solidFill>
-                <a:srgbClr val="000000">
-                  <a:alpha val="100000"/>
-                </a:srgbClr>
-              </a:solidFill>
-              <a:prstDash val="solid"/>
-              <a:miter/>
-            </a:ln>
-          </p:spPr>
-          <p:txBody>
-            <a:bodyPr/>
-            <a:lstStyle/>
-            <a:p/>
-          </p:txBody>
-        </p:sp>
-        <p:sp>
-          <p:nvSpPr>
-            <p:cNvPr id="26" name="rc26"/>
-            <p:cNvSpPr/>
-            <p:nvPr/>
-          </p:nvSpPr>
-          <p:spPr>
-            <a:xfrm>
-              <a:off x="3217545" y="2610251"/>
-              <a:ext cx="252022" cy="2837799"/>
-            </a:xfrm>
-            <a:prstGeom prst="rect">
-              <a:avLst/>
-            </a:prstGeom>
-            <a:solidFill>
-              <a:srgbClr val="E31A1C">
-                <a:alpha val="85098"/>
-              </a:srgbClr>
-            </a:solidFill>
-            <a:ln w="13550" cap="flat">
-              <a:solidFill>
-                <a:srgbClr val="000000">
-                  <a:alpha val="100000"/>
-                </a:srgbClr>
-              </a:solidFill>
-              <a:prstDash val="solid"/>
-              <a:miter/>
-            </a:ln>
-          </p:spPr>
-          <p:txBody>
-            <a:bodyPr/>
-            <a:lstStyle/>
-            <a:p/>
-          </p:txBody>
-        </p:sp>
-        <p:sp>
-          <p:nvSpPr>
-            <p:cNvPr id="27" name="rc27"/>
-            <p:cNvSpPr/>
-            <p:nvPr/>
-          </p:nvSpPr>
-          <p:spPr>
-            <a:xfrm>
-              <a:off x="3469568" y="2977496"/>
-              <a:ext cx="252022" cy="2470554"/>
-            </a:xfrm>
-            <a:prstGeom prst="rect">
-              <a:avLst/>
-            </a:prstGeom>
-            <a:solidFill>
-              <a:srgbClr val="E31A1C">
-                <a:alpha val="85098"/>
-              </a:srgbClr>
-            </a:solidFill>
-            <a:ln w="13550" cap="flat">
-              <a:solidFill>
-                <a:srgbClr val="000000">
-                  <a:alpha val="100000"/>
-                </a:srgbClr>
-              </a:solidFill>
-              <a:prstDash val="solid"/>
-              <a:miter/>
-            </a:ln>
-          </p:spPr>
-          <p:txBody>
-            <a:bodyPr/>
-            <a:lstStyle/>
-            <a:p/>
-          </p:txBody>
-        </p:sp>
-        <p:sp>
-          <p:nvSpPr>
-            <p:cNvPr id="28" name="rc28"/>
-            <p:cNvSpPr/>
-            <p:nvPr/>
-          </p:nvSpPr>
-          <p:spPr>
-            <a:xfrm>
-              <a:off x="3721591" y="2777181"/>
-              <a:ext cx="252022" cy="2670870"/>
-            </a:xfrm>
-            <a:prstGeom prst="rect">
-              <a:avLst/>
-            </a:prstGeom>
-            <a:solidFill>
-              <a:srgbClr val="E31A1C">
-                <a:alpha val="85098"/>
-              </a:srgbClr>
-            </a:solidFill>
-            <a:ln w="13550" cap="flat">
-              <a:solidFill>
-                <a:srgbClr val="000000">
-                  <a:alpha val="100000"/>
-                </a:srgbClr>
-              </a:solidFill>
-              <a:prstDash val="solid"/>
-              <a:miter/>
-            </a:ln>
-          </p:spPr>
-          <p:txBody>
-            <a:bodyPr/>
-            <a:lstStyle/>
-            <a:p/>
-          </p:txBody>
-        </p:sp>
-        <p:sp>
-          <p:nvSpPr>
-            <p:cNvPr id="29" name="rc29"/>
-            <p:cNvSpPr/>
-            <p:nvPr/>
-          </p:nvSpPr>
-          <p:spPr>
-            <a:xfrm>
-              <a:off x="3973614" y="2376550"/>
-              <a:ext cx="252022" cy="3071500"/>
-            </a:xfrm>
-            <a:prstGeom prst="rect">
-              <a:avLst/>
-            </a:prstGeom>
-            <a:solidFill>
-              <a:srgbClr val="E31A1C">
-                <a:alpha val="85098"/>
-              </a:srgbClr>
-            </a:solidFill>
-            <a:ln w="13550" cap="flat">
-              <a:solidFill>
-                <a:srgbClr val="000000">
-                  <a:alpha val="100000"/>
-                </a:srgbClr>
-              </a:solidFill>
-              <a:prstDash val="solid"/>
-              <a:miter/>
-            </a:ln>
-          </p:spPr>
-          <p:txBody>
-            <a:bodyPr/>
-            <a:lstStyle/>
-            <a:p/>
-          </p:txBody>
-        </p:sp>
-        <p:sp>
-          <p:nvSpPr>
-            <p:cNvPr id="30" name="rc30"/>
-            <p:cNvSpPr/>
-            <p:nvPr/>
-          </p:nvSpPr>
-          <p:spPr>
-            <a:xfrm>
-              <a:off x="4225636" y="2142849"/>
-              <a:ext cx="252022" cy="0"/>
-            </a:xfrm>
-            <a:prstGeom prst="rect">
-              <a:avLst/>
-            </a:prstGeom>
-            <a:solidFill>
-              <a:srgbClr val="E31A1C">
-                <a:alpha val="85098"/>
-              </a:srgbClr>
-            </a:solidFill>
-            <a:ln w="13550" cap="flat">
-              <a:solidFill>
-                <a:srgbClr val="000000">
-                  <a:alpha val="100000"/>
-                </a:srgbClr>
-              </a:solidFill>
-              <a:prstDash val="solid"/>
-              <a:miter/>
-            </a:ln>
-          </p:spPr>
-          <p:txBody>
-            <a:bodyPr/>
-            <a:lstStyle/>
-            <a:p/>
-          </p:txBody>
-        </p:sp>
-        <p:sp>
-          <p:nvSpPr>
-            <p:cNvPr id="31" name="rc31"/>
-            <p:cNvSpPr/>
-            <p:nvPr/>
-          </p:nvSpPr>
-          <p:spPr>
-            <a:xfrm>
-              <a:off x="4477659" y="3077653"/>
-              <a:ext cx="252022" cy="0"/>
-            </a:xfrm>
-            <a:prstGeom prst="rect">
-              <a:avLst/>
-            </a:prstGeom>
-            <a:solidFill>
-              <a:srgbClr val="E31A1C">
-                <a:alpha val="85098"/>
-              </a:srgbClr>
-            </a:solidFill>
-            <a:ln w="13550" cap="flat">
-              <a:solidFill>
-                <a:srgbClr val="000000">
-                  <a:alpha val="100000"/>
-                </a:srgbClr>
-              </a:solidFill>
-              <a:prstDash val="solid"/>
-              <a:miter/>
-            </a:ln>
-          </p:spPr>
-          <p:txBody>
-            <a:bodyPr/>
-            <a:lstStyle/>
-            <a:p/>
-          </p:txBody>
-        </p:sp>
-        <p:sp>
-          <p:nvSpPr>
-            <p:cNvPr id="32" name="rc32"/>
-            <p:cNvSpPr/>
-            <p:nvPr/>
-          </p:nvSpPr>
-          <p:spPr>
-            <a:xfrm>
-              <a:off x="4729682" y="3077653"/>
-              <a:ext cx="252022" cy="0"/>
-            </a:xfrm>
-            <a:prstGeom prst="rect">
-              <a:avLst/>
-            </a:prstGeom>
-            <a:solidFill>
-              <a:srgbClr val="E31A1C">
-                <a:alpha val="85098"/>
-              </a:srgbClr>
-            </a:solidFill>
-            <a:ln w="13550" cap="flat">
-              <a:solidFill>
-                <a:srgbClr val="000000">
-                  <a:alpha val="100000"/>
-                </a:srgbClr>
-              </a:solidFill>
-              <a:prstDash val="solid"/>
-              <a:miter/>
-            </a:ln>
-          </p:spPr>
-          <p:txBody>
-            <a:bodyPr/>
-            <a:lstStyle/>
-            <a:p/>
-          </p:txBody>
-        </p:sp>
-        <p:sp>
-          <p:nvSpPr>
-            <p:cNvPr id="33" name="rc33"/>
-            <p:cNvSpPr/>
-            <p:nvPr/>
-          </p:nvSpPr>
-          <p:spPr>
-            <a:xfrm>
-              <a:off x="4981705" y="2977496"/>
-              <a:ext cx="252022" cy="0"/>
-            </a:xfrm>
-            <a:prstGeom prst="rect">
-              <a:avLst/>
-            </a:prstGeom>
-            <a:solidFill>
-              <a:srgbClr val="E31A1C">
-                <a:alpha val="85098"/>
-              </a:srgbClr>
-            </a:solidFill>
-            <a:ln w="13550" cap="flat">
-              <a:solidFill>
-                <a:srgbClr val="000000">
-                  <a:alpha val="100000"/>
-                </a:srgbClr>
-              </a:solidFill>
-              <a:prstDash val="solid"/>
-              <a:miter/>
-            </a:ln>
-          </p:spPr>
-          <p:txBody>
-            <a:bodyPr/>
-            <a:lstStyle/>
-            <a:p/>
-          </p:txBody>
-        </p:sp>
-        <p:sp>
-          <p:nvSpPr>
-            <p:cNvPr id="34" name="rc34"/>
-            <p:cNvSpPr/>
-            <p:nvPr/>
-          </p:nvSpPr>
-          <p:spPr>
-            <a:xfrm>
-              <a:off x="5233727" y="4079230"/>
-              <a:ext cx="252022" cy="0"/>
-            </a:xfrm>
-            <a:prstGeom prst="rect">
-              <a:avLst/>
-            </a:prstGeom>
-            <a:solidFill>
-              <a:srgbClr val="E31A1C">
-                <a:alpha val="85098"/>
-              </a:srgbClr>
-            </a:solidFill>
-            <a:ln w="13550" cap="flat">
-              <a:solidFill>
-                <a:srgbClr val="000000">
-                  <a:alpha val="100000"/>
-                </a:srgbClr>
-              </a:solidFill>
-              <a:prstDash val="solid"/>
-              <a:miter/>
-            </a:ln>
-          </p:spPr>
-          <p:txBody>
-            <a:bodyPr/>
-            <a:lstStyle/>
-            <a:p/>
-          </p:txBody>
-        </p:sp>
-        <p:sp>
-          <p:nvSpPr>
-            <p:cNvPr id="35" name="rc35"/>
-            <p:cNvSpPr/>
-            <p:nvPr/>
-          </p:nvSpPr>
-          <p:spPr>
-            <a:xfrm>
-              <a:off x="5485750" y="4146001"/>
-              <a:ext cx="252022" cy="0"/>
-            </a:xfrm>
-            <a:prstGeom prst="rect">
-              <a:avLst/>
-            </a:prstGeom>
-            <a:solidFill>
-              <a:srgbClr val="E31A1C">
-                <a:alpha val="85098"/>
-              </a:srgbClr>
-            </a:solidFill>
-            <a:ln w="13550" cap="flat">
-              <a:solidFill>
-                <a:srgbClr val="000000">
-                  <a:alpha val="100000"/>
-                </a:srgbClr>
-              </a:solidFill>
-              <a:prstDash val="solid"/>
-              <a:miter/>
-            </a:ln>
-          </p:spPr>
-          <p:txBody>
-            <a:bodyPr/>
-            <a:lstStyle/>
-            <a:p/>
-          </p:txBody>
-        </p:sp>
-        <p:sp>
-          <p:nvSpPr>
-            <p:cNvPr id="36" name="rc36"/>
-            <p:cNvSpPr/>
-            <p:nvPr/>
-          </p:nvSpPr>
-          <p:spPr>
-            <a:xfrm>
-              <a:off x="5737773" y="4780333"/>
-              <a:ext cx="252022" cy="0"/>
-            </a:xfrm>
-            <a:prstGeom prst="rect">
-              <a:avLst/>
-            </a:prstGeom>
-            <a:solidFill>
-              <a:srgbClr val="E31A1C">
-                <a:alpha val="85098"/>
-              </a:srgbClr>
-            </a:solidFill>
-            <a:ln w="13550" cap="flat">
-              <a:solidFill>
-                <a:srgbClr val="000000">
-                  <a:alpha val="100000"/>
-                </a:srgbClr>
-              </a:solidFill>
-              <a:prstDash val="solid"/>
-              <a:miter/>
-            </a:ln>
-          </p:spPr>
-          <p:txBody>
-            <a:bodyPr/>
-            <a:lstStyle/>
-            <a:p/>
-          </p:txBody>
-        </p:sp>
-        <p:sp>
-          <p:nvSpPr>
-            <p:cNvPr id="37" name="rc37"/>
-            <p:cNvSpPr/>
-            <p:nvPr/>
-          </p:nvSpPr>
-          <p:spPr>
-            <a:xfrm>
-              <a:off x="5989796" y="4713561"/>
-              <a:ext cx="252022" cy="0"/>
-            </a:xfrm>
-            <a:prstGeom prst="rect">
-              <a:avLst/>
-            </a:prstGeom>
-            <a:solidFill>
-              <a:srgbClr val="E31A1C">
-                <a:alpha val="85098"/>
-              </a:srgbClr>
-            </a:solidFill>
-            <a:ln w="13550" cap="flat">
-              <a:solidFill>
-                <a:srgbClr val="000000">
-                  <a:alpha val="100000"/>
-                </a:srgbClr>
-              </a:solidFill>
-              <a:prstDash val="solid"/>
-              <a:miter/>
-            </a:ln>
-          </p:spPr>
-          <p:txBody>
-            <a:bodyPr/>
-            <a:lstStyle/>
-            <a:p/>
-          </p:txBody>
-        </p:sp>
-        <p:sp>
-          <p:nvSpPr>
-            <p:cNvPr id="38" name="rc38"/>
-            <p:cNvSpPr/>
-            <p:nvPr/>
-          </p:nvSpPr>
-          <p:spPr>
-            <a:xfrm>
-              <a:off x="6241819" y="4880491"/>
-              <a:ext cx="252022" cy="0"/>
-            </a:xfrm>
-            <a:prstGeom prst="rect">
-              <a:avLst/>
-            </a:prstGeom>
-            <a:solidFill>
-              <a:srgbClr val="E31A1C">
-                <a:alpha val="85098"/>
-              </a:srgbClr>
-            </a:solidFill>
-            <a:ln w="13550" cap="flat">
-              <a:solidFill>
-                <a:srgbClr val="000000">
-                  <a:alpha val="100000"/>
-                </a:srgbClr>
-              </a:solidFill>
-              <a:prstDash val="solid"/>
-              <a:miter/>
-            </a:ln>
-          </p:spPr>
-          <p:txBody>
-            <a:bodyPr/>
-            <a:lstStyle/>
-            <a:p/>
-          </p:txBody>
-        </p:sp>
-        <p:sp>
-          <p:nvSpPr>
-            <p:cNvPr id="39" name="rc39"/>
-            <p:cNvSpPr/>
-            <p:nvPr/>
-          </p:nvSpPr>
-          <p:spPr>
-            <a:xfrm>
-              <a:off x="6493841" y="5247735"/>
-              <a:ext cx="252022" cy="0"/>
-            </a:xfrm>
-            <a:prstGeom prst="rect">
-              <a:avLst/>
-            </a:prstGeom>
-            <a:solidFill>
-              <a:srgbClr val="E31A1C">
-                <a:alpha val="85098"/>
-              </a:srgbClr>
-            </a:solidFill>
-            <a:ln w="13550" cap="flat">
-              <a:solidFill>
-                <a:srgbClr val="000000">
-                  <a:alpha val="100000"/>
-                </a:srgbClr>
-              </a:solidFill>
-              <a:prstDash val="solid"/>
-              <a:miter/>
-            </a:ln>
-          </p:spPr>
-          <p:txBody>
-            <a:bodyPr/>
-            <a:lstStyle/>
-            <a:p/>
-          </p:txBody>
-        </p:sp>
-        <p:sp>
-          <p:nvSpPr>
-            <p:cNvPr id="40" name="rc40"/>
-            <p:cNvSpPr/>
-            <p:nvPr/>
-          </p:nvSpPr>
-          <p:spPr>
-            <a:xfrm>
-              <a:off x="6745864" y="5314507"/>
-              <a:ext cx="252022" cy="0"/>
-            </a:xfrm>
-            <a:prstGeom prst="rect">
-              <a:avLst/>
-            </a:prstGeom>
-            <a:solidFill>
-              <a:srgbClr val="E31A1C">
-                <a:alpha val="85098"/>
-              </a:srgbClr>
-            </a:solidFill>
-            <a:ln w="13550" cap="flat">
-              <a:solidFill>
-                <a:srgbClr val="000000">
-                  <a:alpha val="100000"/>
-                </a:srgbClr>
-              </a:solidFill>
-              <a:prstDash val="solid"/>
-              <a:miter/>
-            </a:ln>
-          </p:spPr>
-          <p:txBody>
-            <a:bodyPr/>
-            <a:lstStyle/>
-            <a:p/>
-          </p:txBody>
-        </p:sp>
-        <p:sp>
-          <p:nvSpPr>
-            <p:cNvPr id="41" name="rc41"/>
-            <p:cNvSpPr/>
-            <p:nvPr/>
-          </p:nvSpPr>
-          <p:spPr>
-            <a:xfrm>
-              <a:off x="6997887" y="5414665"/>
-              <a:ext cx="252022" cy="0"/>
-            </a:xfrm>
-            <a:prstGeom prst="rect">
-              <a:avLst/>
-            </a:prstGeom>
-            <a:solidFill>
-              <a:srgbClr val="E31A1C">
-                <a:alpha val="85098"/>
-              </a:srgbClr>
-            </a:solidFill>
-            <a:ln w="13550" cap="flat">
-              <a:solidFill>
-                <a:srgbClr val="000000">
-                  <a:alpha val="100000"/>
-                </a:srgbClr>
-              </a:solidFill>
-              <a:prstDash val="solid"/>
-              <a:miter/>
-            </a:ln>
-          </p:spPr>
-          <p:txBody>
-            <a:bodyPr/>
-            <a:lstStyle/>
-            <a:p/>
-          </p:txBody>
-        </p:sp>
-        <p:sp>
-          <p:nvSpPr>
-            <p:cNvPr id="42" name="rc42"/>
-            <p:cNvSpPr/>
-            <p:nvPr/>
-          </p:nvSpPr>
-          <p:spPr>
-            <a:xfrm>
-              <a:off x="7249910" y="5347893"/>
-              <a:ext cx="252022" cy="0"/>
-            </a:xfrm>
-            <a:prstGeom prst="rect">
-              <a:avLst/>
-            </a:prstGeom>
-            <a:solidFill>
-              <a:srgbClr val="E31A1C">
-                <a:alpha val="85098"/>
-              </a:srgbClr>
-            </a:solidFill>
-            <a:ln w="13550" cap="flat">
-              <a:solidFill>
-                <a:srgbClr val="000000">
-                  <a:alpha val="100000"/>
-                </a:srgbClr>
-              </a:solidFill>
-              <a:prstDash val="solid"/>
-              <a:miter/>
-            </a:ln>
-          </p:spPr>
-          <p:txBody>
-            <a:bodyPr/>
-            <a:lstStyle/>
-            <a:p/>
-          </p:txBody>
-        </p:sp>
-        <p:sp>
-          <p:nvSpPr>
-            <p:cNvPr id="43" name="rc43"/>
-            <p:cNvSpPr/>
-            <p:nvPr/>
-          </p:nvSpPr>
-          <p:spPr>
-            <a:xfrm>
-              <a:off x="7501933" y="5414665"/>
-              <a:ext cx="252022" cy="0"/>
-            </a:xfrm>
-            <a:prstGeom prst="rect">
-              <a:avLst/>
-            </a:prstGeom>
-            <a:solidFill>
-              <a:srgbClr val="E31A1C">
-                <a:alpha val="85098"/>
-              </a:srgbClr>
-            </a:solidFill>
-            <a:ln w="13550" cap="flat">
-              <a:solidFill>
-                <a:srgbClr val="000000">
-                  <a:alpha val="100000"/>
-                </a:srgbClr>
-              </a:solidFill>
-              <a:prstDash val="solid"/>
-              <a:miter/>
-            </a:ln>
-          </p:spPr>
-          <p:txBody>
-            <a:bodyPr/>
-            <a:lstStyle/>
-            <a:p/>
-          </p:txBody>
-        </p:sp>
-        <p:sp>
-          <p:nvSpPr>
-            <p:cNvPr id="44" name="rc44"/>
-            <p:cNvSpPr/>
-            <p:nvPr/>
-          </p:nvSpPr>
-          <p:spPr>
-            <a:xfrm>
-              <a:off x="7753955" y="5448051"/>
-              <a:ext cx="252022" cy="0"/>
-            </a:xfrm>
-            <a:prstGeom prst="rect">
-              <a:avLst/>
-            </a:prstGeom>
-            <a:solidFill>
-              <a:srgbClr val="E31A1C">
-                <a:alpha val="85098"/>
-              </a:srgbClr>
-            </a:solidFill>
-            <a:ln w="13550" cap="flat">
-              <a:solidFill>
-                <a:srgbClr val="000000">
-                  <a:alpha val="100000"/>
-                </a:srgbClr>
-              </a:solidFill>
-              <a:prstDash val="solid"/>
-              <a:miter/>
-            </a:ln>
-          </p:spPr>
-          <p:txBody>
-            <a:bodyPr/>
-            <a:lstStyle/>
-            <a:p/>
-          </p:txBody>
-        </p:sp>
-        <p:sp>
-          <p:nvSpPr>
-            <p:cNvPr id="45" name="rc45"/>
-            <p:cNvSpPr/>
-            <p:nvPr/>
-          </p:nvSpPr>
-          <p:spPr>
-            <a:xfrm>
-              <a:off x="8005978" y="5414665"/>
-              <a:ext cx="252022" cy="0"/>
-            </a:xfrm>
-            <a:prstGeom prst="rect">
-              <a:avLst/>
-            </a:prstGeom>
-            <a:solidFill>
-              <a:srgbClr val="E31A1C">
-                <a:alpha val="85098"/>
-              </a:srgbClr>
-            </a:solidFill>
-            <a:ln w="13550" cap="flat">
-              <a:solidFill>
-                <a:srgbClr val="000000">
-                  <a:alpha val="100000"/>
-                </a:srgbClr>
-              </a:solidFill>
-              <a:prstDash val="solid"/>
-              <a:miter/>
-            </a:ln>
-          </p:spPr>
-          <p:txBody>
-            <a:bodyPr/>
-            <a:lstStyle/>
-            <a:p/>
-          </p:txBody>
-        </p:sp>
-        <p:sp>
-          <p:nvSpPr>
-            <p:cNvPr id="46" name="rc46"/>
-            <p:cNvSpPr/>
-            <p:nvPr/>
-          </p:nvSpPr>
-          <p:spPr>
-            <a:xfrm>
-              <a:off x="1453386" y="5448051"/>
-              <a:ext cx="252022" cy="0"/>
-            </a:xfrm>
-            <a:prstGeom prst="rect">
-              <a:avLst/>
-            </a:prstGeom>
-            <a:solidFill>
-              <a:srgbClr val="999999">
-                <a:alpha val="85098"/>
-              </a:srgbClr>
-            </a:solidFill>
-            <a:ln w="13550" cap="flat">
-              <a:solidFill>
-                <a:srgbClr val="000000">
-                  <a:alpha val="100000"/>
-                </a:srgbClr>
-              </a:solidFill>
-              <a:prstDash val="solid"/>
-              <a:miter/>
-            </a:ln>
-          </p:spPr>
-          <p:txBody>
-            <a:bodyPr/>
-            <a:lstStyle/>
-            <a:p/>
-          </p:txBody>
-        </p:sp>
-        <p:sp>
-          <p:nvSpPr>
-            <p:cNvPr id="47" name="rc47"/>
-            <p:cNvSpPr/>
-            <p:nvPr/>
-          </p:nvSpPr>
-          <p:spPr>
-            <a:xfrm>
-              <a:off x="1705408" y="5448051"/>
-              <a:ext cx="252022" cy="0"/>
-            </a:xfrm>
-            <a:prstGeom prst="rect">
-              <a:avLst/>
-            </a:prstGeom>
-            <a:solidFill>
-              <a:srgbClr val="999999">
-                <a:alpha val="85098"/>
-              </a:srgbClr>
-            </a:solidFill>
-            <a:ln w="13550" cap="flat">
-              <a:solidFill>
-                <a:srgbClr val="000000">
-                  <a:alpha val="100000"/>
-                </a:srgbClr>
-              </a:solidFill>
-              <a:prstDash val="solid"/>
-              <a:miter/>
-            </a:ln>
-          </p:spPr>
-          <p:txBody>
-            <a:bodyPr/>
-            <a:lstStyle/>
-            <a:p/>
-          </p:txBody>
-        </p:sp>
-        <p:sp>
-          <p:nvSpPr>
-            <p:cNvPr id="48" name="rc48"/>
-            <p:cNvSpPr/>
-            <p:nvPr/>
-          </p:nvSpPr>
-          <p:spPr>
-            <a:xfrm>
-              <a:off x="1957431" y="5448051"/>
-              <a:ext cx="252022" cy="0"/>
-            </a:xfrm>
-            <a:prstGeom prst="rect">
-              <a:avLst/>
-            </a:prstGeom>
-            <a:solidFill>
-              <a:srgbClr val="999999">
-                <a:alpha val="85098"/>
-              </a:srgbClr>
-            </a:solidFill>
-            <a:ln w="13550" cap="flat">
-              <a:solidFill>
-                <a:srgbClr val="000000">
-                  <a:alpha val="100000"/>
-                </a:srgbClr>
-              </a:solidFill>
-              <a:prstDash val="solid"/>
-              <a:miter/>
-            </a:ln>
-          </p:spPr>
-          <p:txBody>
-            <a:bodyPr/>
-            <a:lstStyle/>
-            <a:p/>
-          </p:txBody>
-        </p:sp>
-        <p:sp>
-          <p:nvSpPr>
-            <p:cNvPr id="49" name="rc49"/>
-            <p:cNvSpPr/>
-            <p:nvPr/>
-          </p:nvSpPr>
-          <p:spPr>
-            <a:xfrm>
-              <a:off x="2209454" y="5448051"/>
-              <a:ext cx="252022" cy="0"/>
-            </a:xfrm>
-            <a:prstGeom prst="rect">
-              <a:avLst/>
-            </a:prstGeom>
-            <a:solidFill>
-              <a:srgbClr val="999999">
-                <a:alpha val="85098"/>
-              </a:srgbClr>
-            </a:solidFill>
-            <a:ln w="13550" cap="flat">
-              <a:solidFill>
-                <a:srgbClr val="000000">
-                  <a:alpha val="100000"/>
-                </a:srgbClr>
-              </a:solidFill>
-              <a:prstDash val="solid"/>
-              <a:miter/>
-            </a:ln>
-          </p:spPr>
-          <p:txBody>
-            <a:bodyPr/>
-            <a:lstStyle/>
-            <a:p/>
-          </p:txBody>
-        </p:sp>
-        <p:sp>
-          <p:nvSpPr>
-            <p:cNvPr id="50" name="rc50"/>
-            <p:cNvSpPr/>
-            <p:nvPr/>
-          </p:nvSpPr>
-          <p:spPr>
-            <a:xfrm>
-              <a:off x="2461477" y="5448051"/>
-              <a:ext cx="252022" cy="0"/>
-            </a:xfrm>
-            <a:prstGeom prst="rect">
-              <a:avLst/>
-            </a:prstGeom>
-            <a:solidFill>
-              <a:srgbClr val="999999">
-                <a:alpha val="85098"/>
-              </a:srgbClr>
-            </a:solidFill>
-            <a:ln w="13550" cap="flat">
-              <a:solidFill>
-                <a:srgbClr val="000000">
-                  <a:alpha val="100000"/>
-                </a:srgbClr>
-              </a:solidFill>
-              <a:prstDash val="solid"/>
-              <a:miter/>
-            </a:ln>
-          </p:spPr>
-          <p:txBody>
-            <a:bodyPr/>
-            <a:lstStyle/>
-            <a:p/>
-          </p:txBody>
-        </p:sp>
-        <p:sp>
-          <p:nvSpPr>
-            <p:cNvPr id="51" name="rc51"/>
-            <p:cNvSpPr/>
-            <p:nvPr/>
-          </p:nvSpPr>
-          <p:spPr>
-            <a:xfrm>
-              <a:off x="2713500" y="5448051"/>
-              <a:ext cx="252022" cy="0"/>
-            </a:xfrm>
-            <a:prstGeom prst="rect">
-              <a:avLst/>
-            </a:prstGeom>
-            <a:solidFill>
-              <a:srgbClr val="999999">
-                <a:alpha val="85098"/>
-              </a:srgbClr>
-            </a:solidFill>
-            <a:ln w="13550" cap="flat">
-              <a:solidFill>
-                <a:srgbClr val="000000">
-                  <a:alpha val="100000"/>
-                </a:srgbClr>
-              </a:solidFill>
-              <a:prstDash val="solid"/>
-              <a:miter/>
-            </a:ln>
-          </p:spPr>
-          <p:txBody>
-            <a:bodyPr/>
-            <a:lstStyle/>
-            <a:p/>
-          </p:txBody>
-        </p:sp>
-        <p:sp>
-          <p:nvSpPr>
-            <p:cNvPr id="52" name="rc52"/>
-            <p:cNvSpPr/>
-            <p:nvPr/>
-          </p:nvSpPr>
-          <p:spPr>
-            <a:xfrm>
-              <a:off x="2965522" y="5448051"/>
-              <a:ext cx="252022" cy="0"/>
-            </a:xfrm>
-            <a:prstGeom prst="rect">
-              <a:avLst/>
-            </a:prstGeom>
-            <a:solidFill>
-              <a:srgbClr val="999999">
-                <a:alpha val="85098"/>
-              </a:srgbClr>
-            </a:solidFill>
-            <a:ln w="13550" cap="flat">
-              <a:solidFill>
-                <a:srgbClr val="000000">
-                  <a:alpha val="100000"/>
-                </a:srgbClr>
-              </a:solidFill>
-              <a:prstDash val="solid"/>
-              <a:miter/>
-            </a:ln>
-          </p:spPr>
-          <p:txBody>
-            <a:bodyPr/>
-            <a:lstStyle/>
-            <a:p/>
-          </p:txBody>
-        </p:sp>
-        <p:sp>
-          <p:nvSpPr>
-            <p:cNvPr id="53" name="rc53"/>
-            <p:cNvSpPr/>
-            <p:nvPr/>
-          </p:nvSpPr>
-          <p:spPr>
-            <a:xfrm>
-              <a:off x="3217545" y="5448051"/>
-              <a:ext cx="252022" cy="0"/>
-            </a:xfrm>
-            <a:prstGeom prst="rect">
-              <a:avLst/>
-            </a:prstGeom>
-            <a:solidFill>
-              <a:srgbClr val="999999">
-                <a:alpha val="85098"/>
-              </a:srgbClr>
-            </a:solidFill>
-            <a:ln w="13550" cap="flat">
-              <a:solidFill>
-                <a:srgbClr val="000000">
-                  <a:alpha val="100000"/>
-                </a:srgbClr>
-              </a:solidFill>
-              <a:prstDash val="solid"/>
-              <a:miter/>
-            </a:ln>
-          </p:spPr>
-          <p:txBody>
-            <a:bodyPr/>
-            <a:lstStyle/>
-            <a:p/>
-          </p:txBody>
-        </p:sp>
-        <p:sp>
-          <p:nvSpPr>
-            <p:cNvPr id="54" name="rc54"/>
-            <p:cNvSpPr/>
-            <p:nvPr/>
-          </p:nvSpPr>
-          <p:spPr>
-            <a:xfrm>
-              <a:off x="3469568" y="5448051"/>
-              <a:ext cx="252022" cy="0"/>
-            </a:xfrm>
-            <a:prstGeom prst="rect">
-              <a:avLst/>
-            </a:prstGeom>
-            <a:solidFill>
-              <a:srgbClr val="999999">
-                <a:alpha val="85098"/>
-              </a:srgbClr>
-            </a:solidFill>
-            <a:ln w="13550" cap="flat">
-              <a:solidFill>
-                <a:srgbClr val="000000">
-                  <a:alpha val="100000"/>
-                </a:srgbClr>
-              </a:solidFill>
-              <a:prstDash val="solid"/>
-              <a:miter/>
-            </a:ln>
-          </p:spPr>
-          <p:txBody>
-            <a:bodyPr/>
-            <a:lstStyle/>
-            <a:p/>
-          </p:txBody>
-        </p:sp>
-        <p:sp>
-          <p:nvSpPr>
-            <p:cNvPr id="55" name="rc55"/>
-            <p:cNvSpPr/>
-            <p:nvPr/>
-          </p:nvSpPr>
-          <p:spPr>
-            <a:xfrm>
-              <a:off x="3721591" y="5448051"/>
-              <a:ext cx="252022" cy="0"/>
-            </a:xfrm>
-            <a:prstGeom prst="rect">
-              <a:avLst/>
-            </a:prstGeom>
-            <a:solidFill>
-              <a:srgbClr val="999999">
-                <a:alpha val="85098"/>
-              </a:srgbClr>
-            </a:solidFill>
-            <a:ln w="13550" cap="flat">
-              <a:solidFill>
-                <a:srgbClr val="000000">
-                  <a:alpha val="100000"/>
-                </a:srgbClr>
-              </a:solidFill>
-              <a:prstDash val="solid"/>
-              <a:miter/>
-            </a:ln>
-          </p:spPr>
-          <p:txBody>
-            <a:bodyPr/>
-            <a:lstStyle/>
-            <a:p/>
-          </p:txBody>
-        </p:sp>
-        <p:sp>
-          <p:nvSpPr>
-            <p:cNvPr id="56" name="rc56"/>
-            <p:cNvSpPr/>
-            <p:nvPr/>
-          </p:nvSpPr>
-          <p:spPr>
-            <a:xfrm>
-              <a:off x="3973614" y="5448051"/>
-              <a:ext cx="252022" cy="0"/>
-            </a:xfrm>
-            <a:prstGeom prst="rect">
-              <a:avLst/>
-            </a:prstGeom>
-            <a:solidFill>
-              <a:srgbClr val="999999">
-                <a:alpha val="85098"/>
-              </a:srgbClr>
-            </a:solidFill>
-            <a:ln w="13550" cap="flat">
-              <a:solidFill>
-                <a:srgbClr val="000000">
-                  <a:alpha val="100000"/>
-                </a:srgbClr>
-              </a:solidFill>
-              <a:prstDash val="solid"/>
-              <a:miter/>
-            </a:ln>
-          </p:spPr>
-          <p:txBody>
-            <a:bodyPr/>
-            <a:lstStyle/>
-            <a:p/>
-          </p:txBody>
-        </p:sp>
-        <p:sp>
-          <p:nvSpPr>
-            <p:cNvPr id="57" name="rc57"/>
-            <p:cNvSpPr/>
-            <p:nvPr/>
-          </p:nvSpPr>
-          <p:spPr>
-            <a:xfrm>
-              <a:off x="4225636" y="2142849"/>
-              <a:ext cx="252022" cy="3305201"/>
-            </a:xfrm>
-            <a:prstGeom prst="rect">
-              <a:avLst/>
-            </a:prstGeom>
-            <a:solidFill>
-              <a:srgbClr val="999999">
-                <a:alpha val="85098"/>
-              </a:srgbClr>
-            </a:solidFill>
-            <a:ln w="13550" cap="flat">
-              <a:solidFill>
-                <a:srgbClr val="000000">
-                  <a:alpha val="100000"/>
-                </a:srgbClr>
-              </a:solidFill>
-              <a:prstDash val="solid"/>
-              <a:miter/>
-            </a:ln>
-          </p:spPr>
-          <p:txBody>
-            <a:bodyPr/>
-            <a:lstStyle/>
-            <a:p/>
-          </p:txBody>
-        </p:sp>
-        <p:sp>
-          <p:nvSpPr>
-            <p:cNvPr id="58" name="rc58"/>
-            <p:cNvSpPr/>
-            <p:nvPr/>
-          </p:nvSpPr>
-          <p:spPr>
-            <a:xfrm>
-              <a:off x="4477659" y="3077653"/>
-              <a:ext cx="252022" cy="2370397"/>
-            </a:xfrm>
-            <a:prstGeom prst="rect">
-              <a:avLst/>
-            </a:prstGeom>
-            <a:solidFill>
-              <a:srgbClr val="999999">
-                <a:alpha val="85098"/>
-              </a:srgbClr>
-            </a:solidFill>
-            <a:ln w="13550" cap="flat">
-              <a:solidFill>
-                <a:srgbClr val="000000">
-                  <a:alpha val="100000"/>
-                </a:srgbClr>
-              </a:solidFill>
-              <a:prstDash val="solid"/>
-              <a:miter/>
-            </a:ln>
-          </p:spPr>
-          <p:txBody>
-            <a:bodyPr/>
-            <a:lstStyle/>
-            <a:p/>
-          </p:txBody>
-        </p:sp>
-        <p:sp>
-          <p:nvSpPr>
-            <p:cNvPr id="59" name="rc59"/>
-            <p:cNvSpPr/>
-            <p:nvPr/>
-          </p:nvSpPr>
-          <p:spPr>
-            <a:xfrm>
-              <a:off x="4729682" y="3077653"/>
-              <a:ext cx="252022" cy="2370397"/>
-            </a:xfrm>
-            <a:prstGeom prst="rect">
-              <a:avLst/>
-            </a:prstGeom>
-            <a:solidFill>
-              <a:srgbClr val="999999">
-                <a:alpha val="85098"/>
-              </a:srgbClr>
-            </a:solidFill>
-            <a:ln w="13550" cap="flat">
-              <a:solidFill>
-                <a:srgbClr val="000000">
-                  <a:alpha val="100000"/>
-                </a:srgbClr>
-              </a:solidFill>
-              <a:prstDash val="solid"/>
-              <a:miter/>
-            </a:ln>
-          </p:spPr>
-          <p:txBody>
-            <a:bodyPr/>
-            <a:lstStyle/>
-            <a:p/>
-          </p:txBody>
-        </p:sp>
-        <p:sp>
-          <p:nvSpPr>
-            <p:cNvPr id="60" name="rc60"/>
-            <p:cNvSpPr/>
-            <p:nvPr/>
-          </p:nvSpPr>
-          <p:spPr>
-            <a:xfrm>
-              <a:off x="4981705" y="2977496"/>
-              <a:ext cx="252022" cy="2470554"/>
-            </a:xfrm>
-            <a:prstGeom prst="rect">
-              <a:avLst/>
-            </a:prstGeom>
-            <a:solidFill>
-              <a:srgbClr val="999999">
-                <a:alpha val="85098"/>
-              </a:srgbClr>
-            </a:solidFill>
-            <a:ln w="13550" cap="flat">
-              <a:solidFill>
-                <a:srgbClr val="000000">
-                  <a:alpha val="100000"/>
-                </a:srgbClr>
-              </a:solidFill>
-              <a:prstDash val="solid"/>
-              <a:miter/>
-            </a:ln>
-          </p:spPr>
-          <p:txBody>
-            <a:bodyPr/>
-            <a:lstStyle/>
-            <a:p/>
-          </p:txBody>
-        </p:sp>
-        <p:sp>
-          <p:nvSpPr>
-            <p:cNvPr id="61" name="rc61"/>
-            <p:cNvSpPr/>
-            <p:nvPr/>
-          </p:nvSpPr>
-          <p:spPr>
-            <a:xfrm>
-              <a:off x="5233727" y="4079230"/>
-              <a:ext cx="252022" cy="1368820"/>
-            </a:xfrm>
-            <a:prstGeom prst="rect">
-              <a:avLst/>
-            </a:prstGeom>
-            <a:solidFill>
-              <a:srgbClr val="999999">
-                <a:alpha val="85098"/>
-              </a:srgbClr>
-            </a:solidFill>
-            <a:ln w="13550" cap="flat">
-              <a:solidFill>
-                <a:srgbClr val="000000">
-                  <a:alpha val="100000"/>
-                </a:srgbClr>
-              </a:solidFill>
-              <a:prstDash val="solid"/>
-              <a:miter/>
-            </a:ln>
-          </p:spPr>
-          <p:txBody>
-            <a:bodyPr/>
-            <a:lstStyle/>
-            <a:p/>
-          </p:txBody>
-        </p:sp>
-        <p:sp>
-          <p:nvSpPr>
-            <p:cNvPr id="62" name="rc62"/>
-            <p:cNvSpPr/>
-            <p:nvPr/>
-          </p:nvSpPr>
-          <p:spPr>
-            <a:xfrm>
-              <a:off x="5485750" y="4146001"/>
-              <a:ext cx="252022" cy="1302049"/>
-            </a:xfrm>
-            <a:prstGeom prst="rect">
-              <a:avLst/>
-            </a:prstGeom>
-            <a:solidFill>
-              <a:srgbClr val="999999">
-                <a:alpha val="85098"/>
-              </a:srgbClr>
-            </a:solidFill>
-            <a:ln w="13550" cap="flat">
-              <a:solidFill>
-                <a:srgbClr val="000000">
-                  <a:alpha val="100000"/>
-                </a:srgbClr>
-              </a:solidFill>
-              <a:prstDash val="solid"/>
-              <a:miter/>
-            </a:ln>
-          </p:spPr>
-          <p:txBody>
-            <a:bodyPr/>
-            <a:lstStyle/>
-            <a:p/>
-          </p:txBody>
-        </p:sp>
-        <p:sp>
-          <p:nvSpPr>
-            <p:cNvPr id="63" name="rc63"/>
-            <p:cNvSpPr/>
-            <p:nvPr/>
-          </p:nvSpPr>
-          <p:spPr>
-            <a:xfrm>
-              <a:off x="5737773" y="4780333"/>
-              <a:ext cx="252022" cy="667717"/>
-            </a:xfrm>
-            <a:prstGeom prst="rect">
-              <a:avLst/>
-            </a:prstGeom>
-            <a:solidFill>
-              <a:srgbClr val="999999">
-                <a:alpha val="85098"/>
-              </a:srgbClr>
-            </a:solidFill>
-            <a:ln w="13550" cap="flat">
-              <a:solidFill>
-                <a:srgbClr val="000000">
-                  <a:alpha val="100000"/>
-                </a:srgbClr>
-              </a:solidFill>
-              <a:prstDash val="solid"/>
-              <a:miter/>
-            </a:ln>
-          </p:spPr>
-          <p:txBody>
-            <a:bodyPr/>
-            <a:lstStyle/>
-            <a:p/>
-          </p:txBody>
-        </p:sp>
-        <p:sp>
-          <p:nvSpPr>
-            <p:cNvPr id="64" name="rc64"/>
-            <p:cNvSpPr/>
-            <p:nvPr/>
-          </p:nvSpPr>
-          <p:spPr>
-            <a:xfrm>
-              <a:off x="5989796" y="4713561"/>
-              <a:ext cx="252022" cy="734489"/>
-            </a:xfrm>
-            <a:prstGeom prst="rect">
-              <a:avLst/>
-            </a:prstGeom>
-            <a:solidFill>
-              <a:srgbClr val="999999">
-                <a:alpha val="85098"/>
-              </a:srgbClr>
-            </a:solidFill>
-            <a:ln w="13550" cap="flat">
-              <a:solidFill>
-                <a:srgbClr val="000000">
-                  <a:alpha val="100000"/>
-                </a:srgbClr>
-              </a:solidFill>
-              <a:prstDash val="solid"/>
-              <a:miter/>
-            </a:ln>
-          </p:spPr>
-          <p:txBody>
-            <a:bodyPr/>
-            <a:lstStyle/>
-            <a:p/>
-          </p:txBody>
-        </p:sp>
-        <p:sp>
-          <p:nvSpPr>
-            <p:cNvPr id="65" name="rc65"/>
-            <p:cNvSpPr/>
-            <p:nvPr/>
-          </p:nvSpPr>
-          <p:spPr>
-            <a:xfrm>
-              <a:off x="6241819" y="4880491"/>
-              <a:ext cx="252022" cy="567559"/>
-            </a:xfrm>
-            <a:prstGeom prst="rect">
-              <a:avLst/>
-            </a:prstGeom>
-            <a:solidFill>
-              <a:srgbClr val="999999">
-                <a:alpha val="85098"/>
-              </a:srgbClr>
-            </a:solidFill>
-            <a:ln w="13550" cap="flat">
-              <a:solidFill>
-                <a:srgbClr val="000000">
-                  <a:alpha val="100000"/>
-                </a:srgbClr>
-              </a:solidFill>
-              <a:prstDash val="solid"/>
-              <a:miter/>
-            </a:ln>
-          </p:spPr>
-          <p:txBody>
-            <a:bodyPr/>
-            <a:lstStyle/>
-            <a:p/>
-          </p:txBody>
-        </p:sp>
-        <p:sp>
-          <p:nvSpPr>
-            <p:cNvPr id="66" name="rc66"/>
-            <p:cNvSpPr/>
-            <p:nvPr/>
-          </p:nvSpPr>
-          <p:spPr>
-            <a:xfrm>
-              <a:off x="6493841" y="5247735"/>
-              <a:ext cx="252022" cy="200315"/>
-            </a:xfrm>
-            <a:prstGeom prst="rect">
-              <a:avLst/>
-            </a:prstGeom>
-            <a:solidFill>
-              <a:srgbClr val="999999">
-                <a:alpha val="85098"/>
-              </a:srgbClr>
-            </a:solidFill>
-            <a:ln w="13550" cap="flat">
-              <a:solidFill>
-                <a:srgbClr val="000000">
-                  <a:alpha val="100000"/>
-                </a:srgbClr>
-              </a:solidFill>
-              <a:prstDash val="solid"/>
-              <a:miter/>
-            </a:ln>
-          </p:spPr>
-          <p:txBody>
-            <a:bodyPr/>
-            <a:lstStyle/>
-            <a:p/>
-          </p:txBody>
-        </p:sp>
-        <p:sp>
-          <p:nvSpPr>
-            <p:cNvPr id="67" name="rc67"/>
-            <p:cNvSpPr/>
-            <p:nvPr/>
-          </p:nvSpPr>
-          <p:spPr>
-            <a:xfrm>
-              <a:off x="6745864" y="5314507"/>
-              <a:ext cx="252022" cy="133543"/>
-            </a:xfrm>
-            <a:prstGeom prst="rect">
-              <a:avLst/>
-            </a:prstGeom>
-            <a:solidFill>
-              <a:srgbClr val="999999">
-                <a:alpha val="85098"/>
-              </a:srgbClr>
-            </a:solidFill>
-            <a:ln w="13550" cap="flat">
-              <a:solidFill>
-                <a:srgbClr val="000000">
-                  <a:alpha val="100000"/>
-                </a:srgbClr>
-              </a:solidFill>
-              <a:prstDash val="solid"/>
-              <a:miter/>
-            </a:ln>
-          </p:spPr>
-          <p:txBody>
-            <a:bodyPr/>
-            <a:lstStyle/>
-            <a:p/>
-          </p:txBody>
-        </p:sp>
-        <p:sp>
-          <p:nvSpPr>
-            <p:cNvPr id="68" name="rc68"/>
-            <p:cNvSpPr/>
-            <p:nvPr/>
-          </p:nvSpPr>
-          <p:spPr>
-            <a:xfrm>
-              <a:off x="6997887" y="5414665"/>
-              <a:ext cx="252022" cy="33385"/>
-            </a:xfrm>
-            <a:prstGeom prst="rect">
-              <a:avLst/>
-            </a:prstGeom>
-            <a:solidFill>
-              <a:srgbClr val="999999">
-                <a:alpha val="85098"/>
-              </a:srgbClr>
-            </a:solidFill>
-            <a:ln w="13550" cap="flat">
-              <a:solidFill>
-                <a:srgbClr val="000000">
-                  <a:alpha val="100000"/>
-                </a:srgbClr>
-              </a:solidFill>
-              <a:prstDash val="solid"/>
-              <a:miter/>
-            </a:ln>
-          </p:spPr>
-          <p:txBody>
-            <a:bodyPr/>
-            <a:lstStyle/>
-            <a:p/>
-          </p:txBody>
-        </p:sp>
-        <p:sp>
-          <p:nvSpPr>
-            <p:cNvPr id="69" name="rc69"/>
-            <p:cNvSpPr/>
-            <p:nvPr/>
-          </p:nvSpPr>
-          <p:spPr>
-            <a:xfrm>
-              <a:off x="7249910" y="5347893"/>
-              <a:ext cx="252022" cy="100157"/>
-            </a:xfrm>
-            <a:prstGeom prst="rect">
-              <a:avLst/>
-            </a:prstGeom>
-            <a:solidFill>
-              <a:srgbClr val="999999">
-                <a:alpha val="85098"/>
-              </a:srgbClr>
-            </a:solidFill>
-            <a:ln w="13550" cap="flat">
-              <a:solidFill>
-                <a:srgbClr val="000000">
-                  <a:alpha val="100000"/>
-                </a:srgbClr>
-              </a:solidFill>
-              <a:prstDash val="solid"/>
-              <a:miter/>
-            </a:ln>
-          </p:spPr>
-          <p:txBody>
-            <a:bodyPr/>
-            <a:lstStyle/>
-            <a:p/>
-          </p:txBody>
-        </p:sp>
-        <p:sp>
-          <p:nvSpPr>
-            <p:cNvPr id="70" name="rc70"/>
-            <p:cNvSpPr/>
-            <p:nvPr/>
-          </p:nvSpPr>
-          <p:spPr>
-            <a:xfrm>
-              <a:off x="7501933" y="5414665"/>
-              <a:ext cx="252022" cy="33385"/>
-            </a:xfrm>
-            <a:prstGeom prst="rect">
-              <a:avLst/>
-            </a:prstGeom>
-            <a:solidFill>
-              <a:srgbClr val="999999">
-                <a:alpha val="85098"/>
-              </a:srgbClr>
-            </a:solidFill>
-            <a:ln w="13550" cap="flat">
-              <a:solidFill>
-                <a:srgbClr val="000000">
-                  <a:alpha val="100000"/>
-                </a:srgbClr>
-              </a:solidFill>
-              <a:prstDash val="solid"/>
-              <a:miter/>
-            </a:ln>
-          </p:spPr>
-          <p:txBody>
-            <a:bodyPr/>
-            <a:lstStyle/>
-            <a:p/>
-          </p:txBody>
-        </p:sp>
-        <p:sp>
-          <p:nvSpPr>
-            <p:cNvPr id="71" name="rc71"/>
-            <p:cNvSpPr/>
-            <p:nvPr/>
-          </p:nvSpPr>
-          <p:spPr>
-            <a:xfrm>
-              <a:off x="7753955" y="5448051"/>
-              <a:ext cx="252022" cy="0"/>
-            </a:xfrm>
-            <a:prstGeom prst="rect">
-              <a:avLst/>
-            </a:prstGeom>
-            <a:solidFill>
-              <a:srgbClr val="999999">
-                <a:alpha val="85098"/>
-              </a:srgbClr>
-            </a:solidFill>
-            <a:ln w="13550" cap="flat">
-              <a:solidFill>
-                <a:srgbClr val="000000">
-                  <a:alpha val="100000"/>
-                </a:srgbClr>
-              </a:solidFill>
-              <a:prstDash val="solid"/>
-              <a:miter/>
-            </a:ln>
-          </p:spPr>
-          <p:txBody>
-            <a:bodyPr/>
-            <a:lstStyle/>
-            <a:p/>
-          </p:txBody>
-        </p:sp>
-        <p:sp>
-          <p:nvSpPr>
-            <p:cNvPr id="72" name="rc72"/>
-            <p:cNvSpPr/>
-            <p:nvPr/>
-          </p:nvSpPr>
-          <p:spPr>
-            <a:xfrm>
-              <a:off x="8005978" y="5414665"/>
-              <a:ext cx="252022" cy="33385"/>
-            </a:xfrm>
-            <a:prstGeom prst="rect">
-              <a:avLst/>
-            </a:prstGeom>
-            <a:solidFill>
-              <a:srgbClr val="999999">
-                <a:alpha val="85098"/>
-              </a:srgbClr>
-            </a:solidFill>
-            <a:ln w="13550" cap="flat">
-              <a:solidFill>
-                <a:srgbClr val="000000">
-                  <a:alpha val="100000"/>
-                </a:srgbClr>
-              </a:solidFill>
-              <a:prstDash val="solid"/>
-              <a:miter/>
-            </a:ln>
-          </p:spPr>
-          <p:txBody>
-            <a:bodyPr/>
-            <a:lstStyle/>
-            <a:p/>
-          </p:txBody>
-        </p:sp>
-        <p:sp>
-          <p:nvSpPr>
-            <p:cNvPr id="73" name="pl73"/>
-            <p:cNvSpPr/>
-            <p:nvPr/>
-          </p:nvSpPr>
-          <p:spPr>
-            <a:xfrm>
-              <a:off x="4225636" y="1977589"/>
+            <p:cNvPr id="32" name="pl32"/>
+            <p:cNvSpPr/>
+            <p:nvPr/>
+          </p:nvSpPr>
+          <p:spPr>
+            <a:xfrm>
+              <a:off x="2619991" y="1977589"/>
               <a:ext cx="0" cy="3635721"/>
             </a:xfrm>
             <a:custGeom>
@@ -4825,6 +3494,5212 @@
                 </a:path>
               </a:pathLst>
             </a:custGeom>
+            <a:ln w="17246" cap="flat">
+              <a:solidFill>
+                <a:srgbClr val="EBEBEB">
+                  <a:alpha val="100000"/>
+                </a:srgbClr>
+              </a:solidFill>
+              <a:prstDash val="solid"/>
+              <a:round/>
+            </a:ln>
+          </p:spPr>
+          <p:txBody>
+            <a:bodyPr/>
+            <a:lstStyle/>
+            <a:p/>
+          </p:txBody>
+        </p:sp>
+        <p:sp>
+          <p:nvSpPr>
+            <p:cNvPr id="33" name="pl33"/>
+            <p:cNvSpPr/>
+            <p:nvPr/>
+          </p:nvSpPr>
+          <p:spPr>
+            <a:xfrm>
+              <a:off x="3141197" y="1977589"/>
+              <a:ext cx="0" cy="3635721"/>
+            </a:xfrm>
+            <a:custGeom>
+              <a:avLst/>
+              <a:pathLst>
+                <a:path w="0" h="3635721">
+                  <a:moveTo>
+                    <a:pt x="0" y="3635721"/>
+                  </a:moveTo>
+                  <a:lnTo>
+                    <a:pt x="0" y="0"/>
+                  </a:lnTo>
+                  <a:lnTo>
+                    <a:pt x="0" y="0"/>
+                  </a:lnTo>
+                </a:path>
+              </a:pathLst>
+            </a:custGeom>
+            <a:ln w="17246" cap="flat">
+              <a:solidFill>
+                <a:srgbClr val="EBEBEB">
+                  <a:alpha val="100000"/>
+                </a:srgbClr>
+              </a:solidFill>
+              <a:prstDash val="solid"/>
+              <a:round/>
+            </a:ln>
+          </p:spPr>
+          <p:txBody>
+            <a:bodyPr/>
+            <a:lstStyle/>
+            <a:p/>
+          </p:txBody>
+        </p:sp>
+        <p:sp>
+          <p:nvSpPr>
+            <p:cNvPr id="34" name="pl34"/>
+            <p:cNvSpPr/>
+            <p:nvPr/>
+          </p:nvSpPr>
+          <p:spPr>
+            <a:xfrm>
+              <a:off x="3662404" y="1977589"/>
+              <a:ext cx="0" cy="3635721"/>
+            </a:xfrm>
+            <a:custGeom>
+              <a:avLst/>
+              <a:pathLst>
+                <a:path w="0" h="3635721">
+                  <a:moveTo>
+                    <a:pt x="0" y="3635721"/>
+                  </a:moveTo>
+                  <a:lnTo>
+                    <a:pt x="0" y="0"/>
+                  </a:lnTo>
+                  <a:lnTo>
+                    <a:pt x="0" y="0"/>
+                  </a:lnTo>
+                </a:path>
+              </a:pathLst>
+            </a:custGeom>
+            <a:ln w="17246" cap="flat">
+              <a:solidFill>
+                <a:srgbClr val="EBEBEB">
+                  <a:alpha val="100000"/>
+                </a:srgbClr>
+              </a:solidFill>
+              <a:prstDash val="solid"/>
+              <a:round/>
+            </a:ln>
+          </p:spPr>
+          <p:txBody>
+            <a:bodyPr/>
+            <a:lstStyle/>
+            <a:p/>
+          </p:txBody>
+        </p:sp>
+        <p:sp>
+          <p:nvSpPr>
+            <p:cNvPr id="35" name="pl35"/>
+            <p:cNvSpPr/>
+            <p:nvPr/>
+          </p:nvSpPr>
+          <p:spPr>
+            <a:xfrm>
+              <a:off x="4183611" y="1977589"/>
+              <a:ext cx="0" cy="3635721"/>
+            </a:xfrm>
+            <a:custGeom>
+              <a:avLst/>
+              <a:pathLst>
+                <a:path w="0" h="3635721">
+                  <a:moveTo>
+                    <a:pt x="0" y="3635721"/>
+                  </a:moveTo>
+                  <a:lnTo>
+                    <a:pt x="0" y="0"/>
+                  </a:lnTo>
+                  <a:lnTo>
+                    <a:pt x="0" y="0"/>
+                  </a:lnTo>
+                </a:path>
+              </a:pathLst>
+            </a:custGeom>
+            <a:ln w="17246" cap="flat">
+              <a:solidFill>
+                <a:srgbClr val="EBEBEB">
+                  <a:alpha val="100000"/>
+                </a:srgbClr>
+              </a:solidFill>
+              <a:prstDash val="solid"/>
+              <a:round/>
+            </a:ln>
+          </p:spPr>
+          <p:txBody>
+            <a:bodyPr/>
+            <a:lstStyle/>
+            <a:p/>
+          </p:txBody>
+        </p:sp>
+        <p:sp>
+          <p:nvSpPr>
+            <p:cNvPr id="36" name="pl36"/>
+            <p:cNvSpPr/>
+            <p:nvPr/>
+          </p:nvSpPr>
+          <p:spPr>
+            <a:xfrm>
+              <a:off x="4704817" y="1977589"/>
+              <a:ext cx="0" cy="3635721"/>
+            </a:xfrm>
+            <a:custGeom>
+              <a:avLst/>
+              <a:pathLst>
+                <a:path w="0" h="3635721">
+                  <a:moveTo>
+                    <a:pt x="0" y="3635721"/>
+                  </a:moveTo>
+                  <a:lnTo>
+                    <a:pt x="0" y="0"/>
+                  </a:lnTo>
+                  <a:lnTo>
+                    <a:pt x="0" y="0"/>
+                  </a:lnTo>
+                </a:path>
+              </a:pathLst>
+            </a:custGeom>
+            <a:ln w="17246" cap="flat">
+              <a:solidFill>
+                <a:srgbClr val="EBEBEB">
+                  <a:alpha val="100000"/>
+                </a:srgbClr>
+              </a:solidFill>
+              <a:prstDash val="solid"/>
+              <a:round/>
+            </a:ln>
+          </p:spPr>
+          <p:txBody>
+            <a:bodyPr/>
+            <a:lstStyle/>
+            <a:p/>
+          </p:txBody>
+        </p:sp>
+        <p:sp>
+          <p:nvSpPr>
+            <p:cNvPr id="37" name="pl37"/>
+            <p:cNvSpPr/>
+            <p:nvPr/>
+          </p:nvSpPr>
+          <p:spPr>
+            <a:xfrm>
+              <a:off x="5226024" y="1977589"/>
+              <a:ext cx="0" cy="3635721"/>
+            </a:xfrm>
+            <a:custGeom>
+              <a:avLst/>
+              <a:pathLst>
+                <a:path w="0" h="3635721">
+                  <a:moveTo>
+                    <a:pt x="0" y="3635721"/>
+                  </a:moveTo>
+                  <a:lnTo>
+                    <a:pt x="0" y="0"/>
+                  </a:lnTo>
+                  <a:lnTo>
+                    <a:pt x="0" y="0"/>
+                  </a:lnTo>
+                </a:path>
+              </a:pathLst>
+            </a:custGeom>
+            <a:ln w="17246" cap="flat">
+              <a:solidFill>
+                <a:srgbClr val="EBEBEB">
+                  <a:alpha val="100000"/>
+                </a:srgbClr>
+              </a:solidFill>
+              <a:prstDash val="solid"/>
+              <a:round/>
+            </a:ln>
+          </p:spPr>
+          <p:txBody>
+            <a:bodyPr/>
+            <a:lstStyle/>
+            <a:p/>
+          </p:txBody>
+        </p:sp>
+        <p:sp>
+          <p:nvSpPr>
+            <p:cNvPr id="38" name="pl38"/>
+            <p:cNvSpPr/>
+            <p:nvPr/>
+          </p:nvSpPr>
+          <p:spPr>
+            <a:xfrm>
+              <a:off x="5747231" y="1977589"/>
+              <a:ext cx="0" cy="3635721"/>
+            </a:xfrm>
+            <a:custGeom>
+              <a:avLst/>
+              <a:pathLst>
+                <a:path w="0" h="3635721">
+                  <a:moveTo>
+                    <a:pt x="0" y="3635721"/>
+                  </a:moveTo>
+                  <a:lnTo>
+                    <a:pt x="0" y="0"/>
+                  </a:lnTo>
+                  <a:lnTo>
+                    <a:pt x="0" y="0"/>
+                  </a:lnTo>
+                </a:path>
+              </a:pathLst>
+            </a:custGeom>
+            <a:ln w="17246" cap="flat">
+              <a:solidFill>
+                <a:srgbClr val="EBEBEB">
+                  <a:alpha val="100000"/>
+                </a:srgbClr>
+              </a:solidFill>
+              <a:prstDash val="solid"/>
+              <a:round/>
+            </a:ln>
+          </p:spPr>
+          <p:txBody>
+            <a:bodyPr/>
+            <a:lstStyle/>
+            <a:p/>
+          </p:txBody>
+        </p:sp>
+        <p:sp>
+          <p:nvSpPr>
+            <p:cNvPr id="39" name="pl39"/>
+            <p:cNvSpPr/>
+            <p:nvPr/>
+          </p:nvSpPr>
+          <p:spPr>
+            <a:xfrm>
+              <a:off x="6268438" y="1977589"/>
+              <a:ext cx="0" cy="3635721"/>
+            </a:xfrm>
+            <a:custGeom>
+              <a:avLst/>
+              <a:pathLst>
+                <a:path w="0" h="3635721">
+                  <a:moveTo>
+                    <a:pt x="0" y="3635721"/>
+                  </a:moveTo>
+                  <a:lnTo>
+                    <a:pt x="0" y="0"/>
+                  </a:lnTo>
+                  <a:lnTo>
+                    <a:pt x="0" y="0"/>
+                  </a:lnTo>
+                </a:path>
+              </a:pathLst>
+            </a:custGeom>
+            <a:ln w="17246" cap="flat">
+              <a:solidFill>
+                <a:srgbClr val="EBEBEB">
+                  <a:alpha val="100000"/>
+                </a:srgbClr>
+              </a:solidFill>
+              <a:prstDash val="solid"/>
+              <a:round/>
+            </a:ln>
+          </p:spPr>
+          <p:txBody>
+            <a:bodyPr/>
+            <a:lstStyle/>
+            <a:p/>
+          </p:txBody>
+        </p:sp>
+        <p:sp>
+          <p:nvSpPr>
+            <p:cNvPr id="40" name="pl40"/>
+            <p:cNvSpPr/>
+            <p:nvPr/>
+          </p:nvSpPr>
+          <p:spPr>
+            <a:xfrm>
+              <a:off x="6789644" y="1977589"/>
+              <a:ext cx="0" cy="3635721"/>
+            </a:xfrm>
+            <a:custGeom>
+              <a:avLst/>
+              <a:pathLst>
+                <a:path w="0" h="3635721">
+                  <a:moveTo>
+                    <a:pt x="0" y="3635721"/>
+                  </a:moveTo>
+                  <a:lnTo>
+                    <a:pt x="0" y="0"/>
+                  </a:lnTo>
+                  <a:lnTo>
+                    <a:pt x="0" y="0"/>
+                  </a:lnTo>
+                </a:path>
+              </a:pathLst>
+            </a:custGeom>
+            <a:ln w="17246" cap="flat">
+              <a:solidFill>
+                <a:srgbClr val="EBEBEB">
+                  <a:alpha val="100000"/>
+                </a:srgbClr>
+              </a:solidFill>
+              <a:prstDash val="solid"/>
+              <a:round/>
+            </a:ln>
+          </p:spPr>
+          <p:txBody>
+            <a:bodyPr/>
+            <a:lstStyle/>
+            <a:p/>
+          </p:txBody>
+        </p:sp>
+        <p:sp>
+          <p:nvSpPr>
+            <p:cNvPr id="41" name="pl41"/>
+            <p:cNvSpPr/>
+            <p:nvPr/>
+          </p:nvSpPr>
+          <p:spPr>
+            <a:xfrm>
+              <a:off x="7310851" y="1977589"/>
+              <a:ext cx="0" cy="3635721"/>
+            </a:xfrm>
+            <a:custGeom>
+              <a:avLst/>
+              <a:pathLst>
+                <a:path w="0" h="3635721">
+                  <a:moveTo>
+                    <a:pt x="0" y="3635721"/>
+                  </a:moveTo>
+                  <a:lnTo>
+                    <a:pt x="0" y="0"/>
+                  </a:lnTo>
+                  <a:lnTo>
+                    <a:pt x="0" y="0"/>
+                  </a:lnTo>
+                </a:path>
+              </a:pathLst>
+            </a:custGeom>
+            <a:ln w="17246" cap="flat">
+              <a:solidFill>
+                <a:srgbClr val="EBEBEB">
+                  <a:alpha val="100000"/>
+                </a:srgbClr>
+              </a:solidFill>
+              <a:prstDash val="solid"/>
+              <a:round/>
+            </a:ln>
+          </p:spPr>
+          <p:txBody>
+            <a:bodyPr/>
+            <a:lstStyle/>
+            <a:p/>
+          </p:txBody>
+        </p:sp>
+        <p:sp>
+          <p:nvSpPr>
+            <p:cNvPr id="42" name="pl42"/>
+            <p:cNvSpPr/>
+            <p:nvPr/>
+          </p:nvSpPr>
+          <p:spPr>
+            <a:xfrm>
+              <a:off x="7832058" y="1977589"/>
+              <a:ext cx="0" cy="3635721"/>
+            </a:xfrm>
+            <a:custGeom>
+              <a:avLst/>
+              <a:pathLst>
+                <a:path w="0" h="3635721">
+                  <a:moveTo>
+                    <a:pt x="0" y="3635721"/>
+                  </a:moveTo>
+                  <a:lnTo>
+                    <a:pt x="0" y="0"/>
+                  </a:lnTo>
+                  <a:lnTo>
+                    <a:pt x="0" y="0"/>
+                  </a:lnTo>
+                </a:path>
+              </a:pathLst>
+            </a:custGeom>
+            <a:ln w="17246" cap="flat">
+              <a:solidFill>
+                <a:srgbClr val="EBEBEB">
+                  <a:alpha val="100000"/>
+                </a:srgbClr>
+              </a:solidFill>
+              <a:prstDash val="solid"/>
+              <a:round/>
+            </a:ln>
+          </p:spPr>
+          <p:txBody>
+            <a:bodyPr/>
+            <a:lstStyle/>
+            <a:p/>
+          </p:txBody>
+        </p:sp>
+        <p:sp>
+          <p:nvSpPr>
+            <p:cNvPr id="43" name="pl43"/>
+            <p:cNvSpPr/>
+            <p:nvPr/>
+          </p:nvSpPr>
+          <p:spPr>
+            <a:xfrm>
+              <a:off x="8353264" y="1977589"/>
+              <a:ext cx="0" cy="3635721"/>
+            </a:xfrm>
+            <a:custGeom>
+              <a:avLst/>
+              <a:pathLst>
+                <a:path w="0" h="3635721">
+                  <a:moveTo>
+                    <a:pt x="0" y="3635721"/>
+                  </a:moveTo>
+                  <a:lnTo>
+                    <a:pt x="0" y="0"/>
+                  </a:lnTo>
+                  <a:lnTo>
+                    <a:pt x="0" y="0"/>
+                  </a:lnTo>
+                </a:path>
+              </a:pathLst>
+            </a:custGeom>
+            <a:ln w="17246" cap="flat">
+              <a:solidFill>
+                <a:srgbClr val="EBEBEB">
+                  <a:alpha val="100000"/>
+                </a:srgbClr>
+              </a:solidFill>
+              <a:prstDash val="solid"/>
+              <a:round/>
+            </a:ln>
+          </p:spPr>
+          <p:txBody>
+            <a:bodyPr/>
+            <a:lstStyle/>
+            <a:p/>
+          </p:txBody>
+        </p:sp>
+        <p:sp>
+          <p:nvSpPr>
+            <p:cNvPr id="44" name="rc44"/>
+            <p:cNvSpPr/>
+            <p:nvPr/>
+          </p:nvSpPr>
+          <p:spPr>
+            <a:xfrm>
+              <a:off x="1264853" y="5380597"/>
+              <a:ext cx="104241" cy="67453"/>
+            </a:xfrm>
+            <a:prstGeom prst="rect">
+              <a:avLst/>
+            </a:prstGeom>
+            <a:solidFill>
+              <a:srgbClr val="E31A1C">
+                <a:alpha val="85098"/>
+              </a:srgbClr>
+            </a:solidFill>
+            <a:ln w="13550" cap="flat">
+              <a:solidFill>
+                <a:srgbClr val="000000">
+                  <a:alpha val="100000"/>
+                </a:srgbClr>
+              </a:solidFill>
+              <a:prstDash val="solid"/>
+              <a:miter/>
+            </a:ln>
+          </p:spPr>
+          <p:txBody>
+            <a:bodyPr/>
+            <a:lstStyle/>
+            <a:p/>
+          </p:txBody>
+        </p:sp>
+        <p:sp>
+          <p:nvSpPr>
+            <p:cNvPr id="45" name="rc45"/>
+            <p:cNvSpPr/>
+            <p:nvPr/>
+          </p:nvSpPr>
+          <p:spPr>
+            <a:xfrm>
+              <a:off x="1369094" y="5380597"/>
+              <a:ext cx="104241" cy="67453"/>
+            </a:xfrm>
+            <a:prstGeom prst="rect">
+              <a:avLst/>
+            </a:prstGeom>
+            <a:solidFill>
+              <a:srgbClr val="E31A1C">
+                <a:alpha val="85098"/>
+              </a:srgbClr>
+            </a:solidFill>
+            <a:ln w="13550" cap="flat">
+              <a:solidFill>
+                <a:srgbClr val="000000">
+                  <a:alpha val="100000"/>
+                </a:srgbClr>
+              </a:solidFill>
+              <a:prstDash val="solid"/>
+              <a:miter/>
+            </a:ln>
+          </p:spPr>
+          <p:txBody>
+            <a:bodyPr/>
+            <a:lstStyle/>
+            <a:p/>
+          </p:txBody>
+        </p:sp>
+        <p:sp>
+          <p:nvSpPr>
+            <p:cNvPr id="46" name="rc46"/>
+            <p:cNvSpPr/>
+            <p:nvPr/>
+          </p:nvSpPr>
+          <p:spPr>
+            <a:xfrm>
+              <a:off x="1473336" y="5380597"/>
+              <a:ext cx="104241" cy="67453"/>
+            </a:xfrm>
+            <a:prstGeom prst="rect">
+              <a:avLst/>
+            </a:prstGeom>
+            <a:solidFill>
+              <a:srgbClr val="E31A1C">
+                <a:alpha val="85098"/>
+              </a:srgbClr>
+            </a:solidFill>
+            <a:ln w="13550" cap="flat">
+              <a:solidFill>
+                <a:srgbClr val="000000">
+                  <a:alpha val="100000"/>
+                </a:srgbClr>
+              </a:solidFill>
+              <a:prstDash val="solid"/>
+              <a:miter/>
+            </a:ln>
+          </p:spPr>
+          <p:txBody>
+            <a:bodyPr/>
+            <a:lstStyle/>
+            <a:p/>
+          </p:txBody>
+        </p:sp>
+        <p:sp>
+          <p:nvSpPr>
+            <p:cNvPr id="47" name="rc47"/>
+            <p:cNvSpPr/>
+            <p:nvPr/>
+          </p:nvSpPr>
+          <p:spPr>
+            <a:xfrm>
+              <a:off x="1577577" y="5313144"/>
+              <a:ext cx="104241" cy="134906"/>
+            </a:xfrm>
+            <a:prstGeom prst="rect">
+              <a:avLst/>
+            </a:prstGeom>
+            <a:solidFill>
+              <a:srgbClr val="E31A1C">
+                <a:alpha val="85098"/>
+              </a:srgbClr>
+            </a:solidFill>
+            <a:ln w="13550" cap="flat">
+              <a:solidFill>
+                <a:srgbClr val="000000">
+                  <a:alpha val="100000"/>
+                </a:srgbClr>
+              </a:solidFill>
+              <a:prstDash val="solid"/>
+              <a:miter/>
+            </a:ln>
+          </p:spPr>
+          <p:txBody>
+            <a:bodyPr/>
+            <a:lstStyle/>
+            <a:p/>
+          </p:txBody>
+        </p:sp>
+        <p:sp>
+          <p:nvSpPr>
+            <p:cNvPr id="48" name="rc48"/>
+            <p:cNvSpPr/>
+            <p:nvPr/>
+          </p:nvSpPr>
+          <p:spPr>
+            <a:xfrm>
+              <a:off x="1681818" y="5178238"/>
+              <a:ext cx="104241" cy="269812"/>
+            </a:xfrm>
+            <a:prstGeom prst="rect">
+              <a:avLst/>
+            </a:prstGeom>
+            <a:solidFill>
+              <a:srgbClr val="E31A1C">
+                <a:alpha val="85098"/>
+              </a:srgbClr>
+            </a:solidFill>
+            <a:ln w="13550" cap="flat">
+              <a:solidFill>
+                <a:srgbClr val="000000">
+                  <a:alpha val="100000"/>
+                </a:srgbClr>
+              </a:solidFill>
+              <a:prstDash val="solid"/>
+              <a:miter/>
+            </a:ln>
+          </p:spPr>
+          <p:txBody>
+            <a:bodyPr/>
+            <a:lstStyle/>
+            <a:p/>
+          </p:txBody>
+        </p:sp>
+        <p:sp>
+          <p:nvSpPr>
+            <p:cNvPr id="49" name="rc49"/>
+            <p:cNvSpPr/>
+            <p:nvPr/>
+          </p:nvSpPr>
+          <p:spPr>
+            <a:xfrm>
+              <a:off x="1786060" y="4975879"/>
+              <a:ext cx="104241" cy="472171"/>
+            </a:xfrm>
+            <a:prstGeom prst="rect">
+              <a:avLst/>
+            </a:prstGeom>
+            <a:solidFill>
+              <a:srgbClr val="E31A1C">
+                <a:alpha val="85098"/>
+              </a:srgbClr>
+            </a:solidFill>
+            <a:ln w="13550" cap="flat">
+              <a:solidFill>
+                <a:srgbClr val="000000">
+                  <a:alpha val="100000"/>
+                </a:srgbClr>
+              </a:solidFill>
+              <a:prstDash val="solid"/>
+              <a:miter/>
+            </a:ln>
+          </p:spPr>
+          <p:txBody>
+            <a:bodyPr/>
+            <a:lstStyle/>
+            <a:p/>
+          </p:txBody>
+        </p:sp>
+        <p:sp>
+          <p:nvSpPr>
+            <p:cNvPr id="50" name="rc50"/>
+            <p:cNvSpPr/>
+            <p:nvPr/>
+          </p:nvSpPr>
+          <p:spPr>
+            <a:xfrm>
+              <a:off x="1890301" y="5110785"/>
+              <a:ext cx="104241" cy="337265"/>
+            </a:xfrm>
+            <a:prstGeom prst="rect">
+              <a:avLst/>
+            </a:prstGeom>
+            <a:solidFill>
+              <a:srgbClr val="E31A1C">
+                <a:alpha val="85098"/>
+              </a:srgbClr>
+            </a:solidFill>
+            <a:ln w="13550" cap="flat">
+              <a:solidFill>
+                <a:srgbClr val="000000">
+                  <a:alpha val="100000"/>
+                </a:srgbClr>
+              </a:solidFill>
+              <a:prstDash val="solid"/>
+              <a:miter/>
+            </a:ln>
+          </p:spPr>
+          <p:txBody>
+            <a:bodyPr/>
+            <a:lstStyle/>
+            <a:p/>
+          </p:txBody>
+        </p:sp>
+        <p:sp>
+          <p:nvSpPr>
+            <p:cNvPr id="51" name="rc51"/>
+            <p:cNvSpPr/>
+            <p:nvPr/>
+          </p:nvSpPr>
+          <p:spPr>
+            <a:xfrm>
+              <a:off x="1994542" y="5313144"/>
+              <a:ext cx="104241" cy="134906"/>
+            </a:xfrm>
+            <a:prstGeom prst="rect">
+              <a:avLst/>
+            </a:prstGeom>
+            <a:solidFill>
+              <a:srgbClr val="E31A1C">
+                <a:alpha val="85098"/>
+              </a:srgbClr>
+            </a:solidFill>
+            <a:ln w="13550" cap="flat">
+              <a:solidFill>
+                <a:srgbClr val="000000">
+                  <a:alpha val="100000"/>
+                </a:srgbClr>
+              </a:solidFill>
+              <a:prstDash val="solid"/>
+              <a:miter/>
+            </a:ln>
+          </p:spPr>
+          <p:txBody>
+            <a:bodyPr/>
+            <a:lstStyle/>
+            <a:p/>
+          </p:txBody>
+        </p:sp>
+        <p:sp>
+          <p:nvSpPr>
+            <p:cNvPr id="52" name="rc52"/>
+            <p:cNvSpPr/>
+            <p:nvPr/>
+          </p:nvSpPr>
+          <p:spPr>
+            <a:xfrm>
+              <a:off x="2098784" y="5245691"/>
+              <a:ext cx="104241" cy="202359"/>
+            </a:xfrm>
+            <a:prstGeom prst="rect">
+              <a:avLst/>
+            </a:prstGeom>
+            <a:solidFill>
+              <a:srgbClr val="E31A1C">
+                <a:alpha val="85098"/>
+              </a:srgbClr>
+            </a:solidFill>
+            <a:ln w="13550" cap="flat">
+              <a:solidFill>
+                <a:srgbClr val="000000">
+                  <a:alpha val="100000"/>
+                </a:srgbClr>
+              </a:solidFill>
+              <a:prstDash val="solid"/>
+              <a:miter/>
+            </a:ln>
+          </p:spPr>
+          <p:txBody>
+            <a:bodyPr/>
+            <a:lstStyle/>
+            <a:p/>
+          </p:txBody>
+        </p:sp>
+        <p:sp>
+          <p:nvSpPr>
+            <p:cNvPr id="53" name="rc53"/>
+            <p:cNvSpPr/>
+            <p:nvPr/>
+          </p:nvSpPr>
+          <p:spPr>
+            <a:xfrm>
+              <a:off x="2203025" y="4908426"/>
+              <a:ext cx="104241" cy="539624"/>
+            </a:xfrm>
+            <a:prstGeom prst="rect">
+              <a:avLst/>
+            </a:prstGeom>
+            <a:solidFill>
+              <a:srgbClr val="E31A1C">
+                <a:alpha val="85098"/>
+              </a:srgbClr>
+            </a:solidFill>
+            <a:ln w="13550" cap="flat">
+              <a:solidFill>
+                <a:srgbClr val="000000">
+                  <a:alpha val="100000"/>
+                </a:srgbClr>
+              </a:solidFill>
+              <a:prstDash val="solid"/>
+              <a:miter/>
+            </a:ln>
+          </p:spPr>
+          <p:txBody>
+            <a:bodyPr/>
+            <a:lstStyle/>
+            <a:p/>
+          </p:txBody>
+        </p:sp>
+        <p:sp>
+          <p:nvSpPr>
+            <p:cNvPr id="54" name="rc54"/>
+            <p:cNvSpPr/>
+            <p:nvPr/>
+          </p:nvSpPr>
+          <p:spPr>
+            <a:xfrm>
+              <a:off x="2307266" y="5313144"/>
+              <a:ext cx="104241" cy="134906"/>
+            </a:xfrm>
+            <a:prstGeom prst="rect">
+              <a:avLst/>
+            </a:prstGeom>
+            <a:solidFill>
+              <a:srgbClr val="E31A1C">
+                <a:alpha val="85098"/>
+              </a:srgbClr>
+            </a:solidFill>
+            <a:ln w="13550" cap="flat">
+              <a:solidFill>
+                <a:srgbClr val="000000">
+                  <a:alpha val="100000"/>
+                </a:srgbClr>
+              </a:solidFill>
+              <a:prstDash val="solid"/>
+              <a:miter/>
+            </a:ln>
+          </p:spPr>
+          <p:txBody>
+            <a:bodyPr/>
+            <a:lstStyle/>
+            <a:p/>
+          </p:txBody>
+        </p:sp>
+        <p:sp>
+          <p:nvSpPr>
+            <p:cNvPr id="55" name="rc55"/>
+            <p:cNvSpPr/>
+            <p:nvPr/>
+          </p:nvSpPr>
+          <p:spPr>
+            <a:xfrm>
+              <a:off x="2411508" y="4638613"/>
+              <a:ext cx="104241" cy="809437"/>
+            </a:xfrm>
+            <a:prstGeom prst="rect">
+              <a:avLst/>
+            </a:prstGeom>
+            <a:solidFill>
+              <a:srgbClr val="E31A1C">
+                <a:alpha val="85098"/>
+              </a:srgbClr>
+            </a:solidFill>
+            <a:ln w="13550" cap="flat">
+              <a:solidFill>
+                <a:srgbClr val="000000">
+                  <a:alpha val="100000"/>
+                </a:srgbClr>
+              </a:solidFill>
+              <a:prstDash val="solid"/>
+              <a:miter/>
+            </a:ln>
+          </p:spPr>
+          <p:txBody>
+            <a:bodyPr/>
+            <a:lstStyle/>
+            <a:p/>
+          </p:txBody>
+        </p:sp>
+        <p:sp>
+          <p:nvSpPr>
+            <p:cNvPr id="56" name="rc56"/>
+            <p:cNvSpPr/>
+            <p:nvPr/>
+          </p:nvSpPr>
+          <p:spPr>
+            <a:xfrm>
+              <a:off x="2515749" y="4503707"/>
+              <a:ext cx="104241" cy="944343"/>
+            </a:xfrm>
+            <a:prstGeom prst="rect">
+              <a:avLst/>
+            </a:prstGeom>
+            <a:solidFill>
+              <a:srgbClr val="E31A1C">
+                <a:alpha val="85098"/>
+              </a:srgbClr>
+            </a:solidFill>
+            <a:ln w="13550" cap="flat">
+              <a:solidFill>
+                <a:srgbClr val="000000">
+                  <a:alpha val="100000"/>
+                </a:srgbClr>
+              </a:solidFill>
+              <a:prstDash val="solid"/>
+              <a:miter/>
+            </a:ln>
+          </p:spPr>
+          <p:txBody>
+            <a:bodyPr/>
+            <a:lstStyle/>
+            <a:p/>
+          </p:txBody>
+        </p:sp>
+        <p:sp>
+          <p:nvSpPr>
+            <p:cNvPr id="57" name="rc57"/>
+            <p:cNvSpPr/>
+            <p:nvPr/>
+          </p:nvSpPr>
+          <p:spPr>
+            <a:xfrm>
+              <a:off x="2619991" y="4706067"/>
+              <a:ext cx="104241" cy="741984"/>
+            </a:xfrm>
+            <a:prstGeom prst="rect">
+              <a:avLst/>
+            </a:prstGeom>
+            <a:solidFill>
+              <a:srgbClr val="E31A1C">
+                <a:alpha val="85098"/>
+              </a:srgbClr>
+            </a:solidFill>
+            <a:ln w="13550" cap="flat">
+              <a:solidFill>
+                <a:srgbClr val="000000">
+                  <a:alpha val="100000"/>
+                </a:srgbClr>
+              </a:solidFill>
+              <a:prstDash val="solid"/>
+              <a:miter/>
+            </a:ln>
+          </p:spPr>
+          <p:txBody>
+            <a:bodyPr/>
+            <a:lstStyle/>
+            <a:p/>
+          </p:txBody>
+        </p:sp>
+        <p:sp>
+          <p:nvSpPr>
+            <p:cNvPr id="58" name="rc58"/>
+            <p:cNvSpPr/>
+            <p:nvPr/>
+          </p:nvSpPr>
+          <p:spPr>
+            <a:xfrm>
+              <a:off x="2724232" y="4301348"/>
+              <a:ext cx="104241" cy="1146702"/>
+            </a:xfrm>
+            <a:prstGeom prst="rect">
+              <a:avLst/>
+            </a:prstGeom>
+            <a:solidFill>
+              <a:srgbClr val="E31A1C">
+                <a:alpha val="85098"/>
+              </a:srgbClr>
+            </a:solidFill>
+            <a:ln w="13550" cap="flat">
+              <a:solidFill>
+                <a:srgbClr val="000000">
+                  <a:alpha val="100000"/>
+                </a:srgbClr>
+              </a:solidFill>
+              <a:prstDash val="solid"/>
+              <a:miter/>
+            </a:ln>
+          </p:spPr>
+          <p:txBody>
+            <a:bodyPr/>
+            <a:lstStyle/>
+            <a:p/>
+          </p:txBody>
+        </p:sp>
+        <p:sp>
+          <p:nvSpPr>
+            <p:cNvPr id="59" name="rc59"/>
+            <p:cNvSpPr/>
+            <p:nvPr/>
+          </p:nvSpPr>
+          <p:spPr>
+            <a:xfrm>
+              <a:off x="2828473" y="4638613"/>
+              <a:ext cx="104241" cy="809437"/>
+            </a:xfrm>
+            <a:prstGeom prst="rect">
+              <a:avLst/>
+            </a:prstGeom>
+            <a:solidFill>
+              <a:srgbClr val="E31A1C">
+                <a:alpha val="85098"/>
+              </a:srgbClr>
+            </a:solidFill>
+            <a:ln w="13550" cap="flat">
+              <a:solidFill>
+                <a:srgbClr val="000000">
+                  <a:alpha val="100000"/>
+                </a:srgbClr>
+              </a:solidFill>
+              <a:prstDash val="solid"/>
+              <a:miter/>
+            </a:ln>
+          </p:spPr>
+          <p:txBody>
+            <a:bodyPr/>
+            <a:lstStyle/>
+            <a:p/>
+          </p:txBody>
+        </p:sp>
+        <p:sp>
+          <p:nvSpPr>
+            <p:cNvPr id="60" name="rc60"/>
+            <p:cNvSpPr/>
+            <p:nvPr/>
+          </p:nvSpPr>
+          <p:spPr>
+            <a:xfrm>
+              <a:off x="2932715" y="4436254"/>
+              <a:ext cx="104241" cy="1011796"/>
+            </a:xfrm>
+            <a:prstGeom prst="rect">
+              <a:avLst/>
+            </a:prstGeom>
+            <a:solidFill>
+              <a:srgbClr val="E31A1C">
+                <a:alpha val="85098"/>
+              </a:srgbClr>
+            </a:solidFill>
+            <a:ln w="13550" cap="flat">
+              <a:solidFill>
+                <a:srgbClr val="000000">
+                  <a:alpha val="100000"/>
+                </a:srgbClr>
+              </a:solidFill>
+              <a:prstDash val="solid"/>
+              <a:miter/>
+            </a:ln>
+          </p:spPr>
+          <p:txBody>
+            <a:bodyPr/>
+            <a:lstStyle/>
+            <a:p/>
+          </p:txBody>
+        </p:sp>
+        <p:sp>
+          <p:nvSpPr>
+            <p:cNvPr id="61" name="rc61"/>
+            <p:cNvSpPr/>
+            <p:nvPr/>
+          </p:nvSpPr>
+          <p:spPr>
+            <a:xfrm>
+              <a:off x="3036956" y="3761723"/>
+              <a:ext cx="104241" cy="1686327"/>
+            </a:xfrm>
+            <a:prstGeom prst="rect">
+              <a:avLst/>
+            </a:prstGeom>
+            <a:solidFill>
+              <a:srgbClr val="E31A1C">
+                <a:alpha val="85098"/>
+              </a:srgbClr>
+            </a:solidFill>
+            <a:ln w="13550" cap="flat">
+              <a:solidFill>
+                <a:srgbClr val="000000">
+                  <a:alpha val="100000"/>
+                </a:srgbClr>
+              </a:solidFill>
+              <a:prstDash val="solid"/>
+              <a:miter/>
+            </a:ln>
+          </p:spPr>
+          <p:txBody>
+            <a:bodyPr/>
+            <a:lstStyle/>
+            <a:p/>
+          </p:txBody>
+        </p:sp>
+        <p:sp>
+          <p:nvSpPr>
+            <p:cNvPr id="62" name="rc62"/>
+            <p:cNvSpPr/>
+            <p:nvPr/>
+          </p:nvSpPr>
+          <p:spPr>
+            <a:xfrm>
+              <a:off x="3141197" y="3424458"/>
+              <a:ext cx="104241" cy="2023592"/>
+            </a:xfrm>
+            <a:prstGeom prst="rect">
+              <a:avLst/>
+            </a:prstGeom>
+            <a:solidFill>
+              <a:srgbClr val="E31A1C">
+                <a:alpha val="85098"/>
+              </a:srgbClr>
+            </a:solidFill>
+            <a:ln w="13550" cap="flat">
+              <a:solidFill>
+                <a:srgbClr val="000000">
+                  <a:alpha val="100000"/>
+                </a:srgbClr>
+              </a:solidFill>
+              <a:prstDash val="solid"/>
+              <a:miter/>
+            </a:ln>
+          </p:spPr>
+          <p:txBody>
+            <a:bodyPr/>
+            <a:lstStyle/>
+            <a:p/>
+          </p:txBody>
+        </p:sp>
+        <p:sp>
+          <p:nvSpPr>
+            <p:cNvPr id="63" name="rc63"/>
+            <p:cNvSpPr/>
+            <p:nvPr/>
+          </p:nvSpPr>
+          <p:spPr>
+            <a:xfrm>
+              <a:off x="3245439" y="2547567"/>
+              <a:ext cx="104241" cy="2900483"/>
+            </a:xfrm>
+            <a:prstGeom prst="rect">
+              <a:avLst/>
+            </a:prstGeom>
+            <a:solidFill>
+              <a:srgbClr val="E31A1C">
+                <a:alpha val="85098"/>
+              </a:srgbClr>
+            </a:solidFill>
+            <a:ln w="13550" cap="flat">
+              <a:solidFill>
+                <a:srgbClr val="000000">
+                  <a:alpha val="100000"/>
+                </a:srgbClr>
+              </a:solidFill>
+              <a:prstDash val="solid"/>
+              <a:miter/>
+            </a:ln>
+          </p:spPr>
+          <p:txBody>
+            <a:bodyPr/>
+            <a:lstStyle/>
+            <a:p/>
+          </p:txBody>
+        </p:sp>
+        <p:sp>
+          <p:nvSpPr>
+            <p:cNvPr id="64" name="rc64"/>
+            <p:cNvSpPr/>
+            <p:nvPr/>
+          </p:nvSpPr>
+          <p:spPr>
+            <a:xfrm>
+              <a:off x="3349680" y="3491911"/>
+              <a:ext cx="104241" cy="1956139"/>
+            </a:xfrm>
+            <a:prstGeom prst="rect">
+              <a:avLst/>
+            </a:prstGeom>
+            <a:solidFill>
+              <a:srgbClr val="E31A1C">
+                <a:alpha val="85098"/>
+              </a:srgbClr>
+            </a:solidFill>
+            <a:ln w="13550" cap="flat">
+              <a:solidFill>
+                <a:srgbClr val="000000">
+                  <a:alpha val="100000"/>
+                </a:srgbClr>
+              </a:solidFill>
+              <a:prstDash val="solid"/>
+              <a:miter/>
+            </a:ln>
+          </p:spPr>
+          <p:txBody>
+            <a:bodyPr/>
+            <a:lstStyle/>
+            <a:p/>
+          </p:txBody>
+        </p:sp>
+        <p:sp>
+          <p:nvSpPr>
+            <p:cNvPr id="65" name="rc65"/>
+            <p:cNvSpPr/>
+            <p:nvPr/>
+          </p:nvSpPr>
+          <p:spPr>
+            <a:xfrm>
+              <a:off x="3453921" y="3357005"/>
+              <a:ext cx="104241" cy="2091045"/>
+            </a:xfrm>
+            <a:prstGeom prst="rect">
+              <a:avLst/>
+            </a:prstGeom>
+            <a:solidFill>
+              <a:srgbClr val="E31A1C">
+                <a:alpha val="85098"/>
+              </a:srgbClr>
+            </a:solidFill>
+            <a:ln w="13550" cap="flat">
+              <a:solidFill>
+                <a:srgbClr val="000000">
+                  <a:alpha val="100000"/>
+                </a:srgbClr>
+              </a:solidFill>
+              <a:prstDash val="solid"/>
+              <a:miter/>
+            </a:ln>
+          </p:spPr>
+          <p:txBody>
+            <a:bodyPr/>
+            <a:lstStyle/>
+            <a:p/>
+          </p:txBody>
+        </p:sp>
+        <p:sp>
+          <p:nvSpPr>
+            <p:cNvPr id="66" name="rc66"/>
+            <p:cNvSpPr/>
+            <p:nvPr/>
+          </p:nvSpPr>
+          <p:spPr>
+            <a:xfrm>
+              <a:off x="3558163" y="3694270"/>
+              <a:ext cx="104241" cy="1753780"/>
+            </a:xfrm>
+            <a:prstGeom prst="rect">
+              <a:avLst/>
+            </a:prstGeom>
+            <a:solidFill>
+              <a:srgbClr val="E31A1C">
+                <a:alpha val="85098"/>
+              </a:srgbClr>
+            </a:solidFill>
+            <a:ln w="13550" cap="flat">
+              <a:solidFill>
+                <a:srgbClr val="000000">
+                  <a:alpha val="100000"/>
+                </a:srgbClr>
+              </a:solidFill>
+              <a:prstDash val="solid"/>
+              <a:miter/>
+            </a:ln>
+          </p:spPr>
+          <p:txBody>
+            <a:bodyPr/>
+            <a:lstStyle/>
+            <a:p/>
+          </p:txBody>
+        </p:sp>
+        <p:sp>
+          <p:nvSpPr>
+            <p:cNvPr id="67" name="rc67"/>
+            <p:cNvSpPr/>
+            <p:nvPr/>
+          </p:nvSpPr>
+          <p:spPr>
+            <a:xfrm>
+              <a:off x="3662404" y="3559364"/>
+              <a:ext cx="104241" cy="1888686"/>
+            </a:xfrm>
+            <a:prstGeom prst="rect">
+              <a:avLst/>
+            </a:prstGeom>
+            <a:solidFill>
+              <a:srgbClr val="E31A1C">
+                <a:alpha val="85098"/>
+              </a:srgbClr>
+            </a:solidFill>
+            <a:ln w="13550" cap="flat">
+              <a:solidFill>
+                <a:srgbClr val="000000">
+                  <a:alpha val="100000"/>
+                </a:srgbClr>
+              </a:solidFill>
+              <a:prstDash val="solid"/>
+              <a:miter/>
+            </a:ln>
+          </p:spPr>
+          <p:txBody>
+            <a:bodyPr/>
+            <a:lstStyle/>
+            <a:p/>
+          </p:txBody>
+        </p:sp>
+        <p:sp>
+          <p:nvSpPr>
+            <p:cNvPr id="68" name="rc68"/>
+            <p:cNvSpPr/>
+            <p:nvPr/>
+          </p:nvSpPr>
+          <p:spPr>
+            <a:xfrm>
+              <a:off x="3766645" y="2884833"/>
+              <a:ext cx="104241" cy="2563217"/>
+            </a:xfrm>
+            <a:prstGeom prst="rect">
+              <a:avLst/>
+            </a:prstGeom>
+            <a:solidFill>
+              <a:srgbClr val="E31A1C">
+                <a:alpha val="85098"/>
+              </a:srgbClr>
+            </a:solidFill>
+            <a:ln w="13550" cap="flat">
+              <a:solidFill>
+                <a:srgbClr val="000000">
+                  <a:alpha val="100000"/>
+                </a:srgbClr>
+              </a:solidFill>
+              <a:prstDash val="solid"/>
+              <a:miter/>
+            </a:ln>
+          </p:spPr>
+          <p:txBody>
+            <a:bodyPr/>
+            <a:lstStyle/>
+            <a:p/>
+          </p:txBody>
+        </p:sp>
+        <p:sp>
+          <p:nvSpPr>
+            <p:cNvPr id="69" name="rc69"/>
+            <p:cNvSpPr/>
+            <p:nvPr/>
+          </p:nvSpPr>
+          <p:spPr>
+            <a:xfrm>
+              <a:off x="3870887" y="3087192"/>
+              <a:ext cx="104241" cy="2360858"/>
+            </a:xfrm>
+            <a:prstGeom prst="rect">
+              <a:avLst/>
+            </a:prstGeom>
+            <a:solidFill>
+              <a:srgbClr val="E31A1C">
+                <a:alpha val="85098"/>
+              </a:srgbClr>
+            </a:solidFill>
+            <a:ln w="13550" cap="flat">
+              <a:solidFill>
+                <a:srgbClr val="000000">
+                  <a:alpha val="100000"/>
+                </a:srgbClr>
+              </a:solidFill>
+              <a:prstDash val="solid"/>
+              <a:miter/>
+            </a:ln>
+          </p:spPr>
+          <p:txBody>
+            <a:bodyPr/>
+            <a:lstStyle/>
+            <a:p/>
+          </p:txBody>
+        </p:sp>
+        <p:sp>
+          <p:nvSpPr>
+            <p:cNvPr id="70" name="rc70"/>
+            <p:cNvSpPr/>
+            <p:nvPr/>
+          </p:nvSpPr>
+          <p:spPr>
+            <a:xfrm>
+              <a:off x="3975128" y="3222098"/>
+              <a:ext cx="104241" cy="2225952"/>
+            </a:xfrm>
+            <a:prstGeom prst="rect">
+              <a:avLst/>
+            </a:prstGeom>
+            <a:solidFill>
+              <a:srgbClr val="E31A1C">
+                <a:alpha val="85098"/>
+              </a:srgbClr>
+            </a:solidFill>
+            <a:ln w="13550" cap="flat">
+              <a:solidFill>
+                <a:srgbClr val="000000">
+                  <a:alpha val="100000"/>
+                </a:srgbClr>
+              </a:solidFill>
+              <a:prstDash val="solid"/>
+              <a:miter/>
+            </a:ln>
+          </p:spPr>
+          <p:txBody>
+            <a:bodyPr/>
+            <a:lstStyle/>
+            <a:p/>
+          </p:txBody>
+        </p:sp>
+        <p:sp>
+          <p:nvSpPr>
+            <p:cNvPr id="71" name="rc71"/>
+            <p:cNvSpPr/>
+            <p:nvPr/>
+          </p:nvSpPr>
+          <p:spPr>
+            <a:xfrm>
+              <a:off x="4079369" y="2884833"/>
+              <a:ext cx="104241" cy="2563217"/>
+            </a:xfrm>
+            <a:prstGeom prst="rect">
+              <a:avLst/>
+            </a:prstGeom>
+            <a:solidFill>
+              <a:srgbClr val="E31A1C">
+                <a:alpha val="85098"/>
+              </a:srgbClr>
+            </a:solidFill>
+            <a:ln w="13550" cap="flat">
+              <a:solidFill>
+                <a:srgbClr val="000000">
+                  <a:alpha val="100000"/>
+                </a:srgbClr>
+              </a:solidFill>
+              <a:prstDash val="solid"/>
+              <a:miter/>
+            </a:ln>
+          </p:spPr>
+          <p:txBody>
+            <a:bodyPr/>
+            <a:lstStyle/>
+            <a:p/>
+          </p:txBody>
+        </p:sp>
+        <p:sp>
+          <p:nvSpPr>
+            <p:cNvPr id="72" name="rc72"/>
+            <p:cNvSpPr/>
+            <p:nvPr/>
+          </p:nvSpPr>
+          <p:spPr>
+            <a:xfrm>
+              <a:off x="4183611" y="2142849"/>
+              <a:ext cx="104241" cy="0"/>
+            </a:xfrm>
+            <a:prstGeom prst="rect">
+              <a:avLst/>
+            </a:prstGeom>
+            <a:solidFill>
+              <a:srgbClr val="E31A1C">
+                <a:alpha val="85098"/>
+              </a:srgbClr>
+            </a:solidFill>
+            <a:ln w="13550" cap="flat">
+              <a:solidFill>
+                <a:srgbClr val="000000">
+                  <a:alpha val="100000"/>
+                </a:srgbClr>
+              </a:solidFill>
+              <a:prstDash val="solid"/>
+              <a:miter/>
+            </a:ln>
+          </p:spPr>
+          <p:txBody>
+            <a:bodyPr/>
+            <a:lstStyle/>
+            <a:p/>
+          </p:txBody>
+        </p:sp>
+        <p:sp>
+          <p:nvSpPr>
+            <p:cNvPr id="73" name="rc73"/>
+            <p:cNvSpPr/>
+            <p:nvPr/>
+          </p:nvSpPr>
+          <p:spPr>
+            <a:xfrm>
+              <a:off x="4287852" y="3154645"/>
+              <a:ext cx="104241" cy="0"/>
+            </a:xfrm>
+            <a:prstGeom prst="rect">
+              <a:avLst/>
+            </a:prstGeom>
+            <a:solidFill>
+              <a:srgbClr val="E31A1C">
+                <a:alpha val="85098"/>
+              </a:srgbClr>
+            </a:solidFill>
+            <a:ln w="13550" cap="flat">
+              <a:solidFill>
+                <a:srgbClr val="000000">
+                  <a:alpha val="100000"/>
+                </a:srgbClr>
+              </a:solidFill>
+              <a:prstDash val="solid"/>
+              <a:miter/>
+            </a:ln>
+          </p:spPr>
+          <p:txBody>
+            <a:bodyPr/>
+            <a:lstStyle/>
+            <a:p/>
+          </p:txBody>
+        </p:sp>
+        <p:sp>
+          <p:nvSpPr>
+            <p:cNvPr id="74" name="rc74"/>
+            <p:cNvSpPr/>
+            <p:nvPr/>
+          </p:nvSpPr>
+          <p:spPr>
+            <a:xfrm>
+              <a:off x="4392093" y="3222098"/>
+              <a:ext cx="104241" cy="0"/>
+            </a:xfrm>
+            <a:prstGeom prst="rect">
+              <a:avLst/>
+            </a:prstGeom>
+            <a:solidFill>
+              <a:srgbClr val="E31A1C">
+                <a:alpha val="85098"/>
+              </a:srgbClr>
+            </a:solidFill>
+            <a:ln w="13550" cap="flat">
+              <a:solidFill>
+                <a:srgbClr val="000000">
+                  <a:alpha val="100000"/>
+                </a:srgbClr>
+              </a:solidFill>
+              <a:prstDash val="solid"/>
+              <a:miter/>
+            </a:ln>
+          </p:spPr>
+          <p:txBody>
+            <a:bodyPr/>
+            <a:lstStyle/>
+            <a:p/>
+          </p:txBody>
+        </p:sp>
+        <p:sp>
+          <p:nvSpPr>
+            <p:cNvPr id="75" name="rc75"/>
+            <p:cNvSpPr/>
+            <p:nvPr/>
+          </p:nvSpPr>
+          <p:spPr>
+            <a:xfrm>
+              <a:off x="4496335" y="3829176"/>
+              <a:ext cx="104241" cy="0"/>
+            </a:xfrm>
+            <a:prstGeom prst="rect">
+              <a:avLst/>
+            </a:prstGeom>
+            <a:solidFill>
+              <a:srgbClr val="E31A1C">
+                <a:alpha val="85098"/>
+              </a:srgbClr>
+            </a:solidFill>
+            <a:ln w="13550" cap="flat">
+              <a:solidFill>
+                <a:srgbClr val="000000">
+                  <a:alpha val="100000"/>
+                </a:srgbClr>
+              </a:solidFill>
+              <a:prstDash val="solid"/>
+              <a:miter/>
+            </a:ln>
+          </p:spPr>
+          <p:txBody>
+            <a:bodyPr/>
+            <a:lstStyle/>
+            <a:p/>
+          </p:txBody>
+        </p:sp>
+        <p:sp>
+          <p:nvSpPr>
+            <p:cNvPr id="76" name="rc76"/>
+            <p:cNvSpPr/>
+            <p:nvPr/>
+          </p:nvSpPr>
+          <p:spPr>
+            <a:xfrm>
+              <a:off x="4600576" y="3424458"/>
+              <a:ext cx="104241" cy="0"/>
+            </a:xfrm>
+            <a:prstGeom prst="rect">
+              <a:avLst/>
+            </a:prstGeom>
+            <a:solidFill>
+              <a:srgbClr val="E31A1C">
+                <a:alpha val="85098"/>
+              </a:srgbClr>
+            </a:solidFill>
+            <a:ln w="13550" cap="flat">
+              <a:solidFill>
+                <a:srgbClr val="000000">
+                  <a:alpha val="100000"/>
+                </a:srgbClr>
+              </a:solidFill>
+              <a:prstDash val="solid"/>
+              <a:miter/>
+            </a:ln>
+          </p:spPr>
+          <p:txBody>
+            <a:bodyPr/>
+            <a:lstStyle/>
+            <a:p/>
+          </p:txBody>
+        </p:sp>
+        <p:sp>
+          <p:nvSpPr>
+            <p:cNvPr id="77" name="rc77"/>
+            <p:cNvSpPr/>
+            <p:nvPr/>
+          </p:nvSpPr>
+          <p:spPr>
+            <a:xfrm>
+              <a:off x="4704817" y="3761723"/>
+              <a:ext cx="104241" cy="0"/>
+            </a:xfrm>
+            <a:prstGeom prst="rect">
+              <a:avLst/>
+            </a:prstGeom>
+            <a:solidFill>
+              <a:srgbClr val="E31A1C">
+                <a:alpha val="85098"/>
+              </a:srgbClr>
+            </a:solidFill>
+            <a:ln w="13550" cap="flat">
+              <a:solidFill>
+                <a:srgbClr val="000000">
+                  <a:alpha val="100000"/>
+                </a:srgbClr>
+              </a:solidFill>
+              <a:prstDash val="solid"/>
+              <a:miter/>
+            </a:ln>
+          </p:spPr>
+          <p:txBody>
+            <a:bodyPr/>
+            <a:lstStyle/>
+            <a:p/>
+          </p:txBody>
+        </p:sp>
+        <p:sp>
+          <p:nvSpPr>
+            <p:cNvPr id="78" name="rc78"/>
+            <p:cNvSpPr/>
+            <p:nvPr/>
+          </p:nvSpPr>
+          <p:spPr>
+            <a:xfrm>
+              <a:off x="4809059" y="3694270"/>
+              <a:ext cx="104241" cy="0"/>
+            </a:xfrm>
+            <a:prstGeom prst="rect">
+              <a:avLst/>
+            </a:prstGeom>
+            <a:solidFill>
+              <a:srgbClr val="E31A1C">
+                <a:alpha val="85098"/>
+              </a:srgbClr>
+            </a:solidFill>
+            <a:ln w="13550" cap="flat">
+              <a:solidFill>
+                <a:srgbClr val="000000">
+                  <a:alpha val="100000"/>
+                </a:srgbClr>
+              </a:solidFill>
+              <a:prstDash val="solid"/>
+              <a:miter/>
+            </a:ln>
+          </p:spPr>
+          <p:txBody>
+            <a:bodyPr/>
+            <a:lstStyle/>
+            <a:p/>
+          </p:txBody>
+        </p:sp>
+        <p:sp>
+          <p:nvSpPr>
+            <p:cNvPr id="79" name="rc79"/>
+            <p:cNvSpPr/>
+            <p:nvPr/>
+          </p:nvSpPr>
+          <p:spPr>
+            <a:xfrm>
+              <a:off x="4913300" y="2817380"/>
+              <a:ext cx="104241" cy="0"/>
+            </a:xfrm>
+            <a:prstGeom prst="rect">
+              <a:avLst/>
+            </a:prstGeom>
+            <a:solidFill>
+              <a:srgbClr val="E31A1C">
+                <a:alpha val="85098"/>
+              </a:srgbClr>
+            </a:solidFill>
+            <a:ln w="13550" cap="flat">
+              <a:solidFill>
+                <a:srgbClr val="000000">
+                  <a:alpha val="100000"/>
+                </a:srgbClr>
+              </a:solidFill>
+              <a:prstDash val="solid"/>
+              <a:miter/>
+            </a:ln>
+          </p:spPr>
+          <p:txBody>
+            <a:bodyPr/>
+            <a:lstStyle/>
+            <a:p/>
+          </p:txBody>
+        </p:sp>
+        <p:sp>
+          <p:nvSpPr>
+            <p:cNvPr id="80" name="rc80"/>
+            <p:cNvSpPr/>
+            <p:nvPr/>
+          </p:nvSpPr>
+          <p:spPr>
+            <a:xfrm>
+              <a:off x="5017541" y="3559364"/>
+              <a:ext cx="104241" cy="0"/>
+            </a:xfrm>
+            <a:prstGeom prst="rect">
+              <a:avLst/>
+            </a:prstGeom>
+            <a:solidFill>
+              <a:srgbClr val="E31A1C">
+                <a:alpha val="85098"/>
+              </a:srgbClr>
+            </a:solidFill>
+            <a:ln w="13550" cap="flat">
+              <a:solidFill>
+                <a:srgbClr val="000000">
+                  <a:alpha val="100000"/>
+                </a:srgbClr>
+              </a:solidFill>
+              <a:prstDash val="solid"/>
+              <a:miter/>
+            </a:ln>
+          </p:spPr>
+          <p:txBody>
+            <a:bodyPr/>
+            <a:lstStyle/>
+            <a:p/>
+          </p:txBody>
+        </p:sp>
+        <p:sp>
+          <p:nvSpPr>
+            <p:cNvPr id="81" name="rc81"/>
+            <p:cNvSpPr/>
+            <p:nvPr/>
+          </p:nvSpPr>
+          <p:spPr>
+            <a:xfrm>
+              <a:off x="5121783" y="3626817"/>
+              <a:ext cx="104241" cy="0"/>
+            </a:xfrm>
+            <a:prstGeom prst="rect">
+              <a:avLst/>
+            </a:prstGeom>
+            <a:solidFill>
+              <a:srgbClr val="E31A1C">
+                <a:alpha val="85098"/>
+              </a:srgbClr>
+            </a:solidFill>
+            <a:ln w="13550" cap="flat">
+              <a:solidFill>
+                <a:srgbClr val="000000">
+                  <a:alpha val="100000"/>
+                </a:srgbClr>
+              </a:solidFill>
+              <a:prstDash val="solid"/>
+              <a:miter/>
+            </a:ln>
+          </p:spPr>
+          <p:txBody>
+            <a:bodyPr/>
+            <a:lstStyle/>
+            <a:p/>
+          </p:txBody>
+        </p:sp>
+        <p:sp>
+          <p:nvSpPr>
+            <p:cNvPr id="82" name="rc82"/>
+            <p:cNvSpPr/>
+            <p:nvPr/>
+          </p:nvSpPr>
+          <p:spPr>
+            <a:xfrm>
+              <a:off x="5226024" y="4571160"/>
+              <a:ext cx="104241" cy="0"/>
+            </a:xfrm>
+            <a:prstGeom prst="rect">
+              <a:avLst/>
+            </a:prstGeom>
+            <a:solidFill>
+              <a:srgbClr val="E31A1C">
+                <a:alpha val="85098"/>
+              </a:srgbClr>
+            </a:solidFill>
+            <a:ln w="13550" cap="flat">
+              <a:solidFill>
+                <a:srgbClr val="000000">
+                  <a:alpha val="100000"/>
+                </a:srgbClr>
+              </a:solidFill>
+              <a:prstDash val="solid"/>
+              <a:miter/>
+            </a:ln>
+          </p:spPr>
+          <p:txBody>
+            <a:bodyPr/>
+            <a:lstStyle/>
+            <a:p/>
+          </p:txBody>
+        </p:sp>
+        <p:sp>
+          <p:nvSpPr>
+            <p:cNvPr id="83" name="rc83"/>
+            <p:cNvSpPr/>
+            <p:nvPr/>
+          </p:nvSpPr>
+          <p:spPr>
+            <a:xfrm>
+              <a:off x="5330265" y="3761723"/>
+              <a:ext cx="104241" cy="0"/>
+            </a:xfrm>
+            <a:prstGeom prst="rect">
+              <a:avLst/>
+            </a:prstGeom>
+            <a:solidFill>
+              <a:srgbClr val="E31A1C">
+                <a:alpha val="85098"/>
+              </a:srgbClr>
+            </a:solidFill>
+            <a:ln w="13550" cap="flat">
+              <a:solidFill>
+                <a:srgbClr val="000000">
+                  <a:alpha val="100000"/>
+                </a:srgbClr>
+              </a:solidFill>
+              <a:prstDash val="solid"/>
+              <a:miter/>
+            </a:ln>
+          </p:spPr>
+          <p:txBody>
+            <a:bodyPr/>
+            <a:lstStyle/>
+            <a:p/>
+          </p:txBody>
+        </p:sp>
+        <p:sp>
+          <p:nvSpPr>
+            <p:cNvPr id="84" name="rc84"/>
+            <p:cNvSpPr/>
+            <p:nvPr/>
+          </p:nvSpPr>
+          <p:spPr>
+            <a:xfrm>
+              <a:off x="5434507" y="4571160"/>
+              <a:ext cx="104241" cy="0"/>
+            </a:xfrm>
+            <a:prstGeom prst="rect">
+              <a:avLst/>
+            </a:prstGeom>
+            <a:solidFill>
+              <a:srgbClr val="E31A1C">
+                <a:alpha val="85098"/>
+              </a:srgbClr>
+            </a:solidFill>
+            <a:ln w="13550" cap="flat">
+              <a:solidFill>
+                <a:srgbClr val="000000">
+                  <a:alpha val="100000"/>
+                </a:srgbClr>
+              </a:solidFill>
+              <a:prstDash val="solid"/>
+              <a:miter/>
+            </a:ln>
+          </p:spPr>
+          <p:txBody>
+            <a:bodyPr/>
+            <a:lstStyle/>
+            <a:p/>
+          </p:txBody>
+        </p:sp>
+        <p:sp>
+          <p:nvSpPr>
+            <p:cNvPr id="85" name="rc85"/>
+            <p:cNvSpPr/>
+            <p:nvPr/>
+          </p:nvSpPr>
+          <p:spPr>
+            <a:xfrm>
+              <a:off x="5538748" y="4706067"/>
+              <a:ext cx="104241" cy="0"/>
+            </a:xfrm>
+            <a:prstGeom prst="rect">
+              <a:avLst/>
+            </a:prstGeom>
+            <a:solidFill>
+              <a:srgbClr val="E31A1C">
+                <a:alpha val="85098"/>
+              </a:srgbClr>
+            </a:solidFill>
+            <a:ln w="13550" cap="flat">
+              <a:solidFill>
+                <a:srgbClr val="000000">
+                  <a:alpha val="100000"/>
+                </a:srgbClr>
+              </a:solidFill>
+              <a:prstDash val="solid"/>
+              <a:miter/>
+            </a:ln>
+          </p:spPr>
+          <p:txBody>
+            <a:bodyPr/>
+            <a:lstStyle/>
+            <a:p/>
+          </p:txBody>
+        </p:sp>
+        <p:sp>
+          <p:nvSpPr>
+            <p:cNvPr id="86" name="rc86"/>
+            <p:cNvSpPr/>
+            <p:nvPr/>
+          </p:nvSpPr>
+          <p:spPr>
+            <a:xfrm>
+              <a:off x="5642990" y="4233895"/>
+              <a:ext cx="104241" cy="0"/>
+            </a:xfrm>
+            <a:prstGeom prst="rect">
+              <a:avLst/>
+            </a:prstGeom>
+            <a:solidFill>
+              <a:srgbClr val="E31A1C">
+                <a:alpha val="85098"/>
+              </a:srgbClr>
+            </a:solidFill>
+            <a:ln w="13550" cap="flat">
+              <a:solidFill>
+                <a:srgbClr val="000000">
+                  <a:alpha val="100000"/>
+                </a:srgbClr>
+              </a:solidFill>
+              <a:prstDash val="solid"/>
+              <a:miter/>
+            </a:ln>
+          </p:spPr>
+          <p:txBody>
+            <a:bodyPr/>
+            <a:lstStyle/>
+            <a:p/>
+          </p:txBody>
+        </p:sp>
+        <p:sp>
+          <p:nvSpPr>
+            <p:cNvPr id="87" name="rc87"/>
+            <p:cNvSpPr/>
+            <p:nvPr/>
+          </p:nvSpPr>
+          <p:spPr>
+            <a:xfrm>
+              <a:off x="5747231" y="4773520"/>
+              <a:ext cx="104241" cy="0"/>
+            </a:xfrm>
+            <a:prstGeom prst="rect">
+              <a:avLst/>
+            </a:prstGeom>
+            <a:solidFill>
+              <a:srgbClr val="E31A1C">
+                <a:alpha val="85098"/>
+              </a:srgbClr>
+            </a:solidFill>
+            <a:ln w="13550" cap="flat">
+              <a:solidFill>
+                <a:srgbClr val="000000">
+                  <a:alpha val="100000"/>
+                </a:srgbClr>
+              </a:solidFill>
+              <a:prstDash val="solid"/>
+              <a:miter/>
+            </a:ln>
+          </p:spPr>
+          <p:txBody>
+            <a:bodyPr/>
+            <a:lstStyle/>
+            <a:p/>
+          </p:txBody>
+        </p:sp>
+        <p:sp>
+          <p:nvSpPr>
+            <p:cNvPr id="88" name="rc88"/>
+            <p:cNvSpPr/>
+            <p:nvPr/>
+          </p:nvSpPr>
+          <p:spPr>
+            <a:xfrm>
+              <a:off x="5851472" y="5110785"/>
+              <a:ext cx="104241" cy="0"/>
+            </a:xfrm>
+            <a:prstGeom prst="rect">
+              <a:avLst/>
+            </a:prstGeom>
+            <a:solidFill>
+              <a:srgbClr val="E31A1C">
+                <a:alpha val="85098"/>
+              </a:srgbClr>
+            </a:solidFill>
+            <a:ln w="13550" cap="flat">
+              <a:solidFill>
+                <a:srgbClr val="000000">
+                  <a:alpha val="100000"/>
+                </a:srgbClr>
+              </a:solidFill>
+              <a:prstDash val="solid"/>
+              <a:miter/>
+            </a:ln>
+          </p:spPr>
+          <p:txBody>
+            <a:bodyPr/>
+            <a:lstStyle/>
+            <a:p/>
+          </p:txBody>
+        </p:sp>
+        <p:sp>
+          <p:nvSpPr>
+            <p:cNvPr id="89" name="rc89"/>
+            <p:cNvSpPr/>
+            <p:nvPr/>
+          </p:nvSpPr>
+          <p:spPr>
+            <a:xfrm>
+              <a:off x="5955714" y="4638613"/>
+              <a:ext cx="104241" cy="0"/>
+            </a:xfrm>
+            <a:prstGeom prst="rect">
+              <a:avLst/>
+            </a:prstGeom>
+            <a:solidFill>
+              <a:srgbClr val="E31A1C">
+                <a:alpha val="85098"/>
+              </a:srgbClr>
+            </a:solidFill>
+            <a:ln w="13550" cap="flat">
+              <a:solidFill>
+                <a:srgbClr val="000000">
+                  <a:alpha val="100000"/>
+                </a:srgbClr>
+              </a:solidFill>
+              <a:prstDash val="solid"/>
+              <a:miter/>
+            </a:ln>
+          </p:spPr>
+          <p:txBody>
+            <a:bodyPr/>
+            <a:lstStyle/>
+            <a:p/>
+          </p:txBody>
+        </p:sp>
+        <p:sp>
+          <p:nvSpPr>
+            <p:cNvPr id="90" name="rc90"/>
+            <p:cNvSpPr/>
+            <p:nvPr/>
+          </p:nvSpPr>
+          <p:spPr>
+            <a:xfrm>
+              <a:off x="6059955" y="5178238"/>
+              <a:ext cx="104241" cy="0"/>
+            </a:xfrm>
+            <a:prstGeom prst="rect">
+              <a:avLst/>
+            </a:prstGeom>
+            <a:solidFill>
+              <a:srgbClr val="E31A1C">
+                <a:alpha val="85098"/>
+              </a:srgbClr>
+            </a:solidFill>
+            <a:ln w="13550" cap="flat">
+              <a:solidFill>
+                <a:srgbClr val="000000">
+                  <a:alpha val="100000"/>
+                </a:srgbClr>
+              </a:solidFill>
+              <a:prstDash val="solid"/>
+              <a:miter/>
+            </a:ln>
+          </p:spPr>
+          <p:txBody>
+            <a:bodyPr/>
+            <a:lstStyle/>
+            <a:p/>
+          </p:txBody>
+        </p:sp>
+        <p:sp>
+          <p:nvSpPr>
+            <p:cNvPr id="91" name="rc91"/>
+            <p:cNvSpPr/>
+            <p:nvPr/>
+          </p:nvSpPr>
+          <p:spPr>
+            <a:xfrm>
+              <a:off x="6164196" y="4706067"/>
+              <a:ext cx="104241" cy="0"/>
+            </a:xfrm>
+            <a:prstGeom prst="rect">
+              <a:avLst/>
+            </a:prstGeom>
+            <a:solidFill>
+              <a:srgbClr val="E31A1C">
+                <a:alpha val="85098"/>
+              </a:srgbClr>
+            </a:solidFill>
+            <a:ln w="13550" cap="flat">
+              <a:solidFill>
+                <a:srgbClr val="000000">
+                  <a:alpha val="100000"/>
+                </a:srgbClr>
+              </a:solidFill>
+              <a:prstDash val="solid"/>
+              <a:miter/>
+            </a:ln>
+          </p:spPr>
+          <p:txBody>
+            <a:bodyPr/>
+            <a:lstStyle/>
+            <a:p/>
+          </p:txBody>
+        </p:sp>
+        <p:sp>
+          <p:nvSpPr>
+            <p:cNvPr id="92" name="rc92"/>
+            <p:cNvSpPr/>
+            <p:nvPr/>
+          </p:nvSpPr>
+          <p:spPr>
+            <a:xfrm>
+              <a:off x="6268438" y="4908426"/>
+              <a:ext cx="104241" cy="0"/>
+            </a:xfrm>
+            <a:prstGeom prst="rect">
+              <a:avLst/>
+            </a:prstGeom>
+            <a:solidFill>
+              <a:srgbClr val="E31A1C">
+                <a:alpha val="85098"/>
+              </a:srgbClr>
+            </a:solidFill>
+            <a:ln w="13550" cap="flat">
+              <a:solidFill>
+                <a:srgbClr val="000000">
+                  <a:alpha val="100000"/>
+                </a:srgbClr>
+              </a:solidFill>
+              <a:prstDash val="solid"/>
+              <a:miter/>
+            </a:ln>
+          </p:spPr>
+          <p:txBody>
+            <a:bodyPr/>
+            <a:lstStyle/>
+            <a:p/>
+          </p:txBody>
+        </p:sp>
+        <p:sp>
+          <p:nvSpPr>
+            <p:cNvPr id="93" name="rc93"/>
+            <p:cNvSpPr/>
+            <p:nvPr/>
+          </p:nvSpPr>
+          <p:spPr>
+            <a:xfrm>
+              <a:off x="6372679" y="5245691"/>
+              <a:ext cx="104241" cy="0"/>
+            </a:xfrm>
+            <a:prstGeom prst="rect">
+              <a:avLst/>
+            </a:prstGeom>
+            <a:solidFill>
+              <a:srgbClr val="E31A1C">
+                <a:alpha val="85098"/>
+              </a:srgbClr>
+            </a:solidFill>
+            <a:ln w="13550" cap="flat">
+              <a:solidFill>
+                <a:srgbClr val="000000">
+                  <a:alpha val="100000"/>
+                </a:srgbClr>
+              </a:solidFill>
+              <a:prstDash val="solid"/>
+              <a:miter/>
+            </a:ln>
+          </p:spPr>
+          <p:txBody>
+            <a:bodyPr/>
+            <a:lstStyle/>
+            <a:p/>
+          </p:txBody>
+        </p:sp>
+        <p:sp>
+          <p:nvSpPr>
+            <p:cNvPr id="94" name="rc94"/>
+            <p:cNvSpPr/>
+            <p:nvPr/>
+          </p:nvSpPr>
+          <p:spPr>
+            <a:xfrm>
+              <a:off x="6476920" y="4840973"/>
+              <a:ext cx="104241" cy="0"/>
+            </a:xfrm>
+            <a:prstGeom prst="rect">
+              <a:avLst/>
+            </a:prstGeom>
+            <a:solidFill>
+              <a:srgbClr val="E31A1C">
+                <a:alpha val="85098"/>
+              </a:srgbClr>
+            </a:solidFill>
+            <a:ln w="13550" cap="flat">
+              <a:solidFill>
+                <a:srgbClr val="000000">
+                  <a:alpha val="100000"/>
+                </a:srgbClr>
+              </a:solidFill>
+              <a:prstDash val="solid"/>
+              <a:miter/>
+            </a:ln>
+          </p:spPr>
+          <p:txBody>
+            <a:bodyPr/>
+            <a:lstStyle/>
+            <a:p/>
+          </p:txBody>
+        </p:sp>
+        <p:sp>
+          <p:nvSpPr>
+            <p:cNvPr id="95" name="rc95"/>
+            <p:cNvSpPr/>
+            <p:nvPr/>
+          </p:nvSpPr>
+          <p:spPr>
+            <a:xfrm>
+              <a:off x="6581162" y="5313144"/>
+              <a:ext cx="104241" cy="0"/>
+            </a:xfrm>
+            <a:prstGeom prst="rect">
+              <a:avLst/>
+            </a:prstGeom>
+            <a:solidFill>
+              <a:srgbClr val="E31A1C">
+                <a:alpha val="85098"/>
+              </a:srgbClr>
+            </a:solidFill>
+            <a:ln w="13550" cap="flat">
+              <a:solidFill>
+                <a:srgbClr val="000000">
+                  <a:alpha val="100000"/>
+                </a:srgbClr>
+              </a:solidFill>
+              <a:prstDash val="solid"/>
+              <a:miter/>
+            </a:ln>
+          </p:spPr>
+          <p:txBody>
+            <a:bodyPr/>
+            <a:lstStyle/>
+            <a:p/>
+          </p:txBody>
+        </p:sp>
+        <p:sp>
+          <p:nvSpPr>
+            <p:cNvPr id="96" name="rc96"/>
+            <p:cNvSpPr/>
+            <p:nvPr/>
+          </p:nvSpPr>
+          <p:spPr>
+            <a:xfrm>
+              <a:off x="6685403" y="5380597"/>
+              <a:ext cx="104241" cy="0"/>
+            </a:xfrm>
+            <a:prstGeom prst="rect">
+              <a:avLst/>
+            </a:prstGeom>
+            <a:solidFill>
+              <a:srgbClr val="E31A1C">
+                <a:alpha val="85098"/>
+              </a:srgbClr>
+            </a:solidFill>
+            <a:ln w="13550" cap="flat">
+              <a:solidFill>
+                <a:srgbClr val="000000">
+                  <a:alpha val="100000"/>
+                </a:srgbClr>
+              </a:solidFill>
+              <a:prstDash val="solid"/>
+              <a:miter/>
+            </a:ln>
+          </p:spPr>
+          <p:txBody>
+            <a:bodyPr/>
+            <a:lstStyle/>
+            <a:p/>
+          </p:txBody>
+        </p:sp>
+        <p:sp>
+          <p:nvSpPr>
+            <p:cNvPr id="97" name="rc97"/>
+            <p:cNvSpPr/>
+            <p:nvPr/>
+          </p:nvSpPr>
+          <p:spPr>
+            <a:xfrm>
+              <a:off x="6789644" y="5313144"/>
+              <a:ext cx="104241" cy="0"/>
+            </a:xfrm>
+            <a:prstGeom prst="rect">
+              <a:avLst/>
+            </a:prstGeom>
+            <a:solidFill>
+              <a:srgbClr val="E31A1C">
+                <a:alpha val="85098"/>
+              </a:srgbClr>
+            </a:solidFill>
+            <a:ln w="13550" cap="flat">
+              <a:solidFill>
+                <a:srgbClr val="000000">
+                  <a:alpha val="100000"/>
+                </a:srgbClr>
+              </a:solidFill>
+              <a:prstDash val="solid"/>
+              <a:miter/>
+            </a:ln>
+          </p:spPr>
+          <p:txBody>
+            <a:bodyPr/>
+            <a:lstStyle/>
+            <a:p/>
+          </p:txBody>
+        </p:sp>
+        <p:sp>
+          <p:nvSpPr>
+            <p:cNvPr id="98" name="rc98"/>
+            <p:cNvSpPr/>
+            <p:nvPr/>
+          </p:nvSpPr>
+          <p:spPr>
+            <a:xfrm>
+              <a:off x="6893886" y="5313144"/>
+              <a:ext cx="104241" cy="0"/>
+            </a:xfrm>
+            <a:prstGeom prst="rect">
+              <a:avLst/>
+            </a:prstGeom>
+            <a:solidFill>
+              <a:srgbClr val="E31A1C">
+                <a:alpha val="85098"/>
+              </a:srgbClr>
+            </a:solidFill>
+            <a:ln w="13550" cap="flat">
+              <a:solidFill>
+                <a:srgbClr val="000000">
+                  <a:alpha val="100000"/>
+                </a:srgbClr>
+              </a:solidFill>
+              <a:prstDash val="solid"/>
+              <a:miter/>
+            </a:ln>
+          </p:spPr>
+          <p:txBody>
+            <a:bodyPr/>
+            <a:lstStyle/>
+            <a:p/>
+          </p:txBody>
+        </p:sp>
+        <p:sp>
+          <p:nvSpPr>
+            <p:cNvPr id="99" name="rc99"/>
+            <p:cNvSpPr/>
+            <p:nvPr/>
+          </p:nvSpPr>
+          <p:spPr>
+            <a:xfrm>
+              <a:off x="6998127" y="5448051"/>
+              <a:ext cx="104241" cy="0"/>
+            </a:xfrm>
+            <a:prstGeom prst="rect">
+              <a:avLst/>
+            </a:prstGeom>
+            <a:solidFill>
+              <a:srgbClr val="E31A1C">
+                <a:alpha val="85098"/>
+              </a:srgbClr>
+            </a:solidFill>
+            <a:ln w="13550" cap="flat">
+              <a:solidFill>
+                <a:srgbClr val="000000">
+                  <a:alpha val="100000"/>
+                </a:srgbClr>
+              </a:solidFill>
+              <a:prstDash val="solid"/>
+              <a:miter/>
+            </a:ln>
+          </p:spPr>
+          <p:txBody>
+            <a:bodyPr/>
+            <a:lstStyle/>
+            <a:p/>
+          </p:txBody>
+        </p:sp>
+        <p:sp>
+          <p:nvSpPr>
+            <p:cNvPr id="100" name="rc100"/>
+            <p:cNvSpPr/>
+            <p:nvPr/>
+          </p:nvSpPr>
+          <p:spPr>
+            <a:xfrm>
+              <a:off x="7102368" y="5448051"/>
+              <a:ext cx="104241" cy="0"/>
+            </a:xfrm>
+            <a:prstGeom prst="rect">
+              <a:avLst/>
+            </a:prstGeom>
+            <a:solidFill>
+              <a:srgbClr val="E31A1C">
+                <a:alpha val="85098"/>
+              </a:srgbClr>
+            </a:solidFill>
+            <a:ln w="13550" cap="flat">
+              <a:solidFill>
+                <a:srgbClr val="000000">
+                  <a:alpha val="100000"/>
+                </a:srgbClr>
+              </a:solidFill>
+              <a:prstDash val="solid"/>
+              <a:miter/>
+            </a:ln>
+          </p:spPr>
+          <p:txBody>
+            <a:bodyPr/>
+            <a:lstStyle/>
+            <a:p/>
+          </p:txBody>
+        </p:sp>
+        <p:sp>
+          <p:nvSpPr>
+            <p:cNvPr id="101" name="rc101"/>
+            <p:cNvSpPr/>
+            <p:nvPr/>
+          </p:nvSpPr>
+          <p:spPr>
+            <a:xfrm>
+              <a:off x="7206610" y="5380597"/>
+              <a:ext cx="104241" cy="0"/>
+            </a:xfrm>
+            <a:prstGeom prst="rect">
+              <a:avLst/>
+            </a:prstGeom>
+            <a:solidFill>
+              <a:srgbClr val="E31A1C">
+                <a:alpha val="85098"/>
+              </a:srgbClr>
+            </a:solidFill>
+            <a:ln w="13550" cap="flat">
+              <a:solidFill>
+                <a:srgbClr val="000000">
+                  <a:alpha val="100000"/>
+                </a:srgbClr>
+              </a:solidFill>
+              <a:prstDash val="solid"/>
+              <a:miter/>
+            </a:ln>
+          </p:spPr>
+          <p:txBody>
+            <a:bodyPr/>
+            <a:lstStyle/>
+            <a:p/>
+          </p:txBody>
+        </p:sp>
+        <p:sp>
+          <p:nvSpPr>
+            <p:cNvPr id="102" name="rc102"/>
+            <p:cNvSpPr/>
+            <p:nvPr/>
+          </p:nvSpPr>
+          <p:spPr>
+            <a:xfrm>
+              <a:off x="7310851" y="5380597"/>
+              <a:ext cx="104241" cy="0"/>
+            </a:xfrm>
+            <a:prstGeom prst="rect">
+              <a:avLst/>
+            </a:prstGeom>
+            <a:solidFill>
+              <a:srgbClr val="E31A1C">
+                <a:alpha val="85098"/>
+              </a:srgbClr>
+            </a:solidFill>
+            <a:ln w="13550" cap="flat">
+              <a:solidFill>
+                <a:srgbClr val="000000">
+                  <a:alpha val="100000"/>
+                </a:srgbClr>
+              </a:solidFill>
+              <a:prstDash val="solid"/>
+              <a:miter/>
+            </a:ln>
+          </p:spPr>
+          <p:txBody>
+            <a:bodyPr/>
+            <a:lstStyle/>
+            <a:p/>
+          </p:txBody>
+        </p:sp>
+        <p:sp>
+          <p:nvSpPr>
+            <p:cNvPr id="103" name="rc103"/>
+            <p:cNvSpPr/>
+            <p:nvPr/>
+          </p:nvSpPr>
+          <p:spPr>
+            <a:xfrm>
+              <a:off x="7415092" y="5380597"/>
+              <a:ext cx="104241" cy="0"/>
+            </a:xfrm>
+            <a:prstGeom prst="rect">
+              <a:avLst/>
+            </a:prstGeom>
+            <a:solidFill>
+              <a:srgbClr val="E31A1C">
+                <a:alpha val="85098"/>
+              </a:srgbClr>
+            </a:solidFill>
+            <a:ln w="13550" cap="flat">
+              <a:solidFill>
+                <a:srgbClr val="000000">
+                  <a:alpha val="100000"/>
+                </a:srgbClr>
+              </a:solidFill>
+              <a:prstDash val="solid"/>
+              <a:miter/>
+            </a:ln>
+          </p:spPr>
+          <p:txBody>
+            <a:bodyPr/>
+            <a:lstStyle/>
+            <a:p/>
+          </p:txBody>
+        </p:sp>
+        <p:sp>
+          <p:nvSpPr>
+            <p:cNvPr id="104" name="rc104"/>
+            <p:cNvSpPr/>
+            <p:nvPr/>
+          </p:nvSpPr>
+          <p:spPr>
+            <a:xfrm>
+              <a:off x="7519334" y="5313144"/>
+              <a:ext cx="104241" cy="0"/>
+            </a:xfrm>
+            <a:prstGeom prst="rect">
+              <a:avLst/>
+            </a:prstGeom>
+            <a:solidFill>
+              <a:srgbClr val="E31A1C">
+                <a:alpha val="85098"/>
+              </a:srgbClr>
+            </a:solidFill>
+            <a:ln w="13550" cap="flat">
+              <a:solidFill>
+                <a:srgbClr val="000000">
+                  <a:alpha val="100000"/>
+                </a:srgbClr>
+              </a:solidFill>
+              <a:prstDash val="solid"/>
+              <a:miter/>
+            </a:ln>
+          </p:spPr>
+          <p:txBody>
+            <a:bodyPr/>
+            <a:lstStyle/>
+            <a:p/>
+          </p:txBody>
+        </p:sp>
+        <p:sp>
+          <p:nvSpPr>
+            <p:cNvPr id="105" name="rc105"/>
+            <p:cNvSpPr/>
+            <p:nvPr/>
+          </p:nvSpPr>
+          <p:spPr>
+            <a:xfrm>
+              <a:off x="7623575" y="5448051"/>
+              <a:ext cx="104241" cy="0"/>
+            </a:xfrm>
+            <a:prstGeom prst="rect">
+              <a:avLst/>
+            </a:prstGeom>
+            <a:solidFill>
+              <a:srgbClr val="E31A1C">
+                <a:alpha val="85098"/>
+              </a:srgbClr>
+            </a:solidFill>
+            <a:ln w="13550" cap="flat">
+              <a:solidFill>
+                <a:srgbClr val="000000">
+                  <a:alpha val="100000"/>
+                </a:srgbClr>
+              </a:solidFill>
+              <a:prstDash val="solid"/>
+              <a:miter/>
+            </a:ln>
+          </p:spPr>
+          <p:txBody>
+            <a:bodyPr/>
+            <a:lstStyle/>
+            <a:p/>
+          </p:txBody>
+        </p:sp>
+        <p:sp>
+          <p:nvSpPr>
+            <p:cNvPr id="106" name="rc106"/>
+            <p:cNvSpPr/>
+            <p:nvPr/>
+          </p:nvSpPr>
+          <p:spPr>
+            <a:xfrm>
+              <a:off x="7727816" y="5448051"/>
+              <a:ext cx="104241" cy="0"/>
+            </a:xfrm>
+            <a:prstGeom prst="rect">
+              <a:avLst/>
+            </a:prstGeom>
+            <a:solidFill>
+              <a:srgbClr val="E31A1C">
+                <a:alpha val="85098"/>
+              </a:srgbClr>
+            </a:solidFill>
+            <a:ln w="13550" cap="flat">
+              <a:solidFill>
+                <a:srgbClr val="000000">
+                  <a:alpha val="100000"/>
+                </a:srgbClr>
+              </a:solidFill>
+              <a:prstDash val="solid"/>
+              <a:miter/>
+            </a:ln>
+          </p:spPr>
+          <p:txBody>
+            <a:bodyPr/>
+            <a:lstStyle/>
+            <a:p/>
+          </p:txBody>
+        </p:sp>
+        <p:sp>
+          <p:nvSpPr>
+            <p:cNvPr id="107" name="rc107"/>
+            <p:cNvSpPr/>
+            <p:nvPr/>
+          </p:nvSpPr>
+          <p:spPr>
+            <a:xfrm>
+              <a:off x="7832058" y="5448051"/>
+              <a:ext cx="104241" cy="0"/>
+            </a:xfrm>
+            <a:prstGeom prst="rect">
+              <a:avLst/>
+            </a:prstGeom>
+            <a:solidFill>
+              <a:srgbClr val="E31A1C">
+                <a:alpha val="85098"/>
+              </a:srgbClr>
+            </a:solidFill>
+            <a:ln w="13550" cap="flat">
+              <a:solidFill>
+                <a:srgbClr val="000000">
+                  <a:alpha val="100000"/>
+                </a:srgbClr>
+              </a:solidFill>
+              <a:prstDash val="solid"/>
+              <a:miter/>
+            </a:ln>
+          </p:spPr>
+          <p:txBody>
+            <a:bodyPr/>
+            <a:lstStyle/>
+            <a:p/>
+          </p:txBody>
+        </p:sp>
+        <p:sp>
+          <p:nvSpPr>
+            <p:cNvPr id="108" name="rc108"/>
+            <p:cNvSpPr/>
+            <p:nvPr/>
+          </p:nvSpPr>
+          <p:spPr>
+            <a:xfrm>
+              <a:off x="7936299" y="5448051"/>
+              <a:ext cx="104241" cy="0"/>
+            </a:xfrm>
+            <a:prstGeom prst="rect">
+              <a:avLst/>
+            </a:prstGeom>
+            <a:solidFill>
+              <a:srgbClr val="E31A1C">
+                <a:alpha val="85098"/>
+              </a:srgbClr>
+            </a:solidFill>
+            <a:ln w="13550" cap="flat">
+              <a:solidFill>
+                <a:srgbClr val="000000">
+                  <a:alpha val="100000"/>
+                </a:srgbClr>
+              </a:solidFill>
+              <a:prstDash val="solid"/>
+              <a:miter/>
+            </a:ln>
+          </p:spPr>
+          <p:txBody>
+            <a:bodyPr/>
+            <a:lstStyle/>
+            <a:p/>
+          </p:txBody>
+        </p:sp>
+        <p:sp>
+          <p:nvSpPr>
+            <p:cNvPr id="109" name="rc109"/>
+            <p:cNvSpPr/>
+            <p:nvPr/>
+          </p:nvSpPr>
+          <p:spPr>
+            <a:xfrm>
+              <a:off x="8040540" y="5448051"/>
+              <a:ext cx="104241" cy="0"/>
+            </a:xfrm>
+            <a:prstGeom prst="rect">
+              <a:avLst/>
+            </a:prstGeom>
+            <a:solidFill>
+              <a:srgbClr val="E31A1C">
+                <a:alpha val="85098"/>
+              </a:srgbClr>
+            </a:solidFill>
+            <a:ln w="13550" cap="flat">
+              <a:solidFill>
+                <a:srgbClr val="000000">
+                  <a:alpha val="100000"/>
+                </a:srgbClr>
+              </a:solidFill>
+              <a:prstDash val="solid"/>
+              <a:miter/>
+            </a:ln>
+          </p:spPr>
+          <p:txBody>
+            <a:bodyPr/>
+            <a:lstStyle/>
+            <a:p/>
+          </p:txBody>
+        </p:sp>
+        <p:sp>
+          <p:nvSpPr>
+            <p:cNvPr id="110" name="rc110"/>
+            <p:cNvSpPr/>
+            <p:nvPr/>
+          </p:nvSpPr>
+          <p:spPr>
+            <a:xfrm>
+              <a:off x="8144782" y="5380597"/>
+              <a:ext cx="104241" cy="0"/>
+            </a:xfrm>
+            <a:prstGeom prst="rect">
+              <a:avLst/>
+            </a:prstGeom>
+            <a:solidFill>
+              <a:srgbClr val="E31A1C">
+                <a:alpha val="85098"/>
+              </a:srgbClr>
+            </a:solidFill>
+            <a:ln w="13550" cap="flat">
+              <a:solidFill>
+                <a:srgbClr val="000000">
+                  <a:alpha val="100000"/>
+                </a:srgbClr>
+              </a:solidFill>
+              <a:prstDash val="solid"/>
+              <a:miter/>
+            </a:ln>
+          </p:spPr>
+          <p:txBody>
+            <a:bodyPr/>
+            <a:lstStyle/>
+            <a:p/>
+          </p:txBody>
+        </p:sp>
+        <p:sp>
+          <p:nvSpPr>
+            <p:cNvPr id="111" name="rc111"/>
+            <p:cNvSpPr/>
+            <p:nvPr/>
+          </p:nvSpPr>
+          <p:spPr>
+            <a:xfrm>
+              <a:off x="1264853" y="5448051"/>
+              <a:ext cx="104241" cy="0"/>
+            </a:xfrm>
+            <a:prstGeom prst="rect">
+              <a:avLst/>
+            </a:prstGeom>
+            <a:solidFill>
+              <a:srgbClr val="999999">
+                <a:alpha val="85098"/>
+              </a:srgbClr>
+            </a:solidFill>
+            <a:ln w="13550" cap="flat">
+              <a:solidFill>
+                <a:srgbClr val="000000">
+                  <a:alpha val="100000"/>
+                </a:srgbClr>
+              </a:solidFill>
+              <a:prstDash val="solid"/>
+              <a:miter/>
+            </a:ln>
+          </p:spPr>
+          <p:txBody>
+            <a:bodyPr/>
+            <a:lstStyle/>
+            <a:p/>
+          </p:txBody>
+        </p:sp>
+        <p:sp>
+          <p:nvSpPr>
+            <p:cNvPr id="112" name="rc112"/>
+            <p:cNvSpPr/>
+            <p:nvPr/>
+          </p:nvSpPr>
+          <p:spPr>
+            <a:xfrm>
+              <a:off x="1369094" y="5448051"/>
+              <a:ext cx="104241" cy="0"/>
+            </a:xfrm>
+            <a:prstGeom prst="rect">
+              <a:avLst/>
+            </a:prstGeom>
+            <a:solidFill>
+              <a:srgbClr val="999999">
+                <a:alpha val="85098"/>
+              </a:srgbClr>
+            </a:solidFill>
+            <a:ln w="13550" cap="flat">
+              <a:solidFill>
+                <a:srgbClr val="000000">
+                  <a:alpha val="100000"/>
+                </a:srgbClr>
+              </a:solidFill>
+              <a:prstDash val="solid"/>
+              <a:miter/>
+            </a:ln>
+          </p:spPr>
+          <p:txBody>
+            <a:bodyPr/>
+            <a:lstStyle/>
+            <a:p/>
+          </p:txBody>
+        </p:sp>
+        <p:sp>
+          <p:nvSpPr>
+            <p:cNvPr id="113" name="rc113"/>
+            <p:cNvSpPr/>
+            <p:nvPr/>
+          </p:nvSpPr>
+          <p:spPr>
+            <a:xfrm>
+              <a:off x="1473336" y="5448051"/>
+              <a:ext cx="104241" cy="0"/>
+            </a:xfrm>
+            <a:prstGeom prst="rect">
+              <a:avLst/>
+            </a:prstGeom>
+            <a:solidFill>
+              <a:srgbClr val="999999">
+                <a:alpha val="85098"/>
+              </a:srgbClr>
+            </a:solidFill>
+            <a:ln w="13550" cap="flat">
+              <a:solidFill>
+                <a:srgbClr val="000000">
+                  <a:alpha val="100000"/>
+                </a:srgbClr>
+              </a:solidFill>
+              <a:prstDash val="solid"/>
+              <a:miter/>
+            </a:ln>
+          </p:spPr>
+          <p:txBody>
+            <a:bodyPr/>
+            <a:lstStyle/>
+            <a:p/>
+          </p:txBody>
+        </p:sp>
+        <p:sp>
+          <p:nvSpPr>
+            <p:cNvPr id="114" name="rc114"/>
+            <p:cNvSpPr/>
+            <p:nvPr/>
+          </p:nvSpPr>
+          <p:spPr>
+            <a:xfrm>
+              <a:off x="1577577" y="5448051"/>
+              <a:ext cx="104241" cy="0"/>
+            </a:xfrm>
+            <a:prstGeom prst="rect">
+              <a:avLst/>
+            </a:prstGeom>
+            <a:solidFill>
+              <a:srgbClr val="999999">
+                <a:alpha val="85098"/>
+              </a:srgbClr>
+            </a:solidFill>
+            <a:ln w="13550" cap="flat">
+              <a:solidFill>
+                <a:srgbClr val="000000">
+                  <a:alpha val="100000"/>
+                </a:srgbClr>
+              </a:solidFill>
+              <a:prstDash val="solid"/>
+              <a:miter/>
+            </a:ln>
+          </p:spPr>
+          <p:txBody>
+            <a:bodyPr/>
+            <a:lstStyle/>
+            <a:p/>
+          </p:txBody>
+        </p:sp>
+        <p:sp>
+          <p:nvSpPr>
+            <p:cNvPr id="115" name="rc115"/>
+            <p:cNvSpPr/>
+            <p:nvPr/>
+          </p:nvSpPr>
+          <p:spPr>
+            <a:xfrm>
+              <a:off x="1681818" y="5448051"/>
+              <a:ext cx="104241" cy="0"/>
+            </a:xfrm>
+            <a:prstGeom prst="rect">
+              <a:avLst/>
+            </a:prstGeom>
+            <a:solidFill>
+              <a:srgbClr val="999999">
+                <a:alpha val="85098"/>
+              </a:srgbClr>
+            </a:solidFill>
+            <a:ln w="13550" cap="flat">
+              <a:solidFill>
+                <a:srgbClr val="000000">
+                  <a:alpha val="100000"/>
+                </a:srgbClr>
+              </a:solidFill>
+              <a:prstDash val="solid"/>
+              <a:miter/>
+            </a:ln>
+          </p:spPr>
+          <p:txBody>
+            <a:bodyPr/>
+            <a:lstStyle/>
+            <a:p/>
+          </p:txBody>
+        </p:sp>
+        <p:sp>
+          <p:nvSpPr>
+            <p:cNvPr id="116" name="rc116"/>
+            <p:cNvSpPr/>
+            <p:nvPr/>
+          </p:nvSpPr>
+          <p:spPr>
+            <a:xfrm>
+              <a:off x="1786060" y="5448051"/>
+              <a:ext cx="104241" cy="0"/>
+            </a:xfrm>
+            <a:prstGeom prst="rect">
+              <a:avLst/>
+            </a:prstGeom>
+            <a:solidFill>
+              <a:srgbClr val="999999">
+                <a:alpha val="85098"/>
+              </a:srgbClr>
+            </a:solidFill>
+            <a:ln w="13550" cap="flat">
+              <a:solidFill>
+                <a:srgbClr val="000000">
+                  <a:alpha val="100000"/>
+                </a:srgbClr>
+              </a:solidFill>
+              <a:prstDash val="solid"/>
+              <a:miter/>
+            </a:ln>
+          </p:spPr>
+          <p:txBody>
+            <a:bodyPr/>
+            <a:lstStyle/>
+            <a:p/>
+          </p:txBody>
+        </p:sp>
+        <p:sp>
+          <p:nvSpPr>
+            <p:cNvPr id="117" name="rc117"/>
+            <p:cNvSpPr/>
+            <p:nvPr/>
+          </p:nvSpPr>
+          <p:spPr>
+            <a:xfrm>
+              <a:off x="1890301" y="5448051"/>
+              <a:ext cx="104241" cy="0"/>
+            </a:xfrm>
+            <a:prstGeom prst="rect">
+              <a:avLst/>
+            </a:prstGeom>
+            <a:solidFill>
+              <a:srgbClr val="999999">
+                <a:alpha val="85098"/>
+              </a:srgbClr>
+            </a:solidFill>
+            <a:ln w="13550" cap="flat">
+              <a:solidFill>
+                <a:srgbClr val="000000">
+                  <a:alpha val="100000"/>
+                </a:srgbClr>
+              </a:solidFill>
+              <a:prstDash val="solid"/>
+              <a:miter/>
+            </a:ln>
+          </p:spPr>
+          <p:txBody>
+            <a:bodyPr/>
+            <a:lstStyle/>
+            <a:p/>
+          </p:txBody>
+        </p:sp>
+        <p:sp>
+          <p:nvSpPr>
+            <p:cNvPr id="118" name="rc118"/>
+            <p:cNvSpPr/>
+            <p:nvPr/>
+          </p:nvSpPr>
+          <p:spPr>
+            <a:xfrm>
+              <a:off x="1994542" y="5448051"/>
+              <a:ext cx="104241" cy="0"/>
+            </a:xfrm>
+            <a:prstGeom prst="rect">
+              <a:avLst/>
+            </a:prstGeom>
+            <a:solidFill>
+              <a:srgbClr val="999999">
+                <a:alpha val="85098"/>
+              </a:srgbClr>
+            </a:solidFill>
+            <a:ln w="13550" cap="flat">
+              <a:solidFill>
+                <a:srgbClr val="000000">
+                  <a:alpha val="100000"/>
+                </a:srgbClr>
+              </a:solidFill>
+              <a:prstDash val="solid"/>
+              <a:miter/>
+            </a:ln>
+          </p:spPr>
+          <p:txBody>
+            <a:bodyPr/>
+            <a:lstStyle/>
+            <a:p/>
+          </p:txBody>
+        </p:sp>
+        <p:sp>
+          <p:nvSpPr>
+            <p:cNvPr id="119" name="rc119"/>
+            <p:cNvSpPr/>
+            <p:nvPr/>
+          </p:nvSpPr>
+          <p:spPr>
+            <a:xfrm>
+              <a:off x="2098784" y="5448051"/>
+              <a:ext cx="104241" cy="0"/>
+            </a:xfrm>
+            <a:prstGeom prst="rect">
+              <a:avLst/>
+            </a:prstGeom>
+            <a:solidFill>
+              <a:srgbClr val="999999">
+                <a:alpha val="85098"/>
+              </a:srgbClr>
+            </a:solidFill>
+            <a:ln w="13550" cap="flat">
+              <a:solidFill>
+                <a:srgbClr val="000000">
+                  <a:alpha val="100000"/>
+                </a:srgbClr>
+              </a:solidFill>
+              <a:prstDash val="solid"/>
+              <a:miter/>
+            </a:ln>
+          </p:spPr>
+          <p:txBody>
+            <a:bodyPr/>
+            <a:lstStyle/>
+            <a:p/>
+          </p:txBody>
+        </p:sp>
+        <p:sp>
+          <p:nvSpPr>
+            <p:cNvPr id="120" name="rc120"/>
+            <p:cNvSpPr/>
+            <p:nvPr/>
+          </p:nvSpPr>
+          <p:spPr>
+            <a:xfrm>
+              <a:off x="2203025" y="5448051"/>
+              <a:ext cx="104241" cy="0"/>
+            </a:xfrm>
+            <a:prstGeom prst="rect">
+              <a:avLst/>
+            </a:prstGeom>
+            <a:solidFill>
+              <a:srgbClr val="999999">
+                <a:alpha val="85098"/>
+              </a:srgbClr>
+            </a:solidFill>
+            <a:ln w="13550" cap="flat">
+              <a:solidFill>
+                <a:srgbClr val="000000">
+                  <a:alpha val="100000"/>
+                </a:srgbClr>
+              </a:solidFill>
+              <a:prstDash val="solid"/>
+              <a:miter/>
+            </a:ln>
+          </p:spPr>
+          <p:txBody>
+            <a:bodyPr/>
+            <a:lstStyle/>
+            <a:p/>
+          </p:txBody>
+        </p:sp>
+        <p:sp>
+          <p:nvSpPr>
+            <p:cNvPr id="121" name="rc121"/>
+            <p:cNvSpPr/>
+            <p:nvPr/>
+          </p:nvSpPr>
+          <p:spPr>
+            <a:xfrm>
+              <a:off x="2307266" y="5448051"/>
+              <a:ext cx="104241" cy="0"/>
+            </a:xfrm>
+            <a:prstGeom prst="rect">
+              <a:avLst/>
+            </a:prstGeom>
+            <a:solidFill>
+              <a:srgbClr val="999999">
+                <a:alpha val="85098"/>
+              </a:srgbClr>
+            </a:solidFill>
+            <a:ln w="13550" cap="flat">
+              <a:solidFill>
+                <a:srgbClr val="000000">
+                  <a:alpha val="100000"/>
+                </a:srgbClr>
+              </a:solidFill>
+              <a:prstDash val="solid"/>
+              <a:miter/>
+            </a:ln>
+          </p:spPr>
+          <p:txBody>
+            <a:bodyPr/>
+            <a:lstStyle/>
+            <a:p/>
+          </p:txBody>
+        </p:sp>
+        <p:sp>
+          <p:nvSpPr>
+            <p:cNvPr id="122" name="rc122"/>
+            <p:cNvSpPr/>
+            <p:nvPr/>
+          </p:nvSpPr>
+          <p:spPr>
+            <a:xfrm>
+              <a:off x="2411508" y="5448051"/>
+              <a:ext cx="104241" cy="0"/>
+            </a:xfrm>
+            <a:prstGeom prst="rect">
+              <a:avLst/>
+            </a:prstGeom>
+            <a:solidFill>
+              <a:srgbClr val="999999">
+                <a:alpha val="85098"/>
+              </a:srgbClr>
+            </a:solidFill>
+            <a:ln w="13550" cap="flat">
+              <a:solidFill>
+                <a:srgbClr val="000000">
+                  <a:alpha val="100000"/>
+                </a:srgbClr>
+              </a:solidFill>
+              <a:prstDash val="solid"/>
+              <a:miter/>
+            </a:ln>
+          </p:spPr>
+          <p:txBody>
+            <a:bodyPr/>
+            <a:lstStyle/>
+            <a:p/>
+          </p:txBody>
+        </p:sp>
+        <p:sp>
+          <p:nvSpPr>
+            <p:cNvPr id="123" name="rc123"/>
+            <p:cNvSpPr/>
+            <p:nvPr/>
+          </p:nvSpPr>
+          <p:spPr>
+            <a:xfrm>
+              <a:off x="2515749" y="5448051"/>
+              <a:ext cx="104241" cy="0"/>
+            </a:xfrm>
+            <a:prstGeom prst="rect">
+              <a:avLst/>
+            </a:prstGeom>
+            <a:solidFill>
+              <a:srgbClr val="999999">
+                <a:alpha val="85098"/>
+              </a:srgbClr>
+            </a:solidFill>
+            <a:ln w="13550" cap="flat">
+              <a:solidFill>
+                <a:srgbClr val="000000">
+                  <a:alpha val="100000"/>
+                </a:srgbClr>
+              </a:solidFill>
+              <a:prstDash val="solid"/>
+              <a:miter/>
+            </a:ln>
+          </p:spPr>
+          <p:txBody>
+            <a:bodyPr/>
+            <a:lstStyle/>
+            <a:p/>
+          </p:txBody>
+        </p:sp>
+        <p:sp>
+          <p:nvSpPr>
+            <p:cNvPr id="124" name="rc124"/>
+            <p:cNvSpPr/>
+            <p:nvPr/>
+          </p:nvSpPr>
+          <p:spPr>
+            <a:xfrm>
+              <a:off x="2619991" y="5448051"/>
+              <a:ext cx="104241" cy="0"/>
+            </a:xfrm>
+            <a:prstGeom prst="rect">
+              <a:avLst/>
+            </a:prstGeom>
+            <a:solidFill>
+              <a:srgbClr val="999999">
+                <a:alpha val="85098"/>
+              </a:srgbClr>
+            </a:solidFill>
+            <a:ln w="13550" cap="flat">
+              <a:solidFill>
+                <a:srgbClr val="000000">
+                  <a:alpha val="100000"/>
+                </a:srgbClr>
+              </a:solidFill>
+              <a:prstDash val="solid"/>
+              <a:miter/>
+            </a:ln>
+          </p:spPr>
+          <p:txBody>
+            <a:bodyPr/>
+            <a:lstStyle/>
+            <a:p/>
+          </p:txBody>
+        </p:sp>
+        <p:sp>
+          <p:nvSpPr>
+            <p:cNvPr id="125" name="rc125"/>
+            <p:cNvSpPr/>
+            <p:nvPr/>
+          </p:nvSpPr>
+          <p:spPr>
+            <a:xfrm>
+              <a:off x="2724232" y="5448051"/>
+              <a:ext cx="104241" cy="0"/>
+            </a:xfrm>
+            <a:prstGeom prst="rect">
+              <a:avLst/>
+            </a:prstGeom>
+            <a:solidFill>
+              <a:srgbClr val="999999">
+                <a:alpha val="85098"/>
+              </a:srgbClr>
+            </a:solidFill>
+            <a:ln w="13550" cap="flat">
+              <a:solidFill>
+                <a:srgbClr val="000000">
+                  <a:alpha val="100000"/>
+                </a:srgbClr>
+              </a:solidFill>
+              <a:prstDash val="solid"/>
+              <a:miter/>
+            </a:ln>
+          </p:spPr>
+          <p:txBody>
+            <a:bodyPr/>
+            <a:lstStyle/>
+            <a:p/>
+          </p:txBody>
+        </p:sp>
+        <p:sp>
+          <p:nvSpPr>
+            <p:cNvPr id="126" name="rc126"/>
+            <p:cNvSpPr/>
+            <p:nvPr/>
+          </p:nvSpPr>
+          <p:spPr>
+            <a:xfrm>
+              <a:off x="2828473" y="5448051"/>
+              <a:ext cx="104241" cy="0"/>
+            </a:xfrm>
+            <a:prstGeom prst="rect">
+              <a:avLst/>
+            </a:prstGeom>
+            <a:solidFill>
+              <a:srgbClr val="999999">
+                <a:alpha val="85098"/>
+              </a:srgbClr>
+            </a:solidFill>
+            <a:ln w="13550" cap="flat">
+              <a:solidFill>
+                <a:srgbClr val="000000">
+                  <a:alpha val="100000"/>
+                </a:srgbClr>
+              </a:solidFill>
+              <a:prstDash val="solid"/>
+              <a:miter/>
+            </a:ln>
+          </p:spPr>
+          <p:txBody>
+            <a:bodyPr/>
+            <a:lstStyle/>
+            <a:p/>
+          </p:txBody>
+        </p:sp>
+        <p:sp>
+          <p:nvSpPr>
+            <p:cNvPr id="127" name="rc127"/>
+            <p:cNvSpPr/>
+            <p:nvPr/>
+          </p:nvSpPr>
+          <p:spPr>
+            <a:xfrm>
+              <a:off x="2932715" y="5448051"/>
+              <a:ext cx="104241" cy="0"/>
+            </a:xfrm>
+            <a:prstGeom prst="rect">
+              <a:avLst/>
+            </a:prstGeom>
+            <a:solidFill>
+              <a:srgbClr val="999999">
+                <a:alpha val="85098"/>
+              </a:srgbClr>
+            </a:solidFill>
+            <a:ln w="13550" cap="flat">
+              <a:solidFill>
+                <a:srgbClr val="000000">
+                  <a:alpha val="100000"/>
+                </a:srgbClr>
+              </a:solidFill>
+              <a:prstDash val="solid"/>
+              <a:miter/>
+            </a:ln>
+          </p:spPr>
+          <p:txBody>
+            <a:bodyPr/>
+            <a:lstStyle/>
+            <a:p/>
+          </p:txBody>
+        </p:sp>
+        <p:sp>
+          <p:nvSpPr>
+            <p:cNvPr id="128" name="rc128"/>
+            <p:cNvSpPr/>
+            <p:nvPr/>
+          </p:nvSpPr>
+          <p:spPr>
+            <a:xfrm>
+              <a:off x="3036956" y="5448051"/>
+              <a:ext cx="104241" cy="0"/>
+            </a:xfrm>
+            <a:prstGeom prst="rect">
+              <a:avLst/>
+            </a:prstGeom>
+            <a:solidFill>
+              <a:srgbClr val="999999">
+                <a:alpha val="85098"/>
+              </a:srgbClr>
+            </a:solidFill>
+            <a:ln w="13550" cap="flat">
+              <a:solidFill>
+                <a:srgbClr val="000000">
+                  <a:alpha val="100000"/>
+                </a:srgbClr>
+              </a:solidFill>
+              <a:prstDash val="solid"/>
+              <a:miter/>
+            </a:ln>
+          </p:spPr>
+          <p:txBody>
+            <a:bodyPr/>
+            <a:lstStyle/>
+            <a:p/>
+          </p:txBody>
+        </p:sp>
+        <p:sp>
+          <p:nvSpPr>
+            <p:cNvPr id="129" name="rc129"/>
+            <p:cNvSpPr/>
+            <p:nvPr/>
+          </p:nvSpPr>
+          <p:spPr>
+            <a:xfrm>
+              <a:off x="3141197" y="5448051"/>
+              <a:ext cx="104241" cy="0"/>
+            </a:xfrm>
+            <a:prstGeom prst="rect">
+              <a:avLst/>
+            </a:prstGeom>
+            <a:solidFill>
+              <a:srgbClr val="999999">
+                <a:alpha val="85098"/>
+              </a:srgbClr>
+            </a:solidFill>
+            <a:ln w="13550" cap="flat">
+              <a:solidFill>
+                <a:srgbClr val="000000">
+                  <a:alpha val="100000"/>
+                </a:srgbClr>
+              </a:solidFill>
+              <a:prstDash val="solid"/>
+              <a:miter/>
+            </a:ln>
+          </p:spPr>
+          <p:txBody>
+            <a:bodyPr/>
+            <a:lstStyle/>
+            <a:p/>
+          </p:txBody>
+        </p:sp>
+        <p:sp>
+          <p:nvSpPr>
+            <p:cNvPr id="130" name="rc130"/>
+            <p:cNvSpPr/>
+            <p:nvPr/>
+          </p:nvSpPr>
+          <p:spPr>
+            <a:xfrm>
+              <a:off x="3245439" y="5448051"/>
+              <a:ext cx="104241" cy="0"/>
+            </a:xfrm>
+            <a:prstGeom prst="rect">
+              <a:avLst/>
+            </a:prstGeom>
+            <a:solidFill>
+              <a:srgbClr val="999999">
+                <a:alpha val="85098"/>
+              </a:srgbClr>
+            </a:solidFill>
+            <a:ln w="13550" cap="flat">
+              <a:solidFill>
+                <a:srgbClr val="000000">
+                  <a:alpha val="100000"/>
+                </a:srgbClr>
+              </a:solidFill>
+              <a:prstDash val="solid"/>
+              <a:miter/>
+            </a:ln>
+          </p:spPr>
+          <p:txBody>
+            <a:bodyPr/>
+            <a:lstStyle/>
+            <a:p/>
+          </p:txBody>
+        </p:sp>
+        <p:sp>
+          <p:nvSpPr>
+            <p:cNvPr id="131" name="rc131"/>
+            <p:cNvSpPr/>
+            <p:nvPr/>
+          </p:nvSpPr>
+          <p:spPr>
+            <a:xfrm>
+              <a:off x="3349680" y="5448051"/>
+              <a:ext cx="104241" cy="0"/>
+            </a:xfrm>
+            <a:prstGeom prst="rect">
+              <a:avLst/>
+            </a:prstGeom>
+            <a:solidFill>
+              <a:srgbClr val="999999">
+                <a:alpha val="85098"/>
+              </a:srgbClr>
+            </a:solidFill>
+            <a:ln w="13550" cap="flat">
+              <a:solidFill>
+                <a:srgbClr val="000000">
+                  <a:alpha val="100000"/>
+                </a:srgbClr>
+              </a:solidFill>
+              <a:prstDash val="solid"/>
+              <a:miter/>
+            </a:ln>
+          </p:spPr>
+          <p:txBody>
+            <a:bodyPr/>
+            <a:lstStyle/>
+            <a:p/>
+          </p:txBody>
+        </p:sp>
+        <p:sp>
+          <p:nvSpPr>
+            <p:cNvPr id="132" name="rc132"/>
+            <p:cNvSpPr/>
+            <p:nvPr/>
+          </p:nvSpPr>
+          <p:spPr>
+            <a:xfrm>
+              <a:off x="3453921" y="5448051"/>
+              <a:ext cx="104241" cy="0"/>
+            </a:xfrm>
+            <a:prstGeom prst="rect">
+              <a:avLst/>
+            </a:prstGeom>
+            <a:solidFill>
+              <a:srgbClr val="999999">
+                <a:alpha val="85098"/>
+              </a:srgbClr>
+            </a:solidFill>
+            <a:ln w="13550" cap="flat">
+              <a:solidFill>
+                <a:srgbClr val="000000">
+                  <a:alpha val="100000"/>
+                </a:srgbClr>
+              </a:solidFill>
+              <a:prstDash val="solid"/>
+              <a:miter/>
+            </a:ln>
+          </p:spPr>
+          <p:txBody>
+            <a:bodyPr/>
+            <a:lstStyle/>
+            <a:p/>
+          </p:txBody>
+        </p:sp>
+        <p:sp>
+          <p:nvSpPr>
+            <p:cNvPr id="133" name="rc133"/>
+            <p:cNvSpPr/>
+            <p:nvPr/>
+          </p:nvSpPr>
+          <p:spPr>
+            <a:xfrm>
+              <a:off x="3558163" y="5448051"/>
+              <a:ext cx="104241" cy="0"/>
+            </a:xfrm>
+            <a:prstGeom prst="rect">
+              <a:avLst/>
+            </a:prstGeom>
+            <a:solidFill>
+              <a:srgbClr val="999999">
+                <a:alpha val="85098"/>
+              </a:srgbClr>
+            </a:solidFill>
+            <a:ln w="13550" cap="flat">
+              <a:solidFill>
+                <a:srgbClr val="000000">
+                  <a:alpha val="100000"/>
+                </a:srgbClr>
+              </a:solidFill>
+              <a:prstDash val="solid"/>
+              <a:miter/>
+            </a:ln>
+          </p:spPr>
+          <p:txBody>
+            <a:bodyPr/>
+            <a:lstStyle/>
+            <a:p/>
+          </p:txBody>
+        </p:sp>
+        <p:sp>
+          <p:nvSpPr>
+            <p:cNvPr id="134" name="rc134"/>
+            <p:cNvSpPr/>
+            <p:nvPr/>
+          </p:nvSpPr>
+          <p:spPr>
+            <a:xfrm>
+              <a:off x="3662404" y="5448051"/>
+              <a:ext cx="104241" cy="0"/>
+            </a:xfrm>
+            <a:prstGeom prst="rect">
+              <a:avLst/>
+            </a:prstGeom>
+            <a:solidFill>
+              <a:srgbClr val="999999">
+                <a:alpha val="85098"/>
+              </a:srgbClr>
+            </a:solidFill>
+            <a:ln w="13550" cap="flat">
+              <a:solidFill>
+                <a:srgbClr val="000000">
+                  <a:alpha val="100000"/>
+                </a:srgbClr>
+              </a:solidFill>
+              <a:prstDash val="solid"/>
+              <a:miter/>
+            </a:ln>
+          </p:spPr>
+          <p:txBody>
+            <a:bodyPr/>
+            <a:lstStyle/>
+            <a:p/>
+          </p:txBody>
+        </p:sp>
+        <p:sp>
+          <p:nvSpPr>
+            <p:cNvPr id="135" name="rc135"/>
+            <p:cNvSpPr/>
+            <p:nvPr/>
+          </p:nvSpPr>
+          <p:spPr>
+            <a:xfrm>
+              <a:off x="3766645" y="5448051"/>
+              <a:ext cx="104241" cy="0"/>
+            </a:xfrm>
+            <a:prstGeom prst="rect">
+              <a:avLst/>
+            </a:prstGeom>
+            <a:solidFill>
+              <a:srgbClr val="999999">
+                <a:alpha val="85098"/>
+              </a:srgbClr>
+            </a:solidFill>
+            <a:ln w="13550" cap="flat">
+              <a:solidFill>
+                <a:srgbClr val="000000">
+                  <a:alpha val="100000"/>
+                </a:srgbClr>
+              </a:solidFill>
+              <a:prstDash val="solid"/>
+              <a:miter/>
+            </a:ln>
+          </p:spPr>
+          <p:txBody>
+            <a:bodyPr/>
+            <a:lstStyle/>
+            <a:p/>
+          </p:txBody>
+        </p:sp>
+        <p:sp>
+          <p:nvSpPr>
+            <p:cNvPr id="136" name="rc136"/>
+            <p:cNvSpPr/>
+            <p:nvPr/>
+          </p:nvSpPr>
+          <p:spPr>
+            <a:xfrm>
+              <a:off x="3870887" y="5448051"/>
+              <a:ext cx="104241" cy="0"/>
+            </a:xfrm>
+            <a:prstGeom prst="rect">
+              <a:avLst/>
+            </a:prstGeom>
+            <a:solidFill>
+              <a:srgbClr val="999999">
+                <a:alpha val="85098"/>
+              </a:srgbClr>
+            </a:solidFill>
+            <a:ln w="13550" cap="flat">
+              <a:solidFill>
+                <a:srgbClr val="000000">
+                  <a:alpha val="100000"/>
+                </a:srgbClr>
+              </a:solidFill>
+              <a:prstDash val="solid"/>
+              <a:miter/>
+            </a:ln>
+          </p:spPr>
+          <p:txBody>
+            <a:bodyPr/>
+            <a:lstStyle/>
+            <a:p/>
+          </p:txBody>
+        </p:sp>
+        <p:sp>
+          <p:nvSpPr>
+            <p:cNvPr id="137" name="rc137"/>
+            <p:cNvSpPr/>
+            <p:nvPr/>
+          </p:nvSpPr>
+          <p:spPr>
+            <a:xfrm>
+              <a:off x="3975128" y="5448051"/>
+              <a:ext cx="104241" cy="0"/>
+            </a:xfrm>
+            <a:prstGeom prst="rect">
+              <a:avLst/>
+            </a:prstGeom>
+            <a:solidFill>
+              <a:srgbClr val="999999">
+                <a:alpha val="85098"/>
+              </a:srgbClr>
+            </a:solidFill>
+            <a:ln w="13550" cap="flat">
+              <a:solidFill>
+                <a:srgbClr val="000000">
+                  <a:alpha val="100000"/>
+                </a:srgbClr>
+              </a:solidFill>
+              <a:prstDash val="solid"/>
+              <a:miter/>
+            </a:ln>
+          </p:spPr>
+          <p:txBody>
+            <a:bodyPr/>
+            <a:lstStyle/>
+            <a:p/>
+          </p:txBody>
+        </p:sp>
+        <p:sp>
+          <p:nvSpPr>
+            <p:cNvPr id="138" name="rc138"/>
+            <p:cNvSpPr/>
+            <p:nvPr/>
+          </p:nvSpPr>
+          <p:spPr>
+            <a:xfrm>
+              <a:off x="4079369" y="5448051"/>
+              <a:ext cx="104241" cy="0"/>
+            </a:xfrm>
+            <a:prstGeom prst="rect">
+              <a:avLst/>
+            </a:prstGeom>
+            <a:solidFill>
+              <a:srgbClr val="999999">
+                <a:alpha val="85098"/>
+              </a:srgbClr>
+            </a:solidFill>
+            <a:ln w="13550" cap="flat">
+              <a:solidFill>
+                <a:srgbClr val="000000">
+                  <a:alpha val="100000"/>
+                </a:srgbClr>
+              </a:solidFill>
+              <a:prstDash val="solid"/>
+              <a:miter/>
+            </a:ln>
+          </p:spPr>
+          <p:txBody>
+            <a:bodyPr/>
+            <a:lstStyle/>
+            <a:p/>
+          </p:txBody>
+        </p:sp>
+        <p:sp>
+          <p:nvSpPr>
+            <p:cNvPr id="139" name="rc139"/>
+            <p:cNvSpPr/>
+            <p:nvPr/>
+          </p:nvSpPr>
+          <p:spPr>
+            <a:xfrm>
+              <a:off x="4183611" y="2142849"/>
+              <a:ext cx="104241" cy="3305201"/>
+            </a:xfrm>
+            <a:prstGeom prst="rect">
+              <a:avLst/>
+            </a:prstGeom>
+            <a:solidFill>
+              <a:srgbClr val="999999">
+                <a:alpha val="85098"/>
+              </a:srgbClr>
+            </a:solidFill>
+            <a:ln w="13550" cap="flat">
+              <a:solidFill>
+                <a:srgbClr val="000000">
+                  <a:alpha val="100000"/>
+                </a:srgbClr>
+              </a:solidFill>
+              <a:prstDash val="solid"/>
+              <a:miter/>
+            </a:ln>
+          </p:spPr>
+          <p:txBody>
+            <a:bodyPr/>
+            <a:lstStyle/>
+            <a:p/>
+          </p:txBody>
+        </p:sp>
+        <p:sp>
+          <p:nvSpPr>
+            <p:cNvPr id="140" name="rc140"/>
+            <p:cNvSpPr/>
+            <p:nvPr/>
+          </p:nvSpPr>
+          <p:spPr>
+            <a:xfrm>
+              <a:off x="4287852" y="3154645"/>
+              <a:ext cx="104241" cy="2293405"/>
+            </a:xfrm>
+            <a:prstGeom prst="rect">
+              <a:avLst/>
+            </a:prstGeom>
+            <a:solidFill>
+              <a:srgbClr val="999999">
+                <a:alpha val="85098"/>
+              </a:srgbClr>
+            </a:solidFill>
+            <a:ln w="13550" cap="flat">
+              <a:solidFill>
+                <a:srgbClr val="000000">
+                  <a:alpha val="100000"/>
+                </a:srgbClr>
+              </a:solidFill>
+              <a:prstDash val="solid"/>
+              <a:miter/>
+            </a:ln>
+          </p:spPr>
+          <p:txBody>
+            <a:bodyPr/>
+            <a:lstStyle/>
+            <a:p/>
+          </p:txBody>
+        </p:sp>
+        <p:sp>
+          <p:nvSpPr>
+            <p:cNvPr id="141" name="rc141"/>
+            <p:cNvSpPr/>
+            <p:nvPr/>
+          </p:nvSpPr>
+          <p:spPr>
+            <a:xfrm>
+              <a:off x="4392093" y="3222098"/>
+              <a:ext cx="104241" cy="2225952"/>
+            </a:xfrm>
+            <a:prstGeom prst="rect">
+              <a:avLst/>
+            </a:prstGeom>
+            <a:solidFill>
+              <a:srgbClr val="999999">
+                <a:alpha val="85098"/>
+              </a:srgbClr>
+            </a:solidFill>
+            <a:ln w="13550" cap="flat">
+              <a:solidFill>
+                <a:srgbClr val="000000">
+                  <a:alpha val="100000"/>
+                </a:srgbClr>
+              </a:solidFill>
+              <a:prstDash val="solid"/>
+              <a:miter/>
+            </a:ln>
+          </p:spPr>
+          <p:txBody>
+            <a:bodyPr/>
+            <a:lstStyle/>
+            <a:p/>
+          </p:txBody>
+        </p:sp>
+        <p:sp>
+          <p:nvSpPr>
+            <p:cNvPr id="142" name="rc142"/>
+            <p:cNvSpPr/>
+            <p:nvPr/>
+          </p:nvSpPr>
+          <p:spPr>
+            <a:xfrm>
+              <a:off x="4496335" y="3829176"/>
+              <a:ext cx="104241" cy="1618874"/>
+            </a:xfrm>
+            <a:prstGeom prst="rect">
+              <a:avLst/>
+            </a:prstGeom>
+            <a:solidFill>
+              <a:srgbClr val="999999">
+                <a:alpha val="85098"/>
+              </a:srgbClr>
+            </a:solidFill>
+            <a:ln w="13550" cap="flat">
+              <a:solidFill>
+                <a:srgbClr val="000000">
+                  <a:alpha val="100000"/>
+                </a:srgbClr>
+              </a:solidFill>
+              <a:prstDash val="solid"/>
+              <a:miter/>
+            </a:ln>
+          </p:spPr>
+          <p:txBody>
+            <a:bodyPr/>
+            <a:lstStyle/>
+            <a:p/>
+          </p:txBody>
+        </p:sp>
+        <p:sp>
+          <p:nvSpPr>
+            <p:cNvPr id="143" name="rc143"/>
+            <p:cNvSpPr/>
+            <p:nvPr/>
+          </p:nvSpPr>
+          <p:spPr>
+            <a:xfrm>
+              <a:off x="4600576" y="3424458"/>
+              <a:ext cx="104241" cy="2023592"/>
+            </a:xfrm>
+            <a:prstGeom prst="rect">
+              <a:avLst/>
+            </a:prstGeom>
+            <a:solidFill>
+              <a:srgbClr val="999999">
+                <a:alpha val="85098"/>
+              </a:srgbClr>
+            </a:solidFill>
+            <a:ln w="13550" cap="flat">
+              <a:solidFill>
+                <a:srgbClr val="000000">
+                  <a:alpha val="100000"/>
+                </a:srgbClr>
+              </a:solidFill>
+              <a:prstDash val="solid"/>
+              <a:miter/>
+            </a:ln>
+          </p:spPr>
+          <p:txBody>
+            <a:bodyPr/>
+            <a:lstStyle/>
+            <a:p/>
+          </p:txBody>
+        </p:sp>
+        <p:sp>
+          <p:nvSpPr>
+            <p:cNvPr id="144" name="rc144"/>
+            <p:cNvSpPr/>
+            <p:nvPr/>
+          </p:nvSpPr>
+          <p:spPr>
+            <a:xfrm>
+              <a:off x="4704817" y="3761723"/>
+              <a:ext cx="104241" cy="1686327"/>
+            </a:xfrm>
+            <a:prstGeom prst="rect">
+              <a:avLst/>
+            </a:prstGeom>
+            <a:solidFill>
+              <a:srgbClr val="999999">
+                <a:alpha val="85098"/>
+              </a:srgbClr>
+            </a:solidFill>
+            <a:ln w="13550" cap="flat">
+              <a:solidFill>
+                <a:srgbClr val="000000">
+                  <a:alpha val="100000"/>
+                </a:srgbClr>
+              </a:solidFill>
+              <a:prstDash val="solid"/>
+              <a:miter/>
+            </a:ln>
+          </p:spPr>
+          <p:txBody>
+            <a:bodyPr/>
+            <a:lstStyle/>
+            <a:p/>
+          </p:txBody>
+        </p:sp>
+        <p:sp>
+          <p:nvSpPr>
+            <p:cNvPr id="145" name="rc145"/>
+            <p:cNvSpPr/>
+            <p:nvPr/>
+          </p:nvSpPr>
+          <p:spPr>
+            <a:xfrm>
+              <a:off x="4809059" y="3694270"/>
+              <a:ext cx="104241" cy="1753780"/>
+            </a:xfrm>
+            <a:prstGeom prst="rect">
+              <a:avLst/>
+            </a:prstGeom>
+            <a:solidFill>
+              <a:srgbClr val="999999">
+                <a:alpha val="85098"/>
+              </a:srgbClr>
+            </a:solidFill>
+            <a:ln w="13550" cap="flat">
+              <a:solidFill>
+                <a:srgbClr val="000000">
+                  <a:alpha val="100000"/>
+                </a:srgbClr>
+              </a:solidFill>
+              <a:prstDash val="solid"/>
+              <a:miter/>
+            </a:ln>
+          </p:spPr>
+          <p:txBody>
+            <a:bodyPr/>
+            <a:lstStyle/>
+            <a:p/>
+          </p:txBody>
+        </p:sp>
+        <p:sp>
+          <p:nvSpPr>
+            <p:cNvPr id="146" name="rc146"/>
+            <p:cNvSpPr/>
+            <p:nvPr/>
+          </p:nvSpPr>
+          <p:spPr>
+            <a:xfrm>
+              <a:off x="4913300" y="2817380"/>
+              <a:ext cx="104241" cy="2630670"/>
+            </a:xfrm>
+            <a:prstGeom prst="rect">
+              <a:avLst/>
+            </a:prstGeom>
+            <a:solidFill>
+              <a:srgbClr val="999999">
+                <a:alpha val="85098"/>
+              </a:srgbClr>
+            </a:solidFill>
+            <a:ln w="13550" cap="flat">
+              <a:solidFill>
+                <a:srgbClr val="000000">
+                  <a:alpha val="100000"/>
+                </a:srgbClr>
+              </a:solidFill>
+              <a:prstDash val="solid"/>
+              <a:miter/>
+            </a:ln>
+          </p:spPr>
+          <p:txBody>
+            <a:bodyPr/>
+            <a:lstStyle/>
+            <a:p/>
+          </p:txBody>
+        </p:sp>
+        <p:sp>
+          <p:nvSpPr>
+            <p:cNvPr id="147" name="rc147"/>
+            <p:cNvSpPr/>
+            <p:nvPr/>
+          </p:nvSpPr>
+          <p:spPr>
+            <a:xfrm>
+              <a:off x="5017541" y="3559364"/>
+              <a:ext cx="104241" cy="1888686"/>
+            </a:xfrm>
+            <a:prstGeom prst="rect">
+              <a:avLst/>
+            </a:prstGeom>
+            <a:solidFill>
+              <a:srgbClr val="999999">
+                <a:alpha val="85098"/>
+              </a:srgbClr>
+            </a:solidFill>
+            <a:ln w="13550" cap="flat">
+              <a:solidFill>
+                <a:srgbClr val="000000">
+                  <a:alpha val="100000"/>
+                </a:srgbClr>
+              </a:solidFill>
+              <a:prstDash val="solid"/>
+              <a:miter/>
+            </a:ln>
+          </p:spPr>
+          <p:txBody>
+            <a:bodyPr/>
+            <a:lstStyle/>
+            <a:p/>
+          </p:txBody>
+        </p:sp>
+        <p:sp>
+          <p:nvSpPr>
+            <p:cNvPr id="148" name="rc148"/>
+            <p:cNvSpPr/>
+            <p:nvPr/>
+          </p:nvSpPr>
+          <p:spPr>
+            <a:xfrm>
+              <a:off x="5121783" y="3626817"/>
+              <a:ext cx="104241" cy="1821233"/>
+            </a:xfrm>
+            <a:prstGeom prst="rect">
+              <a:avLst/>
+            </a:prstGeom>
+            <a:solidFill>
+              <a:srgbClr val="999999">
+                <a:alpha val="85098"/>
+              </a:srgbClr>
+            </a:solidFill>
+            <a:ln w="13550" cap="flat">
+              <a:solidFill>
+                <a:srgbClr val="000000">
+                  <a:alpha val="100000"/>
+                </a:srgbClr>
+              </a:solidFill>
+              <a:prstDash val="solid"/>
+              <a:miter/>
+            </a:ln>
+          </p:spPr>
+          <p:txBody>
+            <a:bodyPr/>
+            <a:lstStyle/>
+            <a:p/>
+          </p:txBody>
+        </p:sp>
+        <p:sp>
+          <p:nvSpPr>
+            <p:cNvPr id="149" name="rc149"/>
+            <p:cNvSpPr/>
+            <p:nvPr/>
+          </p:nvSpPr>
+          <p:spPr>
+            <a:xfrm>
+              <a:off x="5226024" y="4571160"/>
+              <a:ext cx="104241" cy="876890"/>
+            </a:xfrm>
+            <a:prstGeom prst="rect">
+              <a:avLst/>
+            </a:prstGeom>
+            <a:solidFill>
+              <a:srgbClr val="999999">
+                <a:alpha val="85098"/>
+              </a:srgbClr>
+            </a:solidFill>
+            <a:ln w="13550" cap="flat">
+              <a:solidFill>
+                <a:srgbClr val="000000">
+                  <a:alpha val="100000"/>
+                </a:srgbClr>
+              </a:solidFill>
+              <a:prstDash val="solid"/>
+              <a:miter/>
+            </a:ln>
+          </p:spPr>
+          <p:txBody>
+            <a:bodyPr/>
+            <a:lstStyle/>
+            <a:p/>
+          </p:txBody>
+        </p:sp>
+        <p:sp>
+          <p:nvSpPr>
+            <p:cNvPr id="150" name="rc150"/>
+            <p:cNvSpPr/>
+            <p:nvPr/>
+          </p:nvSpPr>
+          <p:spPr>
+            <a:xfrm>
+              <a:off x="5330265" y="3761723"/>
+              <a:ext cx="104241" cy="1686327"/>
+            </a:xfrm>
+            <a:prstGeom prst="rect">
+              <a:avLst/>
+            </a:prstGeom>
+            <a:solidFill>
+              <a:srgbClr val="999999">
+                <a:alpha val="85098"/>
+              </a:srgbClr>
+            </a:solidFill>
+            <a:ln w="13550" cap="flat">
+              <a:solidFill>
+                <a:srgbClr val="000000">
+                  <a:alpha val="100000"/>
+                </a:srgbClr>
+              </a:solidFill>
+              <a:prstDash val="solid"/>
+              <a:miter/>
+            </a:ln>
+          </p:spPr>
+          <p:txBody>
+            <a:bodyPr/>
+            <a:lstStyle/>
+            <a:p/>
+          </p:txBody>
+        </p:sp>
+        <p:sp>
+          <p:nvSpPr>
+            <p:cNvPr id="151" name="rc151"/>
+            <p:cNvSpPr/>
+            <p:nvPr/>
+          </p:nvSpPr>
+          <p:spPr>
+            <a:xfrm>
+              <a:off x="5434507" y="4571160"/>
+              <a:ext cx="104241" cy="876890"/>
+            </a:xfrm>
+            <a:prstGeom prst="rect">
+              <a:avLst/>
+            </a:prstGeom>
+            <a:solidFill>
+              <a:srgbClr val="999999">
+                <a:alpha val="85098"/>
+              </a:srgbClr>
+            </a:solidFill>
+            <a:ln w="13550" cap="flat">
+              <a:solidFill>
+                <a:srgbClr val="000000">
+                  <a:alpha val="100000"/>
+                </a:srgbClr>
+              </a:solidFill>
+              <a:prstDash val="solid"/>
+              <a:miter/>
+            </a:ln>
+          </p:spPr>
+          <p:txBody>
+            <a:bodyPr/>
+            <a:lstStyle/>
+            <a:p/>
+          </p:txBody>
+        </p:sp>
+        <p:sp>
+          <p:nvSpPr>
+            <p:cNvPr id="152" name="rc152"/>
+            <p:cNvSpPr/>
+            <p:nvPr/>
+          </p:nvSpPr>
+          <p:spPr>
+            <a:xfrm>
+              <a:off x="5538748" y="4706067"/>
+              <a:ext cx="104241" cy="741984"/>
+            </a:xfrm>
+            <a:prstGeom prst="rect">
+              <a:avLst/>
+            </a:prstGeom>
+            <a:solidFill>
+              <a:srgbClr val="999999">
+                <a:alpha val="85098"/>
+              </a:srgbClr>
+            </a:solidFill>
+            <a:ln w="13550" cap="flat">
+              <a:solidFill>
+                <a:srgbClr val="000000">
+                  <a:alpha val="100000"/>
+                </a:srgbClr>
+              </a:solidFill>
+              <a:prstDash val="solid"/>
+              <a:miter/>
+            </a:ln>
+          </p:spPr>
+          <p:txBody>
+            <a:bodyPr/>
+            <a:lstStyle/>
+            <a:p/>
+          </p:txBody>
+        </p:sp>
+        <p:sp>
+          <p:nvSpPr>
+            <p:cNvPr id="153" name="rc153"/>
+            <p:cNvSpPr/>
+            <p:nvPr/>
+          </p:nvSpPr>
+          <p:spPr>
+            <a:xfrm>
+              <a:off x="5642990" y="4233895"/>
+              <a:ext cx="104241" cy="1214155"/>
+            </a:xfrm>
+            <a:prstGeom prst="rect">
+              <a:avLst/>
+            </a:prstGeom>
+            <a:solidFill>
+              <a:srgbClr val="999999">
+                <a:alpha val="85098"/>
+              </a:srgbClr>
+            </a:solidFill>
+            <a:ln w="13550" cap="flat">
+              <a:solidFill>
+                <a:srgbClr val="000000">
+                  <a:alpha val="100000"/>
+                </a:srgbClr>
+              </a:solidFill>
+              <a:prstDash val="solid"/>
+              <a:miter/>
+            </a:ln>
+          </p:spPr>
+          <p:txBody>
+            <a:bodyPr/>
+            <a:lstStyle/>
+            <a:p/>
+          </p:txBody>
+        </p:sp>
+        <p:sp>
+          <p:nvSpPr>
+            <p:cNvPr id="154" name="rc154"/>
+            <p:cNvSpPr/>
+            <p:nvPr/>
+          </p:nvSpPr>
+          <p:spPr>
+            <a:xfrm>
+              <a:off x="5747231" y="4773520"/>
+              <a:ext cx="104241" cy="674530"/>
+            </a:xfrm>
+            <a:prstGeom prst="rect">
+              <a:avLst/>
+            </a:prstGeom>
+            <a:solidFill>
+              <a:srgbClr val="999999">
+                <a:alpha val="85098"/>
+              </a:srgbClr>
+            </a:solidFill>
+            <a:ln w="13550" cap="flat">
+              <a:solidFill>
+                <a:srgbClr val="000000">
+                  <a:alpha val="100000"/>
+                </a:srgbClr>
+              </a:solidFill>
+              <a:prstDash val="solid"/>
+              <a:miter/>
+            </a:ln>
+          </p:spPr>
+          <p:txBody>
+            <a:bodyPr/>
+            <a:lstStyle/>
+            <a:p/>
+          </p:txBody>
+        </p:sp>
+        <p:sp>
+          <p:nvSpPr>
+            <p:cNvPr id="155" name="rc155"/>
+            <p:cNvSpPr/>
+            <p:nvPr/>
+          </p:nvSpPr>
+          <p:spPr>
+            <a:xfrm>
+              <a:off x="5851472" y="5110785"/>
+              <a:ext cx="104241" cy="337265"/>
+            </a:xfrm>
+            <a:prstGeom prst="rect">
+              <a:avLst/>
+            </a:prstGeom>
+            <a:solidFill>
+              <a:srgbClr val="999999">
+                <a:alpha val="85098"/>
+              </a:srgbClr>
+            </a:solidFill>
+            <a:ln w="13550" cap="flat">
+              <a:solidFill>
+                <a:srgbClr val="000000">
+                  <a:alpha val="100000"/>
+                </a:srgbClr>
+              </a:solidFill>
+              <a:prstDash val="solid"/>
+              <a:miter/>
+            </a:ln>
+          </p:spPr>
+          <p:txBody>
+            <a:bodyPr/>
+            <a:lstStyle/>
+            <a:p/>
+          </p:txBody>
+        </p:sp>
+        <p:sp>
+          <p:nvSpPr>
+            <p:cNvPr id="156" name="rc156"/>
+            <p:cNvSpPr/>
+            <p:nvPr/>
+          </p:nvSpPr>
+          <p:spPr>
+            <a:xfrm>
+              <a:off x="5955714" y="4638613"/>
+              <a:ext cx="104241" cy="809437"/>
+            </a:xfrm>
+            <a:prstGeom prst="rect">
+              <a:avLst/>
+            </a:prstGeom>
+            <a:solidFill>
+              <a:srgbClr val="999999">
+                <a:alpha val="85098"/>
+              </a:srgbClr>
+            </a:solidFill>
+            <a:ln w="13550" cap="flat">
+              <a:solidFill>
+                <a:srgbClr val="000000">
+                  <a:alpha val="100000"/>
+                </a:srgbClr>
+              </a:solidFill>
+              <a:prstDash val="solid"/>
+              <a:miter/>
+            </a:ln>
+          </p:spPr>
+          <p:txBody>
+            <a:bodyPr/>
+            <a:lstStyle/>
+            <a:p/>
+          </p:txBody>
+        </p:sp>
+        <p:sp>
+          <p:nvSpPr>
+            <p:cNvPr id="157" name="rc157"/>
+            <p:cNvSpPr/>
+            <p:nvPr/>
+          </p:nvSpPr>
+          <p:spPr>
+            <a:xfrm>
+              <a:off x="6059955" y="5178238"/>
+              <a:ext cx="104241" cy="269812"/>
+            </a:xfrm>
+            <a:prstGeom prst="rect">
+              <a:avLst/>
+            </a:prstGeom>
+            <a:solidFill>
+              <a:srgbClr val="999999">
+                <a:alpha val="85098"/>
+              </a:srgbClr>
+            </a:solidFill>
+            <a:ln w="13550" cap="flat">
+              <a:solidFill>
+                <a:srgbClr val="000000">
+                  <a:alpha val="100000"/>
+                </a:srgbClr>
+              </a:solidFill>
+              <a:prstDash val="solid"/>
+              <a:miter/>
+            </a:ln>
+          </p:spPr>
+          <p:txBody>
+            <a:bodyPr/>
+            <a:lstStyle/>
+            <a:p/>
+          </p:txBody>
+        </p:sp>
+        <p:sp>
+          <p:nvSpPr>
+            <p:cNvPr id="158" name="rc158"/>
+            <p:cNvSpPr/>
+            <p:nvPr/>
+          </p:nvSpPr>
+          <p:spPr>
+            <a:xfrm>
+              <a:off x="6164196" y="4706067"/>
+              <a:ext cx="104241" cy="741984"/>
+            </a:xfrm>
+            <a:prstGeom prst="rect">
+              <a:avLst/>
+            </a:prstGeom>
+            <a:solidFill>
+              <a:srgbClr val="999999">
+                <a:alpha val="85098"/>
+              </a:srgbClr>
+            </a:solidFill>
+            <a:ln w="13550" cap="flat">
+              <a:solidFill>
+                <a:srgbClr val="000000">
+                  <a:alpha val="100000"/>
+                </a:srgbClr>
+              </a:solidFill>
+              <a:prstDash val="solid"/>
+              <a:miter/>
+            </a:ln>
+          </p:spPr>
+          <p:txBody>
+            <a:bodyPr/>
+            <a:lstStyle/>
+            <a:p/>
+          </p:txBody>
+        </p:sp>
+        <p:sp>
+          <p:nvSpPr>
+            <p:cNvPr id="159" name="rc159"/>
+            <p:cNvSpPr/>
+            <p:nvPr/>
+          </p:nvSpPr>
+          <p:spPr>
+            <a:xfrm>
+              <a:off x="6268438" y="4908426"/>
+              <a:ext cx="104241" cy="539624"/>
+            </a:xfrm>
+            <a:prstGeom prst="rect">
+              <a:avLst/>
+            </a:prstGeom>
+            <a:solidFill>
+              <a:srgbClr val="999999">
+                <a:alpha val="85098"/>
+              </a:srgbClr>
+            </a:solidFill>
+            <a:ln w="13550" cap="flat">
+              <a:solidFill>
+                <a:srgbClr val="000000">
+                  <a:alpha val="100000"/>
+                </a:srgbClr>
+              </a:solidFill>
+              <a:prstDash val="solid"/>
+              <a:miter/>
+            </a:ln>
+          </p:spPr>
+          <p:txBody>
+            <a:bodyPr/>
+            <a:lstStyle/>
+            <a:p/>
+          </p:txBody>
+        </p:sp>
+        <p:sp>
+          <p:nvSpPr>
+            <p:cNvPr id="160" name="rc160"/>
+            <p:cNvSpPr/>
+            <p:nvPr/>
+          </p:nvSpPr>
+          <p:spPr>
+            <a:xfrm>
+              <a:off x="6372679" y="5245691"/>
+              <a:ext cx="104241" cy="202359"/>
+            </a:xfrm>
+            <a:prstGeom prst="rect">
+              <a:avLst/>
+            </a:prstGeom>
+            <a:solidFill>
+              <a:srgbClr val="999999">
+                <a:alpha val="85098"/>
+              </a:srgbClr>
+            </a:solidFill>
+            <a:ln w="13550" cap="flat">
+              <a:solidFill>
+                <a:srgbClr val="000000">
+                  <a:alpha val="100000"/>
+                </a:srgbClr>
+              </a:solidFill>
+              <a:prstDash val="solid"/>
+              <a:miter/>
+            </a:ln>
+          </p:spPr>
+          <p:txBody>
+            <a:bodyPr/>
+            <a:lstStyle/>
+            <a:p/>
+          </p:txBody>
+        </p:sp>
+        <p:sp>
+          <p:nvSpPr>
+            <p:cNvPr id="161" name="rc161"/>
+            <p:cNvSpPr/>
+            <p:nvPr/>
+          </p:nvSpPr>
+          <p:spPr>
+            <a:xfrm>
+              <a:off x="6476920" y="4840973"/>
+              <a:ext cx="104241" cy="607077"/>
+            </a:xfrm>
+            <a:prstGeom prst="rect">
+              <a:avLst/>
+            </a:prstGeom>
+            <a:solidFill>
+              <a:srgbClr val="999999">
+                <a:alpha val="85098"/>
+              </a:srgbClr>
+            </a:solidFill>
+            <a:ln w="13550" cap="flat">
+              <a:solidFill>
+                <a:srgbClr val="000000">
+                  <a:alpha val="100000"/>
+                </a:srgbClr>
+              </a:solidFill>
+              <a:prstDash val="solid"/>
+              <a:miter/>
+            </a:ln>
+          </p:spPr>
+          <p:txBody>
+            <a:bodyPr/>
+            <a:lstStyle/>
+            <a:p/>
+          </p:txBody>
+        </p:sp>
+        <p:sp>
+          <p:nvSpPr>
+            <p:cNvPr id="162" name="rc162"/>
+            <p:cNvSpPr/>
+            <p:nvPr/>
+          </p:nvSpPr>
+          <p:spPr>
+            <a:xfrm>
+              <a:off x="6581162" y="5313144"/>
+              <a:ext cx="104241" cy="134906"/>
+            </a:xfrm>
+            <a:prstGeom prst="rect">
+              <a:avLst/>
+            </a:prstGeom>
+            <a:solidFill>
+              <a:srgbClr val="999999">
+                <a:alpha val="85098"/>
+              </a:srgbClr>
+            </a:solidFill>
+            <a:ln w="13550" cap="flat">
+              <a:solidFill>
+                <a:srgbClr val="000000">
+                  <a:alpha val="100000"/>
+                </a:srgbClr>
+              </a:solidFill>
+              <a:prstDash val="solid"/>
+              <a:miter/>
+            </a:ln>
+          </p:spPr>
+          <p:txBody>
+            <a:bodyPr/>
+            <a:lstStyle/>
+            <a:p/>
+          </p:txBody>
+        </p:sp>
+        <p:sp>
+          <p:nvSpPr>
+            <p:cNvPr id="163" name="rc163"/>
+            <p:cNvSpPr/>
+            <p:nvPr/>
+          </p:nvSpPr>
+          <p:spPr>
+            <a:xfrm>
+              <a:off x="6685403" y="5380597"/>
+              <a:ext cx="104241" cy="67453"/>
+            </a:xfrm>
+            <a:prstGeom prst="rect">
+              <a:avLst/>
+            </a:prstGeom>
+            <a:solidFill>
+              <a:srgbClr val="999999">
+                <a:alpha val="85098"/>
+              </a:srgbClr>
+            </a:solidFill>
+            <a:ln w="13550" cap="flat">
+              <a:solidFill>
+                <a:srgbClr val="000000">
+                  <a:alpha val="100000"/>
+                </a:srgbClr>
+              </a:solidFill>
+              <a:prstDash val="solid"/>
+              <a:miter/>
+            </a:ln>
+          </p:spPr>
+          <p:txBody>
+            <a:bodyPr/>
+            <a:lstStyle/>
+            <a:p/>
+          </p:txBody>
+        </p:sp>
+        <p:sp>
+          <p:nvSpPr>
+            <p:cNvPr id="164" name="rc164"/>
+            <p:cNvSpPr/>
+            <p:nvPr/>
+          </p:nvSpPr>
+          <p:spPr>
+            <a:xfrm>
+              <a:off x="6789644" y="5313144"/>
+              <a:ext cx="104241" cy="134906"/>
+            </a:xfrm>
+            <a:prstGeom prst="rect">
+              <a:avLst/>
+            </a:prstGeom>
+            <a:solidFill>
+              <a:srgbClr val="999999">
+                <a:alpha val="85098"/>
+              </a:srgbClr>
+            </a:solidFill>
+            <a:ln w="13550" cap="flat">
+              <a:solidFill>
+                <a:srgbClr val="000000">
+                  <a:alpha val="100000"/>
+                </a:srgbClr>
+              </a:solidFill>
+              <a:prstDash val="solid"/>
+              <a:miter/>
+            </a:ln>
+          </p:spPr>
+          <p:txBody>
+            <a:bodyPr/>
+            <a:lstStyle/>
+            <a:p/>
+          </p:txBody>
+        </p:sp>
+        <p:sp>
+          <p:nvSpPr>
+            <p:cNvPr id="165" name="rc165"/>
+            <p:cNvSpPr/>
+            <p:nvPr/>
+          </p:nvSpPr>
+          <p:spPr>
+            <a:xfrm>
+              <a:off x="6893886" y="5313144"/>
+              <a:ext cx="104241" cy="134906"/>
+            </a:xfrm>
+            <a:prstGeom prst="rect">
+              <a:avLst/>
+            </a:prstGeom>
+            <a:solidFill>
+              <a:srgbClr val="999999">
+                <a:alpha val="85098"/>
+              </a:srgbClr>
+            </a:solidFill>
+            <a:ln w="13550" cap="flat">
+              <a:solidFill>
+                <a:srgbClr val="000000">
+                  <a:alpha val="100000"/>
+                </a:srgbClr>
+              </a:solidFill>
+              <a:prstDash val="solid"/>
+              <a:miter/>
+            </a:ln>
+          </p:spPr>
+          <p:txBody>
+            <a:bodyPr/>
+            <a:lstStyle/>
+            <a:p/>
+          </p:txBody>
+        </p:sp>
+        <p:sp>
+          <p:nvSpPr>
+            <p:cNvPr id="166" name="rc166"/>
+            <p:cNvSpPr/>
+            <p:nvPr/>
+          </p:nvSpPr>
+          <p:spPr>
+            <a:xfrm>
+              <a:off x="6998127" y="5448051"/>
+              <a:ext cx="104241" cy="0"/>
+            </a:xfrm>
+            <a:prstGeom prst="rect">
+              <a:avLst/>
+            </a:prstGeom>
+            <a:solidFill>
+              <a:srgbClr val="999999">
+                <a:alpha val="85098"/>
+              </a:srgbClr>
+            </a:solidFill>
+            <a:ln w="13550" cap="flat">
+              <a:solidFill>
+                <a:srgbClr val="000000">
+                  <a:alpha val="100000"/>
+                </a:srgbClr>
+              </a:solidFill>
+              <a:prstDash val="solid"/>
+              <a:miter/>
+            </a:ln>
+          </p:spPr>
+          <p:txBody>
+            <a:bodyPr/>
+            <a:lstStyle/>
+            <a:p/>
+          </p:txBody>
+        </p:sp>
+        <p:sp>
+          <p:nvSpPr>
+            <p:cNvPr id="167" name="rc167"/>
+            <p:cNvSpPr/>
+            <p:nvPr/>
+          </p:nvSpPr>
+          <p:spPr>
+            <a:xfrm>
+              <a:off x="7102368" y="5448051"/>
+              <a:ext cx="104241" cy="0"/>
+            </a:xfrm>
+            <a:prstGeom prst="rect">
+              <a:avLst/>
+            </a:prstGeom>
+            <a:solidFill>
+              <a:srgbClr val="999999">
+                <a:alpha val="85098"/>
+              </a:srgbClr>
+            </a:solidFill>
+            <a:ln w="13550" cap="flat">
+              <a:solidFill>
+                <a:srgbClr val="000000">
+                  <a:alpha val="100000"/>
+                </a:srgbClr>
+              </a:solidFill>
+              <a:prstDash val="solid"/>
+              <a:miter/>
+            </a:ln>
+          </p:spPr>
+          <p:txBody>
+            <a:bodyPr/>
+            <a:lstStyle/>
+            <a:p/>
+          </p:txBody>
+        </p:sp>
+        <p:sp>
+          <p:nvSpPr>
+            <p:cNvPr id="168" name="rc168"/>
+            <p:cNvSpPr/>
+            <p:nvPr/>
+          </p:nvSpPr>
+          <p:spPr>
+            <a:xfrm>
+              <a:off x="7206610" y="5380597"/>
+              <a:ext cx="104241" cy="67453"/>
+            </a:xfrm>
+            <a:prstGeom prst="rect">
+              <a:avLst/>
+            </a:prstGeom>
+            <a:solidFill>
+              <a:srgbClr val="999999">
+                <a:alpha val="85098"/>
+              </a:srgbClr>
+            </a:solidFill>
+            <a:ln w="13550" cap="flat">
+              <a:solidFill>
+                <a:srgbClr val="000000">
+                  <a:alpha val="100000"/>
+                </a:srgbClr>
+              </a:solidFill>
+              <a:prstDash val="solid"/>
+              <a:miter/>
+            </a:ln>
+          </p:spPr>
+          <p:txBody>
+            <a:bodyPr/>
+            <a:lstStyle/>
+            <a:p/>
+          </p:txBody>
+        </p:sp>
+        <p:sp>
+          <p:nvSpPr>
+            <p:cNvPr id="169" name="rc169"/>
+            <p:cNvSpPr/>
+            <p:nvPr/>
+          </p:nvSpPr>
+          <p:spPr>
+            <a:xfrm>
+              <a:off x="7310851" y="5380597"/>
+              <a:ext cx="104241" cy="67453"/>
+            </a:xfrm>
+            <a:prstGeom prst="rect">
+              <a:avLst/>
+            </a:prstGeom>
+            <a:solidFill>
+              <a:srgbClr val="999999">
+                <a:alpha val="85098"/>
+              </a:srgbClr>
+            </a:solidFill>
+            <a:ln w="13550" cap="flat">
+              <a:solidFill>
+                <a:srgbClr val="000000">
+                  <a:alpha val="100000"/>
+                </a:srgbClr>
+              </a:solidFill>
+              <a:prstDash val="solid"/>
+              <a:miter/>
+            </a:ln>
+          </p:spPr>
+          <p:txBody>
+            <a:bodyPr/>
+            <a:lstStyle/>
+            <a:p/>
+          </p:txBody>
+        </p:sp>
+        <p:sp>
+          <p:nvSpPr>
+            <p:cNvPr id="170" name="rc170"/>
+            <p:cNvSpPr/>
+            <p:nvPr/>
+          </p:nvSpPr>
+          <p:spPr>
+            <a:xfrm>
+              <a:off x="7415092" y="5380597"/>
+              <a:ext cx="104241" cy="67453"/>
+            </a:xfrm>
+            <a:prstGeom prst="rect">
+              <a:avLst/>
+            </a:prstGeom>
+            <a:solidFill>
+              <a:srgbClr val="999999">
+                <a:alpha val="85098"/>
+              </a:srgbClr>
+            </a:solidFill>
+            <a:ln w="13550" cap="flat">
+              <a:solidFill>
+                <a:srgbClr val="000000">
+                  <a:alpha val="100000"/>
+                </a:srgbClr>
+              </a:solidFill>
+              <a:prstDash val="solid"/>
+              <a:miter/>
+            </a:ln>
+          </p:spPr>
+          <p:txBody>
+            <a:bodyPr/>
+            <a:lstStyle/>
+            <a:p/>
+          </p:txBody>
+        </p:sp>
+        <p:sp>
+          <p:nvSpPr>
+            <p:cNvPr id="171" name="rc171"/>
+            <p:cNvSpPr/>
+            <p:nvPr/>
+          </p:nvSpPr>
+          <p:spPr>
+            <a:xfrm>
+              <a:off x="7519334" y="5313144"/>
+              <a:ext cx="104241" cy="134906"/>
+            </a:xfrm>
+            <a:prstGeom prst="rect">
+              <a:avLst/>
+            </a:prstGeom>
+            <a:solidFill>
+              <a:srgbClr val="999999">
+                <a:alpha val="85098"/>
+              </a:srgbClr>
+            </a:solidFill>
+            <a:ln w="13550" cap="flat">
+              <a:solidFill>
+                <a:srgbClr val="000000">
+                  <a:alpha val="100000"/>
+                </a:srgbClr>
+              </a:solidFill>
+              <a:prstDash val="solid"/>
+              <a:miter/>
+            </a:ln>
+          </p:spPr>
+          <p:txBody>
+            <a:bodyPr/>
+            <a:lstStyle/>
+            <a:p/>
+          </p:txBody>
+        </p:sp>
+        <p:sp>
+          <p:nvSpPr>
+            <p:cNvPr id="172" name="rc172"/>
+            <p:cNvSpPr/>
+            <p:nvPr/>
+          </p:nvSpPr>
+          <p:spPr>
+            <a:xfrm>
+              <a:off x="7623575" y="5448051"/>
+              <a:ext cx="104241" cy="0"/>
+            </a:xfrm>
+            <a:prstGeom prst="rect">
+              <a:avLst/>
+            </a:prstGeom>
+            <a:solidFill>
+              <a:srgbClr val="999999">
+                <a:alpha val="85098"/>
+              </a:srgbClr>
+            </a:solidFill>
+            <a:ln w="13550" cap="flat">
+              <a:solidFill>
+                <a:srgbClr val="000000">
+                  <a:alpha val="100000"/>
+                </a:srgbClr>
+              </a:solidFill>
+              <a:prstDash val="solid"/>
+              <a:miter/>
+            </a:ln>
+          </p:spPr>
+          <p:txBody>
+            <a:bodyPr/>
+            <a:lstStyle/>
+            <a:p/>
+          </p:txBody>
+        </p:sp>
+        <p:sp>
+          <p:nvSpPr>
+            <p:cNvPr id="173" name="rc173"/>
+            <p:cNvSpPr/>
+            <p:nvPr/>
+          </p:nvSpPr>
+          <p:spPr>
+            <a:xfrm>
+              <a:off x="7727816" y="5448051"/>
+              <a:ext cx="104241" cy="0"/>
+            </a:xfrm>
+            <a:prstGeom prst="rect">
+              <a:avLst/>
+            </a:prstGeom>
+            <a:solidFill>
+              <a:srgbClr val="999999">
+                <a:alpha val="85098"/>
+              </a:srgbClr>
+            </a:solidFill>
+            <a:ln w="13550" cap="flat">
+              <a:solidFill>
+                <a:srgbClr val="000000">
+                  <a:alpha val="100000"/>
+                </a:srgbClr>
+              </a:solidFill>
+              <a:prstDash val="solid"/>
+              <a:miter/>
+            </a:ln>
+          </p:spPr>
+          <p:txBody>
+            <a:bodyPr/>
+            <a:lstStyle/>
+            <a:p/>
+          </p:txBody>
+        </p:sp>
+        <p:sp>
+          <p:nvSpPr>
+            <p:cNvPr id="174" name="rc174"/>
+            <p:cNvSpPr/>
+            <p:nvPr/>
+          </p:nvSpPr>
+          <p:spPr>
+            <a:xfrm>
+              <a:off x="7832058" y="5448051"/>
+              <a:ext cx="104241" cy="0"/>
+            </a:xfrm>
+            <a:prstGeom prst="rect">
+              <a:avLst/>
+            </a:prstGeom>
+            <a:solidFill>
+              <a:srgbClr val="999999">
+                <a:alpha val="85098"/>
+              </a:srgbClr>
+            </a:solidFill>
+            <a:ln w="13550" cap="flat">
+              <a:solidFill>
+                <a:srgbClr val="000000">
+                  <a:alpha val="100000"/>
+                </a:srgbClr>
+              </a:solidFill>
+              <a:prstDash val="solid"/>
+              <a:miter/>
+            </a:ln>
+          </p:spPr>
+          <p:txBody>
+            <a:bodyPr/>
+            <a:lstStyle/>
+            <a:p/>
+          </p:txBody>
+        </p:sp>
+        <p:sp>
+          <p:nvSpPr>
+            <p:cNvPr id="175" name="rc175"/>
+            <p:cNvSpPr/>
+            <p:nvPr/>
+          </p:nvSpPr>
+          <p:spPr>
+            <a:xfrm>
+              <a:off x="7936299" y="5448051"/>
+              <a:ext cx="104241" cy="0"/>
+            </a:xfrm>
+            <a:prstGeom prst="rect">
+              <a:avLst/>
+            </a:prstGeom>
+            <a:solidFill>
+              <a:srgbClr val="999999">
+                <a:alpha val="85098"/>
+              </a:srgbClr>
+            </a:solidFill>
+            <a:ln w="13550" cap="flat">
+              <a:solidFill>
+                <a:srgbClr val="000000">
+                  <a:alpha val="100000"/>
+                </a:srgbClr>
+              </a:solidFill>
+              <a:prstDash val="solid"/>
+              <a:miter/>
+            </a:ln>
+          </p:spPr>
+          <p:txBody>
+            <a:bodyPr/>
+            <a:lstStyle/>
+            <a:p/>
+          </p:txBody>
+        </p:sp>
+        <p:sp>
+          <p:nvSpPr>
+            <p:cNvPr id="176" name="rc176"/>
+            <p:cNvSpPr/>
+            <p:nvPr/>
+          </p:nvSpPr>
+          <p:spPr>
+            <a:xfrm>
+              <a:off x="8040540" y="5448051"/>
+              <a:ext cx="104241" cy="0"/>
+            </a:xfrm>
+            <a:prstGeom prst="rect">
+              <a:avLst/>
+            </a:prstGeom>
+            <a:solidFill>
+              <a:srgbClr val="999999">
+                <a:alpha val="85098"/>
+              </a:srgbClr>
+            </a:solidFill>
+            <a:ln w="13550" cap="flat">
+              <a:solidFill>
+                <a:srgbClr val="000000">
+                  <a:alpha val="100000"/>
+                </a:srgbClr>
+              </a:solidFill>
+              <a:prstDash val="solid"/>
+              <a:miter/>
+            </a:ln>
+          </p:spPr>
+          <p:txBody>
+            <a:bodyPr/>
+            <a:lstStyle/>
+            <a:p/>
+          </p:txBody>
+        </p:sp>
+        <p:sp>
+          <p:nvSpPr>
+            <p:cNvPr id="177" name="rc177"/>
+            <p:cNvSpPr/>
+            <p:nvPr/>
+          </p:nvSpPr>
+          <p:spPr>
+            <a:xfrm>
+              <a:off x="8144782" y="5380597"/>
+              <a:ext cx="104241" cy="67453"/>
+            </a:xfrm>
+            <a:prstGeom prst="rect">
+              <a:avLst/>
+            </a:prstGeom>
+            <a:solidFill>
+              <a:srgbClr val="999999">
+                <a:alpha val="85098"/>
+              </a:srgbClr>
+            </a:solidFill>
+            <a:ln w="13550" cap="flat">
+              <a:solidFill>
+                <a:srgbClr val="000000">
+                  <a:alpha val="100000"/>
+                </a:srgbClr>
+              </a:solidFill>
+              <a:prstDash val="solid"/>
+              <a:miter/>
+            </a:ln>
+          </p:spPr>
+          <p:txBody>
+            <a:bodyPr/>
+            <a:lstStyle/>
+            <a:p/>
+          </p:txBody>
+        </p:sp>
+        <p:sp>
+          <p:nvSpPr>
+            <p:cNvPr id="178" name="pl178"/>
+            <p:cNvSpPr/>
+            <p:nvPr/>
+          </p:nvSpPr>
+          <p:spPr>
+            <a:xfrm>
+              <a:off x="4183611" y="1977589"/>
+              <a:ext cx="0" cy="3635721"/>
+            </a:xfrm>
+            <a:custGeom>
+              <a:avLst/>
+              <a:pathLst>
+                <a:path w="0" h="3635721">
+                  <a:moveTo>
+                    <a:pt x="0" y="3635721"/>
+                  </a:moveTo>
+                  <a:lnTo>
+                    <a:pt x="0" y="0"/>
+                  </a:lnTo>
+                  <a:lnTo>
+                    <a:pt x="0" y="0"/>
+                  </a:lnTo>
+                </a:path>
+              </a:pathLst>
+            </a:custGeom>
             <a:ln w="13550" cap="flat">
               <a:solidFill>
                 <a:srgbClr val="4D4D4D">
@@ -4843,14 +8718,14 @@
         </p:sp>
         <p:sp>
           <p:nvSpPr>
-            <p:cNvPr id="74" name="tx74"/>
-            <p:cNvSpPr/>
-            <p:nvPr/>
-          </p:nvSpPr>
-          <p:spPr>
-            <a:xfrm>
-              <a:off x="835933" y="5397073"/>
-              <a:ext cx="197510" cy="101955"/>
+            <p:cNvPr id="179" name="tx179"/>
+            <p:cNvSpPr/>
+            <p:nvPr/>
+          </p:nvSpPr>
+          <p:spPr>
+            <a:xfrm>
+              <a:off x="756929" y="5397073"/>
+              <a:ext cx="79004" cy="101955"/>
             </a:xfrm>
             <a:prstGeom prst="rect">
               <a:avLst/>
@@ -4882,21 +8757,21 @@
                   <a:latin typeface="Helvetica"/>
                   <a:cs typeface="Helvetica"/>
                 </a:rPr>
-                <a:t>0.0</a:t>
+                <a:t>0</a:t>
               </a:r>
             </a:p>
           </p:txBody>
         </p:sp>
         <p:sp>
           <p:nvSpPr>
-            <p:cNvPr id="75" name="tx75"/>
-            <p:cNvSpPr/>
-            <p:nvPr/>
-          </p:nvSpPr>
-          <p:spPr>
-            <a:xfrm>
-              <a:off x="835933" y="4610001"/>
-              <a:ext cx="197510" cy="101955"/>
+            <p:cNvPr id="180" name="tx180"/>
+            <p:cNvSpPr/>
+            <p:nvPr/>
+          </p:nvSpPr>
+          <p:spPr>
+            <a:xfrm>
+              <a:off x="756929" y="4760990"/>
+              <a:ext cx="79004" cy="101955"/>
             </a:xfrm>
             <a:prstGeom prst="rect">
               <a:avLst/>
@@ -4928,21 +8803,21 @@
                   <a:latin typeface="Helvetica"/>
                   <a:cs typeface="Helvetica"/>
                 </a:rPr>
-                <a:t>2.5</a:t>
+                <a:t>1</a:t>
               </a:r>
             </a:p>
           </p:txBody>
         </p:sp>
         <p:sp>
           <p:nvSpPr>
-            <p:cNvPr id="76" name="tx76"/>
-            <p:cNvSpPr/>
-            <p:nvPr/>
-          </p:nvSpPr>
-          <p:spPr>
-            <a:xfrm>
-              <a:off x="835933" y="3822929"/>
-              <a:ext cx="197510" cy="101955"/>
+            <p:cNvPr id="181" name="tx181"/>
+            <p:cNvSpPr/>
+            <p:nvPr/>
+          </p:nvSpPr>
+          <p:spPr>
+            <a:xfrm>
+              <a:off x="756929" y="4124907"/>
+              <a:ext cx="79004" cy="101955"/>
             </a:xfrm>
             <a:prstGeom prst="rect">
               <a:avLst/>
@@ -4974,21 +8849,21 @@
                   <a:latin typeface="Helvetica"/>
                   <a:cs typeface="Helvetica"/>
                 </a:rPr>
-                <a:t>5.0</a:t>
+                <a:t>2</a:t>
               </a:r>
             </a:p>
           </p:txBody>
         </p:sp>
         <p:sp>
           <p:nvSpPr>
-            <p:cNvPr id="77" name="tx77"/>
-            <p:cNvSpPr/>
-            <p:nvPr/>
-          </p:nvSpPr>
-          <p:spPr>
-            <a:xfrm>
-              <a:off x="835933" y="3035857"/>
-              <a:ext cx="197510" cy="101955"/>
+            <p:cNvPr id="182" name="tx182"/>
+            <p:cNvSpPr/>
+            <p:nvPr/>
+          </p:nvSpPr>
+          <p:spPr>
+            <a:xfrm>
+              <a:off x="756929" y="3488825"/>
+              <a:ext cx="79004" cy="101955"/>
             </a:xfrm>
             <a:prstGeom prst="rect">
               <a:avLst/>
@@ -5020,21 +8895,21 @@
                   <a:latin typeface="Helvetica"/>
                   <a:cs typeface="Helvetica"/>
                 </a:rPr>
-                <a:t>7.5</a:t>
+                <a:t>3</a:t>
               </a:r>
             </a:p>
           </p:txBody>
         </p:sp>
         <p:sp>
           <p:nvSpPr>
-            <p:cNvPr id="78" name="tx78"/>
-            <p:cNvSpPr/>
-            <p:nvPr/>
-          </p:nvSpPr>
-          <p:spPr>
-            <a:xfrm>
-              <a:off x="756929" y="2248785"/>
-              <a:ext cx="276514" cy="101955"/>
+            <p:cNvPr id="183" name="tx183"/>
+            <p:cNvSpPr/>
+            <p:nvPr/>
+          </p:nvSpPr>
+          <p:spPr>
+            <a:xfrm>
+              <a:off x="756929" y="2852742"/>
+              <a:ext cx="79004" cy="101955"/>
             </a:xfrm>
             <a:prstGeom prst="rect">
               <a:avLst/>
@@ -5066,20 +8941,112 @@
                   <a:latin typeface="Helvetica"/>
                   <a:cs typeface="Helvetica"/>
                 </a:rPr>
-                <a:t>10.0</a:t>
+                <a:t>4</a:t>
               </a:r>
             </a:p>
           </p:txBody>
         </p:sp>
         <p:sp>
           <p:nvSpPr>
-            <p:cNvPr id="79" name="tx79"/>
-            <p:cNvSpPr/>
-            <p:nvPr/>
-          </p:nvSpPr>
-          <p:spPr>
-            <a:xfrm>
-              <a:off x="1602767" y="5693022"/>
+            <p:cNvPr id="184" name="tx184"/>
+            <p:cNvSpPr/>
+            <p:nvPr/>
+          </p:nvSpPr>
+          <p:spPr>
+            <a:xfrm>
+              <a:off x="756929" y="2216659"/>
+              <a:ext cx="79004" cy="101955"/>
+            </a:xfrm>
+            <a:prstGeom prst="rect">
+              <a:avLst/>
+            </a:prstGeom>
+            <a:noFill/>
+          </p:spPr>
+          <p:txBody>
+            <a:bodyPr lIns="0" rIns="0" tIns="0" bIns="0" anchorCtr="1" anchor="ctr" wrap="none"/>
+            <a:lstStyle/>
+            <a:p>
+              <a:pPr algn="l" marL="0" marR="0" indent="0">
+                <a:lnSpc>
+                  <a:spcPts val="1120"/>
+                </a:lnSpc>
+                <a:spcBef>
+                  <a:spcPts val="0"/>
+                </a:spcBef>
+                <a:spcAft>
+                  <a:spcPts val="0"/>
+                </a:spcAft>
+              </a:pPr>
+              <a:r>
+                <a:rPr sz="1120">
+                  <a:solidFill>
+                    <a:srgbClr val="4D4D4D">
+                      <a:alpha val="100000"/>
+                    </a:srgbClr>
+                  </a:solidFill>
+                  <a:latin typeface="Helvetica"/>
+                  <a:cs typeface="Helvetica"/>
+                </a:rPr>
+                <a:t>5</a:t>
+              </a:r>
+            </a:p>
+          </p:txBody>
+        </p:sp>
+        <p:sp>
+          <p:nvSpPr>
+            <p:cNvPr id="185" name="tx185"/>
+            <p:cNvSpPr/>
+            <p:nvPr/>
+          </p:nvSpPr>
+          <p:spPr>
+            <a:xfrm>
+              <a:off x="953729" y="5693022"/>
+              <a:ext cx="205282" cy="101955"/>
+            </a:xfrm>
+            <a:prstGeom prst="rect">
+              <a:avLst/>
+            </a:prstGeom>
+            <a:noFill/>
+          </p:spPr>
+          <p:txBody>
+            <a:bodyPr lIns="0" rIns="0" tIns="0" bIns="0" anchorCtr="1" anchor="ctr" wrap="none"/>
+            <a:lstStyle/>
+            <a:p>
+              <a:pPr algn="l" marL="0" marR="0" indent="0">
+                <a:lnSpc>
+                  <a:spcPts val="1120"/>
+                </a:lnSpc>
+                <a:spcBef>
+                  <a:spcPts val="0"/>
+                </a:spcBef>
+                <a:spcAft>
+                  <a:spcPts val="0"/>
+                </a:spcAft>
+              </a:pPr>
+              <a:r>
+                <a:rPr sz="1120">
+                  <a:solidFill>
+                    <a:srgbClr val="4D4D4D">
+                      <a:alpha val="100000"/>
+                    </a:srgbClr>
+                  </a:solidFill>
+                  <a:latin typeface="Helvetica"/>
+                  <a:cs typeface="Helvetica"/>
+                </a:rPr>
+                <a:t>-60</a:t>
+              </a:r>
+            </a:p>
+          </p:txBody>
+        </p:sp>
+        <p:sp>
+          <p:nvSpPr>
+            <p:cNvPr id="186" name="tx186"/>
+            <p:cNvSpPr/>
+            <p:nvPr/>
+          </p:nvSpPr>
+          <p:spPr>
+            <a:xfrm>
+              <a:off x="1474936" y="5693022"/>
               <a:ext cx="205282" cy="101955"/>
             </a:xfrm>
             <a:prstGeom prst="rect">
@@ -5119,13 +9086,197 @@
         </p:sp>
         <p:sp>
           <p:nvSpPr>
-            <p:cNvPr id="80" name="tx80"/>
-            <p:cNvSpPr/>
-            <p:nvPr/>
-          </p:nvSpPr>
-          <p:spPr>
-            <a:xfrm>
-              <a:off x="4186134" y="5693022"/>
+            <p:cNvPr id="187" name="tx187"/>
+            <p:cNvSpPr/>
+            <p:nvPr/>
+          </p:nvSpPr>
+          <p:spPr>
+            <a:xfrm>
+              <a:off x="1996142" y="5693022"/>
+              <a:ext cx="205282" cy="101955"/>
+            </a:xfrm>
+            <a:prstGeom prst="rect">
+              <a:avLst/>
+            </a:prstGeom>
+            <a:noFill/>
+          </p:spPr>
+          <p:txBody>
+            <a:bodyPr lIns="0" rIns="0" tIns="0" bIns="0" anchorCtr="1" anchor="ctr" wrap="none"/>
+            <a:lstStyle/>
+            <a:p>
+              <a:pPr algn="l" marL="0" marR="0" indent="0">
+                <a:lnSpc>
+                  <a:spcPts val="1120"/>
+                </a:lnSpc>
+                <a:spcBef>
+                  <a:spcPts val="0"/>
+                </a:spcBef>
+                <a:spcAft>
+                  <a:spcPts val="0"/>
+                </a:spcAft>
+              </a:pPr>
+              <a:r>
+                <a:rPr sz="1120">
+                  <a:solidFill>
+                    <a:srgbClr val="4D4D4D">
+                      <a:alpha val="100000"/>
+                    </a:srgbClr>
+                  </a:solidFill>
+                  <a:latin typeface="Helvetica"/>
+                  <a:cs typeface="Helvetica"/>
+                </a:rPr>
+                <a:t>-40</a:t>
+              </a:r>
+            </a:p>
+          </p:txBody>
+        </p:sp>
+        <p:sp>
+          <p:nvSpPr>
+            <p:cNvPr id="188" name="tx188"/>
+            <p:cNvSpPr/>
+            <p:nvPr/>
+          </p:nvSpPr>
+          <p:spPr>
+            <a:xfrm>
+              <a:off x="2517349" y="5693022"/>
+              <a:ext cx="205282" cy="101955"/>
+            </a:xfrm>
+            <a:prstGeom prst="rect">
+              <a:avLst/>
+            </a:prstGeom>
+            <a:noFill/>
+          </p:spPr>
+          <p:txBody>
+            <a:bodyPr lIns="0" rIns="0" tIns="0" bIns="0" anchorCtr="1" anchor="ctr" wrap="none"/>
+            <a:lstStyle/>
+            <a:p>
+              <a:pPr algn="l" marL="0" marR="0" indent="0">
+                <a:lnSpc>
+                  <a:spcPts val="1120"/>
+                </a:lnSpc>
+                <a:spcBef>
+                  <a:spcPts val="0"/>
+                </a:spcBef>
+                <a:spcAft>
+                  <a:spcPts val="0"/>
+                </a:spcAft>
+              </a:pPr>
+              <a:r>
+                <a:rPr sz="1120">
+                  <a:solidFill>
+                    <a:srgbClr val="4D4D4D">
+                      <a:alpha val="100000"/>
+                    </a:srgbClr>
+                  </a:solidFill>
+                  <a:latin typeface="Helvetica"/>
+                  <a:cs typeface="Helvetica"/>
+                </a:rPr>
+                <a:t>-30</a:t>
+              </a:r>
+            </a:p>
+          </p:txBody>
+        </p:sp>
+        <p:sp>
+          <p:nvSpPr>
+            <p:cNvPr id="189" name="tx189"/>
+            <p:cNvSpPr/>
+            <p:nvPr/>
+          </p:nvSpPr>
+          <p:spPr>
+            <a:xfrm>
+              <a:off x="3038556" y="5693022"/>
+              <a:ext cx="205282" cy="101955"/>
+            </a:xfrm>
+            <a:prstGeom prst="rect">
+              <a:avLst/>
+            </a:prstGeom>
+            <a:noFill/>
+          </p:spPr>
+          <p:txBody>
+            <a:bodyPr lIns="0" rIns="0" tIns="0" bIns="0" anchorCtr="1" anchor="ctr" wrap="none"/>
+            <a:lstStyle/>
+            <a:p>
+              <a:pPr algn="l" marL="0" marR="0" indent="0">
+                <a:lnSpc>
+                  <a:spcPts val="1120"/>
+                </a:lnSpc>
+                <a:spcBef>
+                  <a:spcPts val="0"/>
+                </a:spcBef>
+                <a:spcAft>
+                  <a:spcPts val="0"/>
+                </a:spcAft>
+              </a:pPr>
+              <a:r>
+                <a:rPr sz="1120">
+                  <a:solidFill>
+                    <a:srgbClr val="4D4D4D">
+                      <a:alpha val="100000"/>
+                    </a:srgbClr>
+                  </a:solidFill>
+                  <a:latin typeface="Helvetica"/>
+                  <a:cs typeface="Helvetica"/>
+                </a:rPr>
+                <a:t>-20</a:t>
+              </a:r>
+            </a:p>
+          </p:txBody>
+        </p:sp>
+        <p:sp>
+          <p:nvSpPr>
+            <p:cNvPr id="190" name="tx190"/>
+            <p:cNvSpPr/>
+            <p:nvPr/>
+          </p:nvSpPr>
+          <p:spPr>
+            <a:xfrm>
+              <a:off x="3559763" y="5693022"/>
+              <a:ext cx="205282" cy="101955"/>
+            </a:xfrm>
+            <a:prstGeom prst="rect">
+              <a:avLst/>
+            </a:prstGeom>
+            <a:noFill/>
+          </p:spPr>
+          <p:txBody>
+            <a:bodyPr lIns="0" rIns="0" tIns="0" bIns="0" anchorCtr="1" anchor="ctr" wrap="none"/>
+            <a:lstStyle/>
+            <a:p>
+              <a:pPr algn="l" marL="0" marR="0" indent="0">
+                <a:lnSpc>
+                  <a:spcPts val="1120"/>
+                </a:lnSpc>
+                <a:spcBef>
+                  <a:spcPts val="0"/>
+                </a:spcBef>
+                <a:spcAft>
+                  <a:spcPts val="0"/>
+                </a:spcAft>
+              </a:pPr>
+              <a:r>
+                <a:rPr sz="1120">
+                  <a:solidFill>
+                    <a:srgbClr val="4D4D4D">
+                      <a:alpha val="100000"/>
+                    </a:srgbClr>
+                  </a:solidFill>
+                  <a:latin typeface="Helvetica"/>
+                  <a:cs typeface="Helvetica"/>
+                </a:rPr>
+                <a:t>-10</a:t>
+              </a:r>
+            </a:p>
+          </p:txBody>
+        </p:sp>
+        <p:sp>
+          <p:nvSpPr>
+            <p:cNvPr id="191" name="tx191"/>
+            <p:cNvSpPr/>
+            <p:nvPr/>
+          </p:nvSpPr>
+          <p:spPr>
+            <a:xfrm>
+              <a:off x="4144109" y="5693022"/>
               <a:ext cx="79004" cy="101955"/>
             </a:xfrm>
             <a:prstGeom prst="rect">
@@ -5165,13 +9316,197 @@
         </p:sp>
         <p:sp>
           <p:nvSpPr>
-            <p:cNvPr id="81" name="tx81"/>
-            <p:cNvSpPr/>
-            <p:nvPr/>
-          </p:nvSpPr>
-          <p:spPr>
-            <a:xfrm>
-              <a:off x="6666860" y="5693022"/>
+            <p:cNvPr id="192" name="tx192"/>
+            <p:cNvSpPr/>
+            <p:nvPr/>
+          </p:nvSpPr>
+          <p:spPr>
+            <a:xfrm>
+              <a:off x="4625813" y="5693022"/>
+              <a:ext cx="158008" cy="101955"/>
+            </a:xfrm>
+            <a:prstGeom prst="rect">
+              <a:avLst/>
+            </a:prstGeom>
+            <a:noFill/>
+          </p:spPr>
+          <p:txBody>
+            <a:bodyPr lIns="0" rIns="0" tIns="0" bIns="0" anchorCtr="1" anchor="ctr" wrap="none"/>
+            <a:lstStyle/>
+            <a:p>
+              <a:pPr algn="l" marL="0" marR="0" indent="0">
+                <a:lnSpc>
+                  <a:spcPts val="1120"/>
+                </a:lnSpc>
+                <a:spcBef>
+                  <a:spcPts val="0"/>
+                </a:spcBef>
+                <a:spcAft>
+                  <a:spcPts val="0"/>
+                </a:spcAft>
+              </a:pPr>
+              <a:r>
+                <a:rPr sz="1120">
+                  <a:solidFill>
+                    <a:srgbClr val="4D4D4D">
+                      <a:alpha val="100000"/>
+                    </a:srgbClr>
+                  </a:solidFill>
+                  <a:latin typeface="Helvetica"/>
+                  <a:cs typeface="Helvetica"/>
+                </a:rPr>
+                <a:t>10</a:t>
+              </a:r>
+            </a:p>
+          </p:txBody>
+        </p:sp>
+        <p:sp>
+          <p:nvSpPr>
+            <p:cNvPr id="193" name="tx193"/>
+            <p:cNvSpPr/>
+            <p:nvPr/>
+          </p:nvSpPr>
+          <p:spPr>
+            <a:xfrm>
+              <a:off x="5147020" y="5693022"/>
+              <a:ext cx="158008" cy="101955"/>
+            </a:xfrm>
+            <a:prstGeom prst="rect">
+              <a:avLst/>
+            </a:prstGeom>
+            <a:noFill/>
+          </p:spPr>
+          <p:txBody>
+            <a:bodyPr lIns="0" rIns="0" tIns="0" bIns="0" anchorCtr="1" anchor="ctr" wrap="none"/>
+            <a:lstStyle/>
+            <a:p>
+              <a:pPr algn="l" marL="0" marR="0" indent="0">
+                <a:lnSpc>
+                  <a:spcPts val="1120"/>
+                </a:lnSpc>
+                <a:spcBef>
+                  <a:spcPts val="0"/>
+                </a:spcBef>
+                <a:spcAft>
+                  <a:spcPts val="0"/>
+                </a:spcAft>
+              </a:pPr>
+              <a:r>
+                <a:rPr sz="1120">
+                  <a:solidFill>
+                    <a:srgbClr val="4D4D4D">
+                      <a:alpha val="100000"/>
+                    </a:srgbClr>
+                  </a:solidFill>
+                  <a:latin typeface="Helvetica"/>
+                  <a:cs typeface="Helvetica"/>
+                </a:rPr>
+                <a:t>20</a:t>
+              </a:r>
+            </a:p>
+          </p:txBody>
+        </p:sp>
+        <p:sp>
+          <p:nvSpPr>
+            <p:cNvPr id="194" name="tx194"/>
+            <p:cNvSpPr/>
+            <p:nvPr/>
+          </p:nvSpPr>
+          <p:spPr>
+            <a:xfrm>
+              <a:off x="5668227" y="5693022"/>
+              <a:ext cx="158008" cy="101955"/>
+            </a:xfrm>
+            <a:prstGeom prst="rect">
+              <a:avLst/>
+            </a:prstGeom>
+            <a:noFill/>
+          </p:spPr>
+          <p:txBody>
+            <a:bodyPr lIns="0" rIns="0" tIns="0" bIns="0" anchorCtr="1" anchor="ctr" wrap="none"/>
+            <a:lstStyle/>
+            <a:p>
+              <a:pPr algn="l" marL="0" marR="0" indent="0">
+                <a:lnSpc>
+                  <a:spcPts val="1120"/>
+                </a:lnSpc>
+                <a:spcBef>
+                  <a:spcPts val="0"/>
+                </a:spcBef>
+                <a:spcAft>
+                  <a:spcPts val="0"/>
+                </a:spcAft>
+              </a:pPr>
+              <a:r>
+                <a:rPr sz="1120">
+                  <a:solidFill>
+                    <a:srgbClr val="4D4D4D">
+                      <a:alpha val="100000"/>
+                    </a:srgbClr>
+                  </a:solidFill>
+                  <a:latin typeface="Helvetica"/>
+                  <a:cs typeface="Helvetica"/>
+                </a:rPr>
+                <a:t>30</a:t>
+              </a:r>
+            </a:p>
+          </p:txBody>
+        </p:sp>
+        <p:sp>
+          <p:nvSpPr>
+            <p:cNvPr id="195" name="tx195"/>
+            <p:cNvSpPr/>
+            <p:nvPr/>
+          </p:nvSpPr>
+          <p:spPr>
+            <a:xfrm>
+              <a:off x="6189433" y="5693022"/>
+              <a:ext cx="158008" cy="101955"/>
+            </a:xfrm>
+            <a:prstGeom prst="rect">
+              <a:avLst/>
+            </a:prstGeom>
+            <a:noFill/>
+          </p:spPr>
+          <p:txBody>
+            <a:bodyPr lIns="0" rIns="0" tIns="0" bIns="0" anchorCtr="1" anchor="ctr" wrap="none"/>
+            <a:lstStyle/>
+            <a:p>
+              <a:pPr algn="l" marL="0" marR="0" indent="0">
+                <a:lnSpc>
+                  <a:spcPts val="1120"/>
+                </a:lnSpc>
+                <a:spcBef>
+                  <a:spcPts val="0"/>
+                </a:spcBef>
+                <a:spcAft>
+                  <a:spcPts val="0"/>
+                </a:spcAft>
+              </a:pPr>
+              <a:r>
+                <a:rPr sz="1120">
+                  <a:solidFill>
+                    <a:srgbClr val="4D4D4D">
+                      <a:alpha val="100000"/>
+                    </a:srgbClr>
+                  </a:solidFill>
+                  <a:latin typeface="Helvetica"/>
+                  <a:cs typeface="Helvetica"/>
+                </a:rPr>
+                <a:t>40</a:t>
+              </a:r>
+            </a:p>
+          </p:txBody>
+        </p:sp>
+        <p:sp>
+          <p:nvSpPr>
+            <p:cNvPr id="196" name="tx196"/>
+            <p:cNvSpPr/>
+            <p:nvPr/>
+          </p:nvSpPr>
+          <p:spPr>
+            <a:xfrm>
+              <a:off x="6710640" y="5693022"/>
               <a:ext cx="158008" cy="101955"/>
             </a:xfrm>
             <a:prstGeom prst="rect">
@@ -5211,13 +9546,151 @@
         </p:sp>
         <p:sp>
           <p:nvSpPr>
-            <p:cNvPr id="82" name="tx82"/>
-            <p:cNvSpPr/>
-            <p:nvPr/>
-          </p:nvSpPr>
-          <p:spPr>
-            <a:xfrm>
-              <a:off x="4025875" y="5870717"/>
+            <p:cNvPr id="197" name="tx197"/>
+            <p:cNvSpPr/>
+            <p:nvPr/>
+          </p:nvSpPr>
+          <p:spPr>
+            <a:xfrm>
+              <a:off x="7231847" y="5693022"/>
+              <a:ext cx="158008" cy="101955"/>
+            </a:xfrm>
+            <a:prstGeom prst="rect">
+              <a:avLst/>
+            </a:prstGeom>
+            <a:noFill/>
+          </p:spPr>
+          <p:txBody>
+            <a:bodyPr lIns="0" rIns="0" tIns="0" bIns="0" anchorCtr="1" anchor="ctr" wrap="none"/>
+            <a:lstStyle/>
+            <a:p>
+              <a:pPr algn="l" marL="0" marR="0" indent="0">
+                <a:lnSpc>
+                  <a:spcPts val="1120"/>
+                </a:lnSpc>
+                <a:spcBef>
+                  <a:spcPts val="0"/>
+                </a:spcBef>
+                <a:spcAft>
+                  <a:spcPts val="0"/>
+                </a:spcAft>
+              </a:pPr>
+              <a:r>
+                <a:rPr sz="1120">
+                  <a:solidFill>
+                    <a:srgbClr val="4D4D4D">
+                      <a:alpha val="100000"/>
+                    </a:srgbClr>
+                  </a:solidFill>
+                  <a:latin typeface="Helvetica"/>
+                  <a:cs typeface="Helvetica"/>
+                </a:rPr>
+                <a:t>60</a:t>
+              </a:r>
+            </a:p>
+          </p:txBody>
+        </p:sp>
+        <p:sp>
+          <p:nvSpPr>
+            <p:cNvPr id="198" name="tx198"/>
+            <p:cNvSpPr/>
+            <p:nvPr/>
+          </p:nvSpPr>
+          <p:spPr>
+            <a:xfrm>
+              <a:off x="7753054" y="5693022"/>
+              <a:ext cx="158008" cy="101955"/>
+            </a:xfrm>
+            <a:prstGeom prst="rect">
+              <a:avLst/>
+            </a:prstGeom>
+            <a:noFill/>
+          </p:spPr>
+          <p:txBody>
+            <a:bodyPr lIns="0" rIns="0" tIns="0" bIns="0" anchorCtr="1" anchor="ctr" wrap="none"/>
+            <a:lstStyle/>
+            <a:p>
+              <a:pPr algn="l" marL="0" marR="0" indent="0">
+                <a:lnSpc>
+                  <a:spcPts val="1120"/>
+                </a:lnSpc>
+                <a:spcBef>
+                  <a:spcPts val="0"/>
+                </a:spcBef>
+                <a:spcAft>
+                  <a:spcPts val="0"/>
+                </a:spcAft>
+              </a:pPr>
+              <a:r>
+                <a:rPr sz="1120">
+                  <a:solidFill>
+                    <a:srgbClr val="4D4D4D">
+                      <a:alpha val="100000"/>
+                    </a:srgbClr>
+                  </a:solidFill>
+                  <a:latin typeface="Helvetica"/>
+                  <a:cs typeface="Helvetica"/>
+                </a:rPr>
+                <a:t>70</a:t>
+              </a:r>
+            </a:p>
+          </p:txBody>
+        </p:sp>
+        <p:sp>
+          <p:nvSpPr>
+            <p:cNvPr id="199" name="tx199"/>
+            <p:cNvSpPr/>
+            <p:nvPr/>
+          </p:nvSpPr>
+          <p:spPr>
+            <a:xfrm>
+              <a:off x="8274260" y="5693022"/>
+              <a:ext cx="158008" cy="101955"/>
+            </a:xfrm>
+            <a:prstGeom prst="rect">
+              <a:avLst/>
+            </a:prstGeom>
+            <a:noFill/>
+          </p:spPr>
+          <p:txBody>
+            <a:bodyPr lIns="0" rIns="0" tIns="0" bIns="0" anchorCtr="1" anchor="ctr" wrap="none"/>
+            <a:lstStyle/>
+            <a:p>
+              <a:pPr algn="l" marL="0" marR="0" indent="0">
+                <a:lnSpc>
+                  <a:spcPts val="1120"/>
+                </a:lnSpc>
+                <a:spcBef>
+                  <a:spcPts val="0"/>
+                </a:spcBef>
+                <a:spcAft>
+                  <a:spcPts val="0"/>
+                </a:spcAft>
+              </a:pPr>
+              <a:r>
+                <a:rPr sz="1120">
+                  <a:solidFill>
+                    <a:srgbClr val="4D4D4D">
+                      <a:alpha val="100000"/>
+                    </a:srgbClr>
+                  </a:solidFill>
+                  <a:latin typeface="Helvetica"/>
+                  <a:cs typeface="Helvetica"/>
+                </a:rPr>
+                <a:t>80</a:t>
+              </a:r>
+            </a:p>
+          </p:txBody>
+        </p:sp>
+        <p:sp>
+          <p:nvSpPr>
+            <p:cNvPr id="200" name="tx200"/>
+            <p:cNvSpPr/>
+            <p:nvPr/>
+          </p:nvSpPr>
+          <p:spPr>
+            <a:xfrm>
+              <a:off x="3927120" y="5870717"/>
               <a:ext cx="1659636" cy="127558"/>
             </a:xfrm>
             <a:prstGeom prst="rect">
@@ -5257,7 +9730,7 @@
         </p:sp>
         <p:sp>
           <p:nvSpPr>
-            <p:cNvPr id="83" name="tx83"/>
+            <p:cNvPr id="201" name="tx201"/>
             <p:cNvSpPr/>
             <p:nvPr/>
           </p:nvSpPr>
@@ -5303,13 +9776,13 @@
         </p:sp>
         <p:sp>
           <p:nvSpPr>
-            <p:cNvPr id="84" name="tx84"/>
-            <p:cNvSpPr/>
-            <p:nvPr/>
-          </p:nvSpPr>
-          <p:spPr>
-            <a:xfrm>
-              <a:off x="1113155" y="1688767"/>
+            <p:cNvPr id="202" name="tx202"/>
+            <p:cNvSpPr/>
+            <p:nvPr/>
+          </p:nvSpPr>
+          <p:spPr>
+            <a:xfrm>
+              <a:off x="915645" y="1688767"/>
               <a:ext cx="6862663" cy="153070"/>
             </a:xfrm>
             <a:prstGeom prst="rect">
